--- a/output/wordlabs-kind-3day.pptx
+++ b/output/wordlabs-kind-3day.pptx
@@ -4240,7 +4240,7 @@
                 <a:ea typeface="Calibri" pitchFamily="34" charset="-122"/>
                 <a:cs typeface="Calibri" pitchFamily="34" charset="-120"/>
               </a:rPr>
-              <a:t>"caring, gentle, or type"</a:t>
+              <a:t>"friendly, caring, gentle"</a:t>
             </a:r>
             <a:endParaRPr lang="en-US" sz="2200" dirty="0"/>
           </a:p>
@@ -4279,7 +4279,7 @@
                 <a:ea typeface="Calibri" pitchFamily="34" charset="-122"/>
                 <a:cs typeface="Calibri" pitchFamily="34" charset="-120"/>
               </a:rPr>
-              <a:t>Origin: Latin: genus</a:t>
+              <a:t>Origin: Latin: natura</a:t>
             </a:r>
             <a:endParaRPr lang="en-US" sz="1300" dirty="0"/>
           </a:p>
@@ -5288,7 +5288,7 @@
                 <a:ea typeface="Calibri" pitchFamily="34" charset="-122"/>
                 <a:cs typeface="Calibri" pitchFamily="34" charset="-120"/>
               </a:rPr>
-              <a:t>Word Labs  •  wordlabs.app  •  Root: 'kind' = caring, gentle, or type</a:t>
+              <a:t>Word Labs  •  wordlabs.app  •  Root: 'kind' = friendly, caring, gentle</a:t>
             </a:r>
             <a:endParaRPr lang="en-US" sz="800" dirty="0"/>
           </a:p>
@@ -5622,7 +5622,7 @@
                 <a:ea typeface="Trebuchet MS" pitchFamily="34" charset="-122"/>
                 <a:cs typeface="Trebuchet MS" pitchFamily="34" charset="-120"/>
               </a:rPr>
-              <a:t>0</a:t>
+              <a:t>1</a:t>
             </a:r>
             <a:pPr algn="ctr" indent="0" marL="0">
               <a:buNone/>
@@ -5928,7 +5928,7 @@
                 <a:ea typeface="Calibri" pitchFamily="34" charset="-122"/>
                 <a:cs typeface="Calibri" pitchFamily="34" charset="-120"/>
               </a:rPr>
-              <a:t>Word Labs  •  wordlabs.app  •  Root: 'kind' = caring, gentle, or type</a:t>
+              <a:t>Word Labs  •  wordlabs.app  •  Root: 'kind' = friendly, caring, gentle</a:t>
             </a:r>
             <a:endParaRPr lang="en-US" sz="800" dirty="0"/>
           </a:p>
@@ -6040,7 +6040,7 @@
                 <a:ea typeface="Calibri" pitchFamily="34" charset="-122"/>
                 <a:cs typeface="Calibri" pitchFamily="34" charset="-120"/>
               </a:rPr>
-              <a:t>She acted so </a:t>
+              <a:t>She showed great </a:t>
             </a:r>
             <a:pPr algn="l" indent="0" marL="0">
               <a:buNone/>
@@ -6057,7 +6057,7 @@
                 <a:ea typeface="Calibri" pitchFamily="34" charset="-122"/>
                 <a:cs typeface="Calibri" pitchFamily="34" charset="-120"/>
               </a:rPr>
-              <a:t>kindly</a:t>
+              <a:t>kindness</a:t>
             </a:r>
             <a:pPr algn="l" indent="0" marL="0">
               <a:buNone/>
@@ -6071,7 +6071,7 @@
                 <a:ea typeface="Calibri" pitchFamily="34" charset="-122"/>
                 <a:cs typeface="Calibri" pitchFamily="34" charset="-120"/>
               </a:rPr>
-              <a:t> that everyone agreed she was the </a:t>
+              <a:t> to her new classmate, and everyone agreed she was the </a:t>
             </a:r>
             <a:pPr algn="l" indent="0" marL="0">
               <a:buNone/>
@@ -6102,7 +6102,7 @@
                 <a:ea typeface="Calibri" pitchFamily="34" charset="-122"/>
                 <a:cs typeface="Calibri" pitchFamily="34" charset="-120"/>
               </a:rPr>
-              <a:t> person in the whole school.</a:t>
+              <a:t> person in the school.</a:t>
             </a:r>
             <a:endParaRPr lang="en-US" sz="1800" dirty="0"/>
           </a:p>
@@ -6257,7 +6257,7 @@
                 <a:ea typeface="Trebuchet MS" pitchFamily="34" charset="-122"/>
                 <a:cs typeface="Trebuchet MS" pitchFamily="34" charset="-120"/>
               </a:rPr>
-              <a:t>kindly</a:t>
+              <a:t>kindness</a:t>
             </a:r>
             <a:endParaRPr lang="en-US" sz="1400" dirty="0"/>
           </a:p>
@@ -6716,7 +6716,7 @@
                 <a:ea typeface="Calibri" pitchFamily="34" charset="-122"/>
                 <a:cs typeface="Calibri" pitchFamily="34" charset="-120"/>
               </a:rPr>
-              <a:t>Word Labs  •  wordlabs.app  •  Root: 'kind' = caring, gentle, or type</a:t>
+              <a:t>Word Labs  •  wordlabs.app  •  Root: 'kind' = friendly, caring, gentle</a:t>
             </a:r>
             <a:endParaRPr lang="en-US" sz="800" dirty="0"/>
           </a:p>
@@ -6855,7 +6855,7 @@
                 <a:ea typeface="Trebuchet MS" pitchFamily="34" charset="-122"/>
                 <a:cs typeface="Trebuchet MS" pitchFamily="34" charset="-120"/>
               </a:rPr>
-              <a:t>kindly</a:t>
+              <a:t>kindness</a:t>
             </a:r>
             <a:endParaRPr lang="en-US" sz="2800" dirty="0"/>
           </a:p>
@@ -7543,7 +7543,7 @@
                 <a:ea typeface="Calibri" pitchFamily="34" charset="-122"/>
                 <a:cs typeface="Calibri" pitchFamily="34" charset="-120"/>
               </a:rPr>
-              <a:t>Word Labs  •  wordlabs.app  •  Root: 'kind' = caring, gentle, or type</a:t>
+              <a:t>Word Labs  •  wordlabs.app  •  Root: 'kind' = friendly, caring, gentle</a:t>
             </a:r>
             <a:endParaRPr lang="en-US" sz="800" dirty="0"/>
           </a:p>
@@ -7682,7 +7682,7 @@
                 <a:ea typeface="Trebuchet MS" pitchFamily="34" charset="-122"/>
                 <a:cs typeface="Trebuchet MS" pitchFamily="34" charset="-120"/>
               </a:rPr>
-              <a:t>kindly</a:t>
+              <a:t>kindness</a:t>
             </a:r>
             <a:endParaRPr lang="en-US" sz="2800" dirty="0"/>
           </a:p>
@@ -7933,7 +7933,7 @@
                 <a:ea typeface="Trebuchet MS" pitchFamily="34" charset="-122"/>
                 <a:cs typeface="Trebuchet MS" pitchFamily="34" charset="-120"/>
               </a:rPr>
-              <a:t>ly</a:t>
+              <a:t>ness</a:t>
             </a:r>
             <a:endParaRPr lang="en-US" sz="1300" dirty="0"/>
           </a:p>
@@ -7972,7 +7972,7 @@
                 <a:ea typeface="Calibri" pitchFamily="34" charset="-122"/>
                 <a:cs typeface="Calibri" pitchFamily="34" charset="-120"/>
               </a:rPr>
-              <a:t>in a way (makes an adverb)</a:t>
+              <a:t>quality or state of</a:t>
             </a:r>
             <a:endParaRPr lang="en-US" sz="850" dirty="0"/>
           </a:p>
@@ -8528,7 +8528,7 @@
                 <a:ea typeface="Calibri" pitchFamily="34" charset="-122"/>
                 <a:cs typeface="Calibri" pitchFamily="34" charset="-120"/>
               </a:rPr>
-              <a:t>Word Labs  •  wordlabs.app  •  Root: 'kind' = caring, gentle, or type</a:t>
+              <a:t>Word Labs  •  wordlabs.app  •  Root: 'kind' = friendly, caring, gentle</a:t>
             </a:r>
             <a:endParaRPr lang="en-US" sz="800" dirty="0"/>
           </a:p>
@@ -8667,7 +8667,7 @@
                 <a:ea typeface="Trebuchet MS" pitchFamily="34" charset="-122"/>
                 <a:cs typeface="Trebuchet MS" pitchFamily="34" charset="-120"/>
               </a:rPr>
-              <a:t>kindly</a:t>
+              <a:t>kindness</a:t>
             </a:r>
             <a:endParaRPr lang="en-US" sz="2800" dirty="0"/>
           </a:p>
@@ -8918,7 +8918,7 @@
                 <a:ea typeface="Trebuchet MS" pitchFamily="34" charset="-122"/>
                 <a:cs typeface="Trebuchet MS" pitchFamily="34" charset="-120"/>
               </a:rPr>
-              <a:t>ly</a:t>
+              <a:t>ness</a:t>
             </a:r>
             <a:endParaRPr lang="en-US" sz="1300" dirty="0"/>
           </a:p>
@@ -8957,7 +8957,7 @@
                 <a:ea typeface="Calibri" pitchFamily="34" charset="-122"/>
                 <a:cs typeface="Calibri" pitchFamily="34" charset="-120"/>
               </a:rPr>
-              <a:t>in a way (makes an adverb)</a:t>
+              <a:t>quality or state of</a:t>
             </a:r>
             <a:endParaRPr lang="en-US" sz="850" dirty="0"/>
           </a:p>
@@ -9221,7 +9221,7 @@
                 <a:ea typeface="Trebuchet MS" pitchFamily="34" charset="-122"/>
                 <a:cs typeface="Trebuchet MS" pitchFamily="34" charset="-120"/>
               </a:rPr>
-              <a:t>ly</a:t>
+              <a:t>ness</a:t>
             </a:r>
             <a:endParaRPr lang="en-US" sz="1400" dirty="0"/>
           </a:p>
@@ -9645,7 +9645,7 @@
                 <a:ea typeface="Calibri" pitchFamily="34" charset="-122"/>
                 <a:cs typeface="Calibri" pitchFamily="34" charset="-120"/>
               </a:rPr>
-              <a:t>Word Labs  •  wordlabs.app  •  Root: 'kind' = caring, gentle, or type</a:t>
+              <a:t>Word Labs  •  wordlabs.app  •  Root: 'kind' = friendly, caring, gentle</a:t>
             </a:r>
             <a:endParaRPr lang="en-US" sz="800" dirty="0"/>
           </a:p>
@@ -9784,7 +9784,7 @@
                 <a:ea typeface="Trebuchet MS" pitchFamily="34" charset="-122"/>
                 <a:cs typeface="Trebuchet MS" pitchFamily="34" charset="-120"/>
               </a:rPr>
-              <a:t>kindly</a:t>
+              <a:t>kindness</a:t>
             </a:r>
             <a:endParaRPr lang="en-US" sz="2800" dirty="0"/>
           </a:p>
@@ -10035,7 +10035,7 @@
                 <a:ea typeface="Trebuchet MS" pitchFamily="34" charset="-122"/>
                 <a:cs typeface="Trebuchet MS" pitchFamily="34" charset="-120"/>
               </a:rPr>
-              <a:t>ly</a:t>
+              <a:t>ness</a:t>
             </a:r>
             <a:endParaRPr lang="en-US" sz="1300" dirty="0"/>
           </a:p>
@@ -10074,7 +10074,7 @@
                 <a:ea typeface="Calibri" pitchFamily="34" charset="-122"/>
                 <a:cs typeface="Calibri" pitchFamily="34" charset="-120"/>
               </a:rPr>
-              <a:t>in a way (makes an adverb)</a:t>
+              <a:t>quality or state of</a:t>
             </a:r>
             <a:endParaRPr lang="en-US" sz="850" dirty="0"/>
           </a:p>
@@ -10338,7 +10338,7 @@
                 <a:ea typeface="Trebuchet MS" pitchFamily="34" charset="-122"/>
                 <a:cs typeface="Trebuchet MS" pitchFamily="34" charset="-120"/>
               </a:rPr>
-              <a:t>ly</a:t>
+              <a:t>ness</a:t>
             </a:r>
             <a:endParaRPr lang="en-US" sz="1400" dirty="0"/>
           </a:p>
@@ -10445,7 +10445,7 @@
         </p:nvSpPr>
         <p:spPr>
           <a:xfrm>
-            <a:off x="2427732" y="4169664"/>
+            <a:off x="2254649" y="4169664"/>
             <a:ext cx="685800" cy="475488"/>
           </a:xfrm>
           <a:prstGeom prst="rect">
@@ -10472,7 +10472,7 @@
         </p:nvSpPr>
         <p:spPr>
           <a:xfrm>
-            <a:off x="2427732" y="4169664"/>
+            <a:off x="2254649" y="4169664"/>
             <a:ext cx="685800" cy="475488"/>
           </a:xfrm>
           <a:prstGeom prst="rect">
@@ -10511,7 +10511,7 @@
         </p:nvSpPr>
         <p:spPr>
           <a:xfrm>
-            <a:off x="3639312" y="4169664"/>
+            <a:off x="3293146" y="4169664"/>
             <a:ext cx="685800" cy="475488"/>
           </a:xfrm>
           <a:prstGeom prst="rect">
@@ -10538,7 +10538,7 @@
         </p:nvSpPr>
         <p:spPr>
           <a:xfrm>
-            <a:off x="3639312" y="4169664"/>
+            <a:off x="3293146" y="4169664"/>
             <a:ext cx="685800" cy="475488"/>
           </a:xfrm>
           <a:prstGeom prst="rect">
@@ -10577,7 +10577,7 @@
         </p:nvSpPr>
         <p:spPr>
           <a:xfrm>
-            <a:off x="4850892" y="4169664"/>
+            <a:off x="4331643" y="4169664"/>
             <a:ext cx="685800" cy="475488"/>
           </a:xfrm>
           <a:prstGeom prst="rect">
@@ -10604,7 +10604,7 @@
         </p:nvSpPr>
         <p:spPr>
           <a:xfrm>
-            <a:off x="4850892" y="4169664"/>
+            <a:off x="4331643" y="4169664"/>
             <a:ext cx="685800" cy="475488"/>
           </a:xfrm>
           <a:prstGeom prst="rect">
@@ -10643,7 +10643,7 @@
         </p:nvSpPr>
         <p:spPr>
           <a:xfrm>
-            <a:off x="6062472" y="4169664"/>
+            <a:off x="5370141" y="4169664"/>
             <a:ext cx="685800" cy="475488"/>
           </a:xfrm>
           <a:prstGeom prst="rect">
@@ -10670,7 +10670,7 @@
         </p:nvSpPr>
         <p:spPr>
           <a:xfrm>
-            <a:off x="6062472" y="4169664"/>
+            <a:off x="5370141" y="4169664"/>
             <a:ext cx="685800" cy="475488"/>
           </a:xfrm>
           <a:prstGeom prst="rect">
@@ -10695,7 +10695,7 @@
                 <a:ea typeface="Trebuchet MS" pitchFamily="34" charset="-122"/>
                 <a:cs typeface="Trebuchet MS" pitchFamily="34" charset="-120"/>
               </a:rPr>
-              <a:t>l</a:t>
+              <a:t>n</a:t>
             </a:r>
             <a:endParaRPr lang="en-US" sz="900" dirty="0"/>
           </a:p>
@@ -10709,7 +10709,7 @@
         </p:nvSpPr>
         <p:spPr>
           <a:xfrm>
-            <a:off x="7274052" y="4169664"/>
+            <a:off x="6408638" y="4169664"/>
             <a:ext cx="685800" cy="475488"/>
           </a:xfrm>
           <a:prstGeom prst="rect">
@@ -10736,7 +10736,7 @@
         </p:nvSpPr>
         <p:spPr>
           <a:xfrm>
-            <a:off x="7274052" y="4169664"/>
+            <a:off x="6408638" y="4169664"/>
             <a:ext cx="685800" cy="475488"/>
           </a:xfrm>
           <a:prstGeom prst="rect">
@@ -10761,7 +10761,73 @@
                 <a:ea typeface="Trebuchet MS" pitchFamily="34" charset="-122"/>
                 <a:cs typeface="Trebuchet MS" pitchFamily="34" charset="-120"/>
               </a:rPr>
-              <a:t>y</a:t>
+              <a:t>e</a:t>
+            </a:r>
+            <a:endParaRPr lang="en-US" sz="900" dirty="0"/>
+          </a:p>
+        </p:txBody>
+      </p:sp>
+      <p:sp>
+        <p:nvSpPr>
+          <p:cNvPr id="43" name="Shape 41"/>
+          <p:cNvSpPr/>
+          <p:nvPr/>
+        </p:nvSpPr>
+        <p:spPr>
+          <a:xfrm>
+            <a:off x="7447135" y="4169664"/>
+            <a:ext cx="685800" cy="475488"/>
+          </a:xfrm>
+          <a:prstGeom prst="rect">
+            <a:avLst>
+              <a:gd name="adj" fmla="val 7692"/>
+            </a:avLst>
+          </a:prstGeom>
+          <a:solidFill>
+            <a:srgbClr val="FFFFFF"/>
+          </a:solidFill>
+          <a:ln w="12700">
+            <a:solidFill>
+              <a:srgbClr val="DB2777"/>
+            </a:solidFill>
+            <a:prstDash val="solid"/>
+          </a:ln>
+        </p:spPr>
+      </p:sp>
+      <p:sp>
+        <p:nvSpPr>
+          <p:cNvPr id="44" name="Text 42"/>
+          <p:cNvSpPr/>
+          <p:nvPr/>
+        </p:nvSpPr>
+        <p:spPr>
+          <a:xfrm>
+            <a:off x="7447135" y="4169664"/>
+            <a:ext cx="685800" cy="475488"/>
+          </a:xfrm>
+          <a:prstGeom prst="rect">
+            <a:avLst/>
+          </a:prstGeom>
+          <a:noFill/>
+          <a:ln/>
+        </p:spPr>
+        <p:txBody>
+          <a:bodyPr wrap="square" lIns="0" tIns="0" rIns="0" bIns="0" rtlCol="0" anchor="ctr"/>
+          <a:lstStyle/>
+          <a:p>
+            <a:pPr algn="ctr" indent="0" marL="0">
+              <a:buNone/>
+            </a:pPr>
+            <a:r>
+              <a:rPr lang="en-US" sz="900" b="1" dirty="0">
+                <a:solidFill>
+                  <a:srgbClr val="9D174D"/>
+                </a:solidFill>
+                <a:latin typeface="Trebuchet MS" pitchFamily="34" charset="0"/>
+                <a:ea typeface="Trebuchet MS" pitchFamily="34" charset="-122"/>
+                <a:cs typeface="Trebuchet MS" pitchFamily="34" charset="-120"/>
+              </a:rPr>
+              <a:t>ss</a:t>
             </a:r>
             <a:endParaRPr lang="en-US" sz="900" dirty="0"/>
           </a:p>
@@ -11053,7 +11119,7 @@
                 <a:ea typeface="Calibri" pitchFamily="34" charset="-122"/>
                 <a:cs typeface="Calibri" pitchFamily="34" charset="-120"/>
               </a:rPr>
-              <a:t>Word Labs  •  wordlabs.app  •  Root: 'kind' = caring, gentle, or type</a:t>
+              <a:t>Word Labs  •  wordlabs.app  •  Root: 'kind' = friendly, caring, gentle</a:t>
             </a:r>
             <a:endParaRPr lang="en-US" sz="800" dirty="0"/>
           </a:p>
@@ -11880,7 +11946,7 @@
                 <a:ea typeface="Calibri" pitchFamily="34" charset="-122"/>
                 <a:cs typeface="Calibri" pitchFamily="34" charset="-120"/>
               </a:rPr>
-              <a:t>Word Labs  •  wordlabs.app  •  Root: 'kind' = caring, gentle, or type</a:t>
+              <a:t>Word Labs  •  wordlabs.app  •  Root: 'kind' = friendly, caring, gentle</a:t>
             </a:r>
             <a:endParaRPr lang="en-US" sz="800" dirty="0"/>
           </a:p>
@@ -12309,7 +12375,7 @@
                 <a:ea typeface="Calibri" pitchFamily="34" charset="-122"/>
                 <a:cs typeface="Calibri" pitchFamily="34" charset="-120"/>
               </a:rPr>
-              <a:t>the most (superlative)</a:t>
+              <a:t>most (superlative)</a:t>
             </a:r>
             <a:endParaRPr lang="en-US" sz="850" dirty="0"/>
           </a:p>
@@ -12865,7 +12931,7 @@
                 <a:ea typeface="Calibri" pitchFamily="34" charset="-122"/>
                 <a:cs typeface="Calibri" pitchFamily="34" charset="-120"/>
               </a:rPr>
-              <a:t>Word Labs  •  wordlabs.app  •  Root: 'kind' = caring, gentle, or type</a:t>
+              <a:t>Word Labs  •  wordlabs.app  •  Root: 'kind' = friendly, caring, gentle</a:t>
             </a:r>
             <a:endParaRPr lang="en-US" sz="800" dirty="0"/>
           </a:p>
@@ -13294,7 +13360,7 @@
                 <a:ea typeface="Calibri" pitchFamily="34" charset="-122"/>
                 <a:cs typeface="Calibri" pitchFamily="34" charset="-120"/>
               </a:rPr>
-              <a:t>the most (superlative)</a:t>
+              <a:t>most (superlative)</a:t>
             </a:r>
             <a:endParaRPr lang="en-US" sz="850" dirty="0"/>
           </a:p>
@@ -13891,7 +13957,7 @@
                 <a:ea typeface="Calibri" pitchFamily="34" charset="-122"/>
                 <a:cs typeface="Calibri" pitchFamily="34" charset="-120"/>
               </a:rPr>
-              <a:t>Root 'kind' — caring, gentle, or type</a:t>
+              <a:t>Root 'kind' — friendly, caring, gentle</a:t>
             </a:r>
             <a:endParaRPr lang="en-US" sz="1600" dirty="0"/>
           </a:p>
@@ -14247,7 +14313,7 @@
                 <a:ea typeface="Calibri" pitchFamily="34" charset="-122"/>
                 <a:cs typeface="Calibri" pitchFamily="34" charset="-120"/>
               </a:rPr>
-              <a:t>Word Labs  •  wordlabs.app  •  Root: 'kind' = caring, gentle, or type</a:t>
+              <a:t>Word Labs  •  wordlabs.app  •  Root: 'kind' = friendly, caring, gentle</a:t>
             </a:r>
             <a:endParaRPr lang="en-US" sz="800" dirty="0"/>
           </a:p>
@@ -14676,7 +14742,7 @@
                 <a:ea typeface="Calibri" pitchFamily="34" charset="-122"/>
                 <a:cs typeface="Calibri" pitchFamily="34" charset="-120"/>
               </a:rPr>
-              <a:t>the most (superlative)</a:t>
+              <a:t>most (superlative)</a:t>
             </a:r>
             <a:endParaRPr lang="en-US" sz="850" dirty="0"/>
           </a:p>
@@ -16003,7 +16069,7 @@
                 <a:ea typeface="Calibri" pitchFamily="34" charset="-122"/>
                 <a:cs typeface="Calibri" pitchFamily="34" charset="-120"/>
               </a:rPr>
-              <a:t>Word Labs  •  wordlabs.app  •  Root: 'kind' = caring, gentle, or type</a:t>
+              <a:t>Word Labs  •  wordlabs.app  •  Root: 'kind' = friendly, caring, gentle</a:t>
             </a:r>
             <a:endParaRPr lang="en-US" sz="800" dirty="0"/>
           </a:p>
@@ -16643,7 +16709,7 @@
                 <a:ea typeface="Calibri" pitchFamily="34" charset="-122"/>
                 <a:cs typeface="Calibri" pitchFamily="34" charset="-120"/>
               </a:rPr>
-              <a:t>Word Labs  •  wordlabs.app  •  Root: 'kind' = caring, gentle, or type</a:t>
+              <a:t>Word Labs  •  wordlabs.app  •  Root: 'kind' = friendly, caring, gentle</a:t>
             </a:r>
             <a:endParaRPr lang="en-US" sz="800" dirty="0"/>
           </a:p>
@@ -16755,7 +16821,7 @@
                 <a:ea typeface="Calibri" pitchFamily="34" charset="-122"/>
                 <a:cs typeface="Calibri" pitchFamily="34" charset="-120"/>
               </a:rPr>
-              <a:t>Despite his </a:t>
+              <a:t>Although he acted </a:t>
             </a:r>
             <a:pPr algn="l" indent="0" marL="0">
               <a:buNone/>
@@ -16772,7 +16838,7 @@
                 <a:ea typeface="Calibri" pitchFamily="34" charset="-122"/>
                 <a:cs typeface="Calibri" pitchFamily="34" charset="-120"/>
               </a:rPr>
-              <a:t>unkind</a:t>
+              <a:t>unkindly</a:t>
             </a:r>
             <a:pPr algn="l" indent="0" marL="0">
               <a:buNone/>
@@ -16786,7 +16852,7 @@
                 <a:ea typeface="Calibri" pitchFamily="34" charset="-122"/>
                 <a:cs typeface="Calibri" pitchFamily="34" charset="-120"/>
               </a:rPr>
-              <a:t> words, her </a:t>
+              <a:t> at first, his </a:t>
             </a:r>
             <a:pPr algn="l" indent="0" marL="0">
               <a:buNone/>
@@ -16803,7 +16869,7 @@
                 <a:ea typeface="Calibri" pitchFamily="34" charset="-122"/>
                 <a:cs typeface="Calibri" pitchFamily="34" charset="-120"/>
               </a:rPr>
-              <a:t>kindness</a:t>
+              <a:t>kindred</a:t>
             </a:r>
             <a:pPr algn="l" indent="0" marL="0">
               <a:buNone/>
@@ -16817,7 +16883,7 @@
                 <a:ea typeface="Calibri" pitchFamily="34" charset="-122"/>
                 <a:cs typeface="Calibri" pitchFamily="34" charset="-120"/>
               </a:rPr>
-              <a:t> and </a:t>
+              <a:t> spirit soon showed, and he became the </a:t>
             </a:r>
             <a:pPr algn="l" indent="0" marL="0">
               <a:buNone/>
@@ -16834,7 +16900,7 @@
                 <a:ea typeface="Calibri" pitchFamily="34" charset="-122"/>
                 <a:cs typeface="Calibri" pitchFamily="34" charset="-120"/>
               </a:rPr>
-              <a:t>kindhearted</a:t>
+              <a:t>kinder</a:t>
             </a:r>
             <a:pPr algn="l" indent="0" marL="0">
               <a:buNone/>
@@ -16848,7 +16914,7 @@
                 <a:ea typeface="Calibri" pitchFamily="34" charset="-122"/>
                 <a:cs typeface="Calibri" pitchFamily="34" charset="-120"/>
               </a:rPr>
-              <a:t> nature won everyone's respect.</a:t>
+              <a:t> of the two brothers.</a:t>
             </a:r>
             <a:endParaRPr lang="en-US" sz="1800" dirty="0"/>
           </a:p>
@@ -17003,7 +17069,7 @@
                 <a:ea typeface="Trebuchet MS" pitchFamily="34" charset="-122"/>
                 <a:cs typeface="Trebuchet MS" pitchFamily="34" charset="-120"/>
               </a:rPr>
-              <a:t>unkind</a:t>
+              <a:t>unkindly</a:t>
             </a:r>
             <a:endParaRPr lang="en-US" sz="1400" dirty="0"/>
           </a:p>
@@ -17131,7 +17197,7 @@
                 <a:ea typeface="Trebuchet MS" pitchFamily="34" charset="-122"/>
                 <a:cs typeface="Trebuchet MS" pitchFamily="34" charset="-120"/>
               </a:rPr>
-              <a:t>kindness</a:t>
+              <a:t>kindred</a:t>
             </a:r>
             <a:endParaRPr lang="en-US" sz="1400" dirty="0"/>
           </a:p>
@@ -17259,7 +17325,7 @@
                 <a:ea typeface="Trebuchet MS" pitchFamily="34" charset="-122"/>
                 <a:cs typeface="Trebuchet MS" pitchFamily="34" charset="-120"/>
               </a:rPr>
-              <a:t>kindhearted</a:t>
+              <a:t>kinder</a:t>
             </a:r>
             <a:endParaRPr lang="en-US" sz="1400" dirty="0"/>
           </a:p>
@@ -17590,7 +17656,7 @@
                 <a:ea typeface="Calibri" pitchFamily="34" charset="-122"/>
                 <a:cs typeface="Calibri" pitchFamily="34" charset="-120"/>
               </a:rPr>
-              <a:t>Word Labs  •  wordlabs.app  •  Root: 'kind' = caring, gentle, or type</a:t>
+              <a:t>Word Labs  •  wordlabs.app  •  Root: 'kind' = friendly, caring, gentle</a:t>
             </a:r>
             <a:endParaRPr lang="en-US" sz="800" dirty="0"/>
           </a:p>
@@ -17729,7 +17795,7 @@
                 <a:ea typeface="Trebuchet MS" pitchFamily="34" charset="-122"/>
                 <a:cs typeface="Trebuchet MS" pitchFamily="34" charset="-120"/>
               </a:rPr>
-              <a:t>unkind</a:t>
+              <a:t>unkindly</a:t>
             </a:r>
             <a:endParaRPr lang="en-US" sz="2800" dirty="0"/>
           </a:p>
@@ -18417,7 +18483,7 @@
                 <a:ea typeface="Calibri" pitchFamily="34" charset="-122"/>
                 <a:cs typeface="Calibri" pitchFamily="34" charset="-120"/>
               </a:rPr>
-              <a:t>Word Labs  •  wordlabs.app  •  Root: 'kind' = caring, gentle, or type</a:t>
+              <a:t>Word Labs  •  wordlabs.app  •  Root: 'kind' = friendly, caring, gentle</a:t>
             </a:r>
             <a:endParaRPr lang="en-US" sz="800" dirty="0"/>
           </a:p>
@@ -18556,7 +18622,7 @@
                 <a:ea typeface="Trebuchet MS" pitchFamily="34" charset="-122"/>
                 <a:cs typeface="Trebuchet MS" pitchFamily="34" charset="-120"/>
               </a:rPr>
-              <a:t>unkind</a:t>
+              <a:t>unkindly</a:t>
             </a:r>
             <a:endParaRPr lang="en-US" sz="2800" dirty="0"/>
           </a:p>
@@ -18636,7 +18702,7 @@
         </p:nvSpPr>
         <p:spPr>
           <a:xfrm>
-            <a:off x="2938272" y="2258568"/>
+            <a:off x="2221992" y="2258568"/>
             <a:ext cx="1828800" cy="292608"/>
           </a:xfrm>
           <a:prstGeom prst="rect">
@@ -18670,7 +18736,7 @@
         </p:nvSpPr>
         <p:spPr>
           <a:xfrm>
-            <a:off x="2938272" y="2258568"/>
+            <a:off x="2221992" y="2258568"/>
             <a:ext cx="1828800" cy="292608"/>
           </a:xfrm>
           <a:prstGeom prst="rect">
@@ -18709,7 +18775,7 @@
         </p:nvSpPr>
         <p:spPr>
           <a:xfrm>
-            <a:off x="2938272" y="2569464"/>
+            <a:off x="2221992" y="2569464"/>
             <a:ext cx="1828800" cy="201168"/>
           </a:xfrm>
           <a:prstGeom prst="rect">
@@ -18748,7 +18814,7 @@
         </p:nvSpPr>
         <p:spPr>
           <a:xfrm>
-            <a:off x="5803392" y="2258568"/>
+            <a:off x="4370832" y="2258568"/>
             <a:ext cx="1828800" cy="292608"/>
           </a:xfrm>
           <a:prstGeom prst="rect">
@@ -18782,7 +18848,7 @@
         </p:nvSpPr>
         <p:spPr>
           <a:xfrm>
-            <a:off x="5803392" y="2258568"/>
+            <a:off x="4370832" y="2258568"/>
             <a:ext cx="1828800" cy="292608"/>
           </a:xfrm>
           <a:prstGeom prst="rect">
@@ -18821,7 +18887,7 @@
         </p:nvSpPr>
         <p:spPr>
           <a:xfrm>
-            <a:off x="5803392" y="2569464"/>
+            <a:off x="4370832" y="2569464"/>
             <a:ext cx="1828800" cy="201168"/>
           </a:xfrm>
           <a:prstGeom prst="rect">
@@ -18860,6 +18926,118 @@
         </p:nvSpPr>
         <p:spPr>
           <a:xfrm>
+            <a:off x="6519672" y="2258568"/>
+            <a:ext cx="1828800" cy="292608"/>
+          </a:xfrm>
+          <a:prstGeom prst="rect">
+            <a:avLst>
+              <a:gd name="adj" fmla="val 25000"/>
+            </a:avLst>
+          </a:prstGeom>
+          <a:solidFill>
+            <a:srgbClr val="FCE7F3"/>
+          </a:solidFill>
+          <a:ln w="19050">
+            <a:solidFill>
+              <a:srgbClr val="DB2777"/>
+            </a:solidFill>
+            <a:prstDash val="solid"/>
+          </a:ln>
+          <a:effectLst>
+            <a:outerShdw sx="100000" sy="100000" kx="0" ky="0" algn="bl" rotWithShape="0" blurRad="101600" dist="38100" dir="8100000">
+              <a:srgbClr val="000000">
+                <a:alpha val="12000"/>
+              </a:srgbClr>
+            </a:outerShdw>
+          </a:effectLst>
+        </p:spPr>
+      </p:sp>
+      <p:sp>
+        <p:nvSpPr>
+          <p:cNvPr id="23" name="Text 21"/>
+          <p:cNvSpPr/>
+          <p:nvPr/>
+        </p:nvSpPr>
+        <p:spPr>
+          <a:xfrm>
+            <a:off x="6519672" y="2258568"/>
+            <a:ext cx="1828800" cy="292608"/>
+          </a:xfrm>
+          <a:prstGeom prst="rect">
+            <a:avLst/>
+          </a:prstGeom>
+          <a:noFill/>
+          <a:ln/>
+        </p:spPr>
+        <p:txBody>
+          <a:bodyPr wrap="square" lIns="0" tIns="0" rIns="0" bIns="0" rtlCol="0" anchor="ctr"/>
+          <a:lstStyle/>
+          <a:p>
+            <a:pPr algn="ctr" indent="0" marL="0">
+              <a:buNone/>
+            </a:pPr>
+            <a:r>
+              <a:rPr lang="en-US" sz="1300" b="1" dirty="0">
+                <a:solidFill>
+                  <a:srgbClr val="9D174D"/>
+                </a:solidFill>
+                <a:latin typeface="Trebuchet MS" pitchFamily="34" charset="0"/>
+                <a:ea typeface="Trebuchet MS" pitchFamily="34" charset="-122"/>
+                <a:cs typeface="Trebuchet MS" pitchFamily="34" charset="-120"/>
+              </a:rPr>
+              <a:t>ly</a:t>
+            </a:r>
+            <a:endParaRPr lang="en-US" sz="1300" dirty="0"/>
+          </a:p>
+        </p:txBody>
+      </p:sp>
+      <p:sp>
+        <p:nvSpPr>
+          <p:cNvPr id="24" name="Text 22"/>
+          <p:cNvSpPr/>
+          <p:nvPr/>
+        </p:nvSpPr>
+        <p:spPr>
+          <a:xfrm>
+            <a:off x="6519672" y="2569464"/>
+            <a:ext cx="1828800" cy="201168"/>
+          </a:xfrm>
+          <a:prstGeom prst="rect">
+            <a:avLst/>
+          </a:prstGeom>
+          <a:noFill/>
+          <a:ln/>
+        </p:spPr>
+        <p:txBody>
+          <a:bodyPr wrap="square" lIns="0" tIns="0" rIns="0" bIns="0" rtlCol="0" anchor="t"/>
+          <a:lstStyle/>
+          <a:p>
+            <a:pPr algn="ctr" indent="0" marL="0">
+              <a:buNone/>
+            </a:pPr>
+            <a:r>
+              <a:rPr lang="en-US" sz="850" dirty="0">
+                <a:solidFill>
+                  <a:srgbClr val="475569"/>
+                </a:solidFill>
+                <a:latin typeface="Calibri" pitchFamily="34" charset="0"/>
+                <a:ea typeface="Calibri" pitchFamily="34" charset="-122"/>
+                <a:cs typeface="Calibri" pitchFamily="34" charset="-120"/>
+              </a:rPr>
+              <a:t>in a certain way</a:t>
+            </a:r>
+            <a:endParaRPr lang="en-US" sz="850" dirty="0"/>
+          </a:p>
+        </p:txBody>
+      </p:sp>
+      <p:sp>
+        <p:nvSpPr>
+          <p:cNvPr id="25" name="Shape 23"/>
+          <p:cNvSpPr/>
+          <p:nvPr/>
+        </p:nvSpPr>
+        <p:spPr>
+          <a:xfrm>
             <a:off x="365760" y="3273552"/>
             <a:ext cx="1371600" cy="658368"/>
           </a:xfrm>
@@ -18881,7 +19059,7 @@
       </p:sp>
       <p:sp>
         <p:nvSpPr>
-          <p:cNvPr id="23" name="Text 21"/>
+          <p:cNvPr id="26" name="Text 24"/>
           <p:cNvSpPr/>
           <p:nvPr/>
         </p:nvSpPr>
@@ -18920,7 +19098,7 @@
       </p:sp>
       <p:sp>
         <p:nvSpPr>
-          <p:cNvPr id="24" name="Shape 22"/>
+          <p:cNvPr id="27" name="Shape 25"/>
           <p:cNvSpPr/>
           <p:nvPr/>
         </p:nvSpPr>
@@ -18947,7 +19125,7 @@
       </p:sp>
       <p:sp>
         <p:nvSpPr>
-          <p:cNvPr id="25" name="Text 23"/>
+          <p:cNvPr id="28" name="Text 26"/>
           <p:cNvSpPr/>
           <p:nvPr/>
         </p:nvSpPr>
@@ -18986,7 +19164,7 @@
       </p:sp>
       <p:sp>
         <p:nvSpPr>
-          <p:cNvPr id="26" name="Shape 24"/>
+          <p:cNvPr id="29" name="Shape 27"/>
           <p:cNvSpPr/>
           <p:nvPr/>
         </p:nvSpPr>
@@ -19013,7 +19191,7 @@
       </p:sp>
       <p:sp>
         <p:nvSpPr>
-          <p:cNvPr id="27" name="Text 25"/>
+          <p:cNvPr id="30" name="Text 28"/>
           <p:cNvSpPr/>
           <p:nvPr/>
         </p:nvSpPr>
@@ -19052,7 +19230,7 @@
       </p:sp>
       <p:sp>
         <p:nvSpPr>
-          <p:cNvPr id="28" name="Shape 26"/>
+          <p:cNvPr id="31" name="Shape 29"/>
           <p:cNvSpPr/>
           <p:nvPr/>
         </p:nvSpPr>
@@ -19079,7 +19257,7 @@
       </p:sp>
       <p:sp>
         <p:nvSpPr>
-          <p:cNvPr id="29" name="Text 27"/>
+          <p:cNvPr id="32" name="Text 30"/>
           <p:cNvSpPr/>
           <p:nvPr/>
         </p:nvSpPr>
@@ -19402,7 +19580,7 @@
                 <a:ea typeface="Calibri" pitchFamily="34" charset="-122"/>
                 <a:cs typeface="Calibri" pitchFamily="34" charset="-120"/>
               </a:rPr>
-              <a:t>Word Labs  •  wordlabs.app  •  Root: 'kind' = caring, gentle, or type</a:t>
+              <a:t>Word Labs  •  wordlabs.app  •  Root: 'kind' = friendly, caring, gentle</a:t>
             </a:r>
             <a:endParaRPr lang="en-US" sz="800" dirty="0"/>
           </a:p>
@@ -19541,7 +19719,7 @@
                 <a:ea typeface="Trebuchet MS" pitchFamily="34" charset="-122"/>
                 <a:cs typeface="Trebuchet MS" pitchFamily="34" charset="-120"/>
               </a:rPr>
-              <a:t>unkind</a:t>
+              <a:t>unkindly</a:t>
             </a:r>
             <a:endParaRPr lang="en-US" sz="2800" dirty="0"/>
           </a:p>
@@ -19621,7 +19799,7 @@
         </p:nvSpPr>
         <p:spPr>
           <a:xfrm>
-            <a:off x="2938272" y="2258568"/>
+            <a:off x="2221992" y="2258568"/>
             <a:ext cx="1828800" cy="292608"/>
           </a:xfrm>
           <a:prstGeom prst="rect">
@@ -19655,7 +19833,7 @@
         </p:nvSpPr>
         <p:spPr>
           <a:xfrm>
-            <a:off x="2938272" y="2258568"/>
+            <a:off x="2221992" y="2258568"/>
             <a:ext cx="1828800" cy="292608"/>
           </a:xfrm>
           <a:prstGeom prst="rect">
@@ -19694,7 +19872,7 @@
         </p:nvSpPr>
         <p:spPr>
           <a:xfrm>
-            <a:off x="2938272" y="2569464"/>
+            <a:off x="2221992" y="2569464"/>
             <a:ext cx="1828800" cy="201168"/>
           </a:xfrm>
           <a:prstGeom prst="rect">
@@ -19733,7 +19911,7 @@
         </p:nvSpPr>
         <p:spPr>
           <a:xfrm>
-            <a:off x="5803392" y="2258568"/>
+            <a:off x="4370832" y="2258568"/>
             <a:ext cx="1828800" cy="292608"/>
           </a:xfrm>
           <a:prstGeom prst="rect">
@@ -19767,7 +19945,7 @@
         </p:nvSpPr>
         <p:spPr>
           <a:xfrm>
-            <a:off x="5803392" y="2258568"/>
+            <a:off x="4370832" y="2258568"/>
             <a:ext cx="1828800" cy="292608"/>
           </a:xfrm>
           <a:prstGeom prst="rect">
@@ -19806,7 +19984,7 @@
         </p:nvSpPr>
         <p:spPr>
           <a:xfrm>
-            <a:off x="5803392" y="2569464"/>
+            <a:off x="4370832" y="2569464"/>
             <a:ext cx="1828800" cy="201168"/>
           </a:xfrm>
           <a:prstGeom prst="rect">
@@ -19845,6 +20023,118 @@
         </p:nvSpPr>
         <p:spPr>
           <a:xfrm>
+            <a:off x="6519672" y="2258568"/>
+            <a:ext cx="1828800" cy="292608"/>
+          </a:xfrm>
+          <a:prstGeom prst="rect">
+            <a:avLst>
+              <a:gd name="adj" fmla="val 25000"/>
+            </a:avLst>
+          </a:prstGeom>
+          <a:solidFill>
+            <a:srgbClr val="FCE7F3"/>
+          </a:solidFill>
+          <a:ln w="19050">
+            <a:solidFill>
+              <a:srgbClr val="DB2777"/>
+            </a:solidFill>
+            <a:prstDash val="solid"/>
+          </a:ln>
+          <a:effectLst>
+            <a:outerShdw sx="100000" sy="100000" kx="0" ky="0" algn="bl" rotWithShape="0" blurRad="101600" dist="38100" dir="8100000">
+              <a:srgbClr val="000000">
+                <a:alpha val="12000"/>
+              </a:srgbClr>
+            </a:outerShdw>
+          </a:effectLst>
+        </p:spPr>
+      </p:sp>
+      <p:sp>
+        <p:nvSpPr>
+          <p:cNvPr id="23" name="Text 21"/>
+          <p:cNvSpPr/>
+          <p:nvPr/>
+        </p:nvSpPr>
+        <p:spPr>
+          <a:xfrm>
+            <a:off x="6519672" y="2258568"/>
+            <a:ext cx="1828800" cy="292608"/>
+          </a:xfrm>
+          <a:prstGeom prst="rect">
+            <a:avLst/>
+          </a:prstGeom>
+          <a:noFill/>
+          <a:ln/>
+        </p:spPr>
+        <p:txBody>
+          <a:bodyPr wrap="square" lIns="0" tIns="0" rIns="0" bIns="0" rtlCol="0" anchor="ctr"/>
+          <a:lstStyle/>
+          <a:p>
+            <a:pPr algn="ctr" indent="0" marL="0">
+              <a:buNone/>
+            </a:pPr>
+            <a:r>
+              <a:rPr lang="en-US" sz="1300" b="1" dirty="0">
+                <a:solidFill>
+                  <a:srgbClr val="9D174D"/>
+                </a:solidFill>
+                <a:latin typeface="Trebuchet MS" pitchFamily="34" charset="0"/>
+                <a:ea typeface="Trebuchet MS" pitchFamily="34" charset="-122"/>
+                <a:cs typeface="Trebuchet MS" pitchFamily="34" charset="-120"/>
+              </a:rPr>
+              <a:t>ly</a:t>
+            </a:r>
+            <a:endParaRPr lang="en-US" sz="1300" dirty="0"/>
+          </a:p>
+        </p:txBody>
+      </p:sp>
+      <p:sp>
+        <p:nvSpPr>
+          <p:cNvPr id="24" name="Text 22"/>
+          <p:cNvSpPr/>
+          <p:nvPr/>
+        </p:nvSpPr>
+        <p:spPr>
+          <a:xfrm>
+            <a:off x="6519672" y="2569464"/>
+            <a:ext cx="1828800" cy="201168"/>
+          </a:xfrm>
+          <a:prstGeom prst="rect">
+            <a:avLst/>
+          </a:prstGeom>
+          <a:noFill/>
+          <a:ln/>
+        </p:spPr>
+        <p:txBody>
+          <a:bodyPr wrap="square" lIns="0" tIns="0" rIns="0" bIns="0" rtlCol="0" anchor="t"/>
+          <a:lstStyle/>
+          <a:p>
+            <a:pPr algn="ctr" indent="0" marL="0">
+              <a:buNone/>
+            </a:pPr>
+            <a:r>
+              <a:rPr lang="en-US" sz="850" dirty="0">
+                <a:solidFill>
+                  <a:srgbClr val="475569"/>
+                </a:solidFill>
+                <a:latin typeface="Calibri" pitchFamily="34" charset="0"/>
+                <a:ea typeface="Calibri" pitchFamily="34" charset="-122"/>
+                <a:cs typeface="Calibri" pitchFamily="34" charset="-120"/>
+              </a:rPr>
+              <a:t>in a certain way</a:t>
+            </a:r>
+            <a:endParaRPr lang="en-US" sz="850" dirty="0"/>
+          </a:p>
+        </p:txBody>
+      </p:sp>
+      <p:sp>
+        <p:nvSpPr>
+          <p:cNvPr id="25" name="Shape 23"/>
+          <p:cNvSpPr/>
+          <p:nvPr/>
+        </p:nvSpPr>
+        <p:spPr>
+          <a:xfrm>
             <a:off x="365760" y="3273552"/>
             <a:ext cx="1371600" cy="658368"/>
           </a:xfrm>
@@ -19866,7 +20156,7 @@
       </p:sp>
       <p:sp>
         <p:nvSpPr>
-          <p:cNvPr id="23" name="Text 21"/>
+          <p:cNvPr id="26" name="Text 24"/>
           <p:cNvSpPr/>
           <p:nvPr/>
         </p:nvSpPr>
@@ -19905,7 +20195,7 @@
       </p:sp>
       <p:sp>
         <p:nvSpPr>
-          <p:cNvPr id="24" name="Shape 22"/>
+          <p:cNvPr id="27" name="Shape 25"/>
           <p:cNvSpPr/>
           <p:nvPr/>
         </p:nvSpPr>
@@ -19932,13 +20222,13 @@
       </p:sp>
       <p:sp>
         <p:nvSpPr>
-          <p:cNvPr id="25" name="Shape 23"/>
-          <p:cNvSpPr/>
-          <p:nvPr/>
-        </p:nvSpPr>
-        <p:spPr>
-          <a:xfrm>
-            <a:off x="2999232" y="3364992"/>
+          <p:cNvPr id="28" name="Shape 26"/>
+          <p:cNvSpPr/>
+          <p:nvPr/>
+        </p:nvSpPr>
+        <p:spPr>
+          <a:xfrm>
+            <a:off x="2313432" y="3364992"/>
             <a:ext cx="1645920" cy="475488"/>
           </a:xfrm>
           <a:prstGeom prst="rect">
@@ -19959,13 +20249,13 @@
       </p:sp>
       <p:sp>
         <p:nvSpPr>
-          <p:cNvPr id="26" name="Text 24"/>
-          <p:cNvSpPr/>
-          <p:nvPr/>
-        </p:nvSpPr>
-        <p:spPr>
-          <a:xfrm>
-            <a:off x="2999232" y="3364992"/>
+          <p:cNvPr id="29" name="Text 27"/>
+          <p:cNvSpPr/>
+          <p:nvPr/>
+        </p:nvSpPr>
+        <p:spPr>
+          <a:xfrm>
+            <a:off x="2313432" y="3364992"/>
             <a:ext cx="1645920" cy="475488"/>
           </a:xfrm>
           <a:prstGeom prst="rect">
@@ -19998,14 +20288,14 @@
       </p:sp>
       <p:sp>
         <p:nvSpPr>
-          <p:cNvPr id="27" name="Text 25"/>
-          <p:cNvSpPr/>
-          <p:nvPr/>
-        </p:nvSpPr>
-        <p:spPr>
-          <a:xfrm>
-            <a:off x="4645152" y="3364992"/>
-            <a:ext cx="1097280" cy="475488"/>
+          <p:cNvPr id="30" name="Text 28"/>
+          <p:cNvSpPr/>
+          <p:nvPr/>
+        </p:nvSpPr>
+        <p:spPr>
+          <a:xfrm>
+            <a:off x="3959352" y="3364992"/>
+            <a:ext cx="411480" cy="475488"/>
           </a:xfrm>
           <a:prstGeom prst="rect">
             <a:avLst/>
@@ -20037,13 +20327,13 @@
       </p:sp>
       <p:sp>
         <p:nvSpPr>
-          <p:cNvPr id="28" name="Shape 26"/>
-          <p:cNvSpPr/>
-          <p:nvPr/>
-        </p:nvSpPr>
-        <p:spPr>
-          <a:xfrm>
-            <a:off x="5742432" y="3364992"/>
+          <p:cNvPr id="31" name="Shape 29"/>
+          <p:cNvSpPr/>
+          <p:nvPr/>
+        </p:nvSpPr>
+        <p:spPr>
+          <a:xfrm>
+            <a:off x="4370832" y="3364992"/>
             <a:ext cx="1645920" cy="475488"/>
           </a:xfrm>
           <a:prstGeom prst="rect">
@@ -20064,13 +20354,13 @@
       </p:sp>
       <p:sp>
         <p:nvSpPr>
-          <p:cNvPr id="29" name="Text 27"/>
-          <p:cNvSpPr/>
-          <p:nvPr/>
-        </p:nvSpPr>
-        <p:spPr>
-          <a:xfrm>
-            <a:off x="5742432" y="3364992"/>
+          <p:cNvPr id="32" name="Text 30"/>
+          <p:cNvSpPr/>
+          <p:nvPr/>
+        </p:nvSpPr>
+        <p:spPr>
+          <a:xfrm>
+            <a:off x="4370832" y="3364992"/>
             <a:ext cx="1645920" cy="475488"/>
           </a:xfrm>
           <a:prstGeom prst="rect">
@@ -20103,7 +20393,112 @@
       </p:sp>
       <p:sp>
         <p:nvSpPr>
-          <p:cNvPr id="30" name="Shape 28"/>
+          <p:cNvPr id="33" name="Text 31"/>
+          <p:cNvSpPr/>
+          <p:nvPr/>
+        </p:nvSpPr>
+        <p:spPr>
+          <a:xfrm>
+            <a:off x="6016752" y="3364992"/>
+            <a:ext cx="411480" cy="475488"/>
+          </a:xfrm>
+          <a:prstGeom prst="rect">
+            <a:avLst/>
+          </a:prstGeom>
+          <a:noFill/>
+          <a:ln/>
+        </p:spPr>
+        <p:txBody>
+          <a:bodyPr wrap="square" lIns="0" tIns="0" rIns="0" bIns="0" rtlCol="0" anchor="ctr"/>
+          <a:lstStyle/>
+          <a:p>
+            <a:pPr algn="ctr" indent="0" marL="0">
+              <a:buNone/>
+            </a:pPr>
+            <a:r>
+              <a:rPr lang="en-US" sz="1600" b="1" dirty="0">
+                <a:solidFill>
+                  <a:srgbClr val="0D9488"/>
+                </a:solidFill>
+                <a:latin typeface="Trebuchet MS" pitchFamily="34" charset="0"/>
+                <a:ea typeface="Trebuchet MS" pitchFamily="34" charset="-122"/>
+                <a:cs typeface="Trebuchet MS" pitchFamily="34" charset="-120"/>
+              </a:rPr>
+              <a:t>·</a:t>
+            </a:r>
+            <a:endParaRPr lang="en-US" sz="1600" dirty="0"/>
+          </a:p>
+        </p:txBody>
+      </p:sp>
+      <p:sp>
+        <p:nvSpPr>
+          <p:cNvPr id="34" name="Shape 32"/>
+          <p:cNvSpPr/>
+          <p:nvPr/>
+        </p:nvSpPr>
+        <p:spPr>
+          <a:xfrm>
+            <a:off x="6428232" y="3364992"/>
+            <a:ext cx="1645920" cy="475488"/>
+          </a:xfrm>
+          <a:prstGeom prst="rect">
+            <a:avLst>
+              <a:gd name="adj" fmla="val 9615"/>
+            </a:avLst>
+          </a:prstGeom>
+          <a:solidFill>
+            <a:srgbClr val="FFFFFF"/>
+          </a:solidFill>
+          <a:ln w="12700">
+            <a:solidFill>
+              <a:srgbClr val="0D9488"/>
+            </a:solidFill>
+            <a:prstDash val="solid"/>
+          </a:ln>
+        </p:spPr>
+      </p:sp>
+      <p:sp>
+        <p:nvSpPr>
+          <p:cNvPr id="35" name="Text 33"/>
+          <p:cNvSpPr/>
+          <p:nvPr/>
+        </p:nvSpPr>
+        <p:spPr>
+          <a:xfrm>
+            <a:off x="6428232" y="3364992"/>
+            <a:ext cx="1645920" cy="475488"/>
+          </a:xfrm>
+          <a:prstGeom prst="rect">
+            <a:avLst/>
+          </a:prstGeom>
+          <a:noFill/>
+          <a:ln/>
+        </p:spPr>
+        <p:txBody>
+          <a:bodyPr wrap="square" lIns="0" tIns="0" rIns="0" bIns="0" rtlCol="0" anchor="ctr"/>
+          <a:lstStyle/>
+          <a:p>
+            <a:pPr algn="ctr" indent="0" marL="0">
+              <a:buNone/>
+            </a:pPr>
+            <a:r>
+              <a:rPr lang="en-US" sz="1400" b="1" dirty="0">
+                <a:solidFill>
+                  <a:srgbClr val="0D9488"/>
+                </a:solidFill>
+                <a:latin typeface="Trebuchet MS" pitchFamily="34" charset="0"/>
+                <a:ea typeface="Trebuchet MS" pitchFamily="34" charset="-122"/>
+                <a:cs typeface="Trebuchet MS" pitchFamily="34" charset="-120"/>
+              </a:rPr>
+              <a:t>ly</a:t>
+            </a:r>
+            <a:endParaRPr lang="en-US" sz="1400" dirty="0"/>
+          </a:p>
+        </p:txBody>
+      </p:sp>
+      <p:sp>
+        <p:nvSpPr>
+          <p:cNvPr id="36" name="Shape 34"/>
           <p:cNvSpPr/>
           <p:nvPr/>
         </p:nvSpPr>
@@ -20130,7 +20525,7 @@
       </p:sp>
       <p:sp>
         <p:nvSpPr>
-          <p:cNvPr id="31" name="Text 29"/>
+          <p:cNvPr id="37" name="Text 35"/>
           <p:cNvSpPr/>
           <p:nvPr/>
         </p:nvSpPr>
@@ -20169,7 +20564,7 @@
       </p:sp>
       <p:sp>
         <p:nvSpPr>
-          <p:cNvPr id="32" name="Shape 30"/>
+          <p:cNvPr id="38" name="Shape 36"/>
           <p:cNvSpPr/>
           <p:nvPr/>
         </p:nvSpPr>
@@ -20196,7 +20591,7 @@
       </p:sp>
       <p:sp>
         <p:nvSpPr>
-          <p:cNvPr id="33" name="Text 31"/>
+          <p:cNvPr id="39" name="Text 37"/>
           <p:cNvSpPr/>
           <p:nvPr/>
         </p:nvSpPr>
@@ -20519,7 +20914,7 @@
                 <a:ea typeface="Calibri" pitchFamily="34" charset="-122"/>
                 <a:cs typeface="Calibri" pitchFamily="34" charset="-120"/>
               </a:rPr>
-              <a:t>Word Labs  •  wordlabs.app  •  Root: 'kind' = caring, gentle, or type</a:t>
+              <a:t>Word Labs  •  wordlabs.app  •  Root: 'kind' = friendly, caring, gentle</a:t>
             </a:r>
             <a:endParaRPr lang="en-US" sz="800" dirty="0"/>
           </a:p>
@@ -20658,7 +21053,7 @@
                 <a:ea typeface="Trebuchet MS" pitchFamily="34" charset="-122"/>
                 <a:cs typeface="Trebuchet MS" pitchFamily="34" charset="-120"/>
               </a:rPr>
-              <a:t>unkind</a:t>
+              <a:t>unkindly</a:t>
             </a:r>
             <a:endParaRPr lang="en-US" sz="2800" dirty="0"/>
           </a:p>
@@ -20738,7 +21133,7 @@
         </p:nvSpPr>
         <p:spPr>
           <a:xfrm>
-            <a:off x="2938272" y="2258568"/>
+            <a:off x="2221992" y="2258568"/>
             <a:ext cx="1828800" cy="292608"/>
           </a:xfrm>
           <a:prstGeom prst="rect">
@@ -20772,7 +21167,7 @@
         </p:nvSpPr>
         <p:spPr>
           <a:xfrm>
-            <a:off x="2938272" y="2258568"/>
+            <a:off x="2221992" y="2258568"/>
             <a:ext cx="1828800" cy="292608"/>
           </a:xfrm>
           <a:prstGeom prst="rect">
@@ -20811,7 +21206,7 @@
         </p:nvSpPr>
         <p:spPr>
           <a:xfrm>
-            <a:off x="2938272" y="2569464"/>
+            <a:off x="2221992" y="2569464"/>
             <a:ext cx="1828800" cy="201168"/>
           </a:xfrm>
           <a:prstGeom prst="rect">
@@ -20850,7 +21245,7 @@
         </p:nvSpPr>
         <p:spPr>
           <a:xfrm>
-            <a:off x="5803392" y="2258568"/>
+            <a:off x="4370832" y="2258568"/>
             <a:ext cx="1828800" cy="292608"/>
           </a:xfrm>
           <a:prstGeom prst="rect">
@@ -20884,7 +21279,7 @@
         </p:nvSpPr>
         <p:spPr>
           <a:xfrm>
-            <a:off x="5803392" y="2258568"/>
+            <a:off x="4370832" y="2258568"/>
             <a:ext cx="1828800" cy="292608"/>
           </a:xfrm>
           <a:prstGeom prst="rect">
@@ -20923,7 +21318,7 @@
         </p:nvSpPr>
         <p:spPr>
           <a:xfrm>
-            <a:off x="5803392" y="2569464"/>
+            <a:off x="4370832" y="2569464"/>
             <a:ext cx="1828800" cy="201168"/>
           </a:xfrm>
           <a:prstGeom prst="rect">
@@ -20962,6 +21357,118 @@
         </p:nvSpPr>
         <p:spPr>
           <a:xfrm>
+            <a:off x="6519672" y="2258568"/>
+            <a:ext cx="1828800" cy="292608"/>
+          </a:xfrm>
+          <a:prstGeom prst="rect">
+            <a:avLst>
+              <a:gd name="adj" fmla="val 25000"/>
+            </a:avLst>
+          </a:prstGeom>
+          <a:solidFill>
+            <a:srgbClr val="FCE7F3"/>
+          </a:solidFill>
+          <a:ln w="19050">
+            <a:solidFill>
+              <a:srgbClr val="DB2777"/>
+            </a:solidFill>
+            <a:prstDash val="solid"/>
+          </a:ln>
+          <a:effectLst>
+            <a:outerShdw sx="100000" sy="100000" kx="0" ky="0" algn="bl" rotWithShape="0" blurRad="101600" dist="38100" dir="8100000">
+              <a:srgbClr val="000000">
+                <a:alpha val="12000"/>
+              </a:srgbClr>
+            </a:outerShdw>
+          </a:effectLst>
+        </p:spPr>
+      </p:sp>
+      <p:sp>
+        <p:nvSpPr>
+          <p:cNvPr id="23" name="Text 21"/>
+          <p:cNvSpPr/>
+          <p:nvPr/>
+        </p:nvSpPr>
+        <p:spPr>
+          <a:xfrm>
+            <a:off x="6519672" y="2258568"/>
+            <a:ext cx="1828800" cy="292608"/>
+          </a:xfrm>
+          <a:prstGeom prst="rect">
+            <a:avLst/>
+          </a:prstGeom>
+          <a:noFill/>
+          <a:ln/>
+        </p:spPr>
+        <p:txBody>
+          <a:bodyPr wrap="square" lIns="0" tIns="0" rIns="0" bIns="0" rtlCol="0" anchor="ctr"/>
+          <a:lstStyle/>
+          <a:p>
+            <a:pPr algn="ctr" indent="0" marL="0">
+              <a:buNone/>
+            </a:pPr>
+            <a:r>
+              <a:rPr lang="en-US" sz="1300" b="1" dirty="0">
+                <a:solidFill>
+                  <a:srgbClr val="9D174D"/>
+                </a:solidFill>
+                <a:latin typeface="Trebuchet MS" pitchFamily="34" charset="0"/>
+                <a:ea typeface="Trebuchet MS" pitchFamily="34" charset="-122"/>
+                <a:cs typeface="Trebuchet MS" pitchFamily="34" charset="-120"/>
+              </a:rPr>
+              <a:t>ly</a:t>
+            </a:r>
+            <a:endParaRPr lang="en-US" sz="1300" dirty="0"/>
+          </a:p>
+        </p:txBody>
+      </p:sp>
+      <p:sp>
+        <p:nvSpPr>
+          <p:cNvPr id="24" name="Text 22"/>
+          <p:cNvSpPr/>
+          <p:nvPr/>
+        </p:nvSpPr>
+        <p:spPr>
+          <a:xfrm>
+            <a:off x="6519672" y="2569464"/>
+            <a:ext cx="1828800" cy="201168"/>
+          </a:xfrm>
+          <a:prstGeom prst="rect">
+            <a:avLst/>
+          </a:prstGeom>
+          <a:noFill/>
+          <a:ln/>
+        </p:spPr>
+        <p:txBody>
+          <a:bodyPr wrap="square" lIns="0" tIns="0" rIns="0" bIns="0" rtlCol="0" anchor="t"/>
+          <a:lstStyle/>
+          <a:p>
+            <a:pPr algn="ctr" indent="0" marL="0">
+              <a:buNone/>
+            </a:pPr>
+            <a:r>
+              <a:rPr lang="en-US" sz="850" dirty="0">
+                <a:solidFill>
+                  <a:srgbClr val="475569"/>
+                </a:solidFill>
+                <a:latin typeface="Calibri" pitchFamily="34" charset="0"/>
+                <a:ea typeface="Calibri" pitchFamily="34" charset="-122"/>
+                <a:cs typeface="Calibri" pitchFamily="34" charset="-120"/>
+              </a:rPr>
+              <a:t>in a certain way</a:t>
+            </a:r>
+            <a:endParaRPr lang="en-US" sz="850" dirty="0"/>
+          </a:p>
+        </p:txBody>
+      </p:sp>
+      <p:sp>
+        <p:nvSpPr>
+          <p:cNvPr id="25" name="Shape 23"/>
+          <p:cNvSpPr/>
+          <p:nvPr/>
+        </p:nvSpPr>
+        <p:spPr>
+          <a:xfrm>
             <a:off x="365760" y="3273552"/>
             <a:ext cx="1371600" cy="658368"/>
           </a:xfrm>
@@ -20983,7 +21490,7 @@
       </p:sp>
       <p:sp>
         <p:nvSpPr>
-          <p:cNvPr id="23" name="Text 21"/>
+          <p:cNvPr id="26" name="Text 24"/>
           <p:cNvSpPr/>
           <p:nvPr/>
         </p:nvSpPr>
@@ -21022,7 +21529,7 @@
       </p:sp>
       <p:sp>
         <p:nvSpPr>
-          <p:cNvPr id="24" name="Shape 22"/>
+          <p:cNvPr id="27" name="Shape 25"/>
           <p:cNvSpPr/>
           <p:nvPr/>
         </p:nvSpPr>
@@ -21049,13 +21556,13 @@
       </p:sp>
       <p:sp>
         <p:nvSpPr>
-          <p:cNvPr id="25" name="Shape 23"/>
-          <p:cNvSpPr/>
-          <p:nvPr/>
-        </p:nvSpPr>
-        <p:spPr>
-          <a:xfrm>
-            <a:off x="2999232" y="3364992"/>
+          <p:cNvPr id="28" name="Shape 26"/>
+          <p:cNvSpPr/>
+          <p:nvPr/>
+        </p:nvSpPr>
+        <p:spPr>
+          <a:xfrm>
+            <a:off x="2313432" y="3364992"/>
             <a:ext cx="1645920" cy="475488"/>
           </a:xfrm>
           <a:prstGeom prst="rect">
@@ -21076,13 +21583,13 @@
       </p:sp>
       <p:sp>
         <p:nvSpPr>
-          <p:cNvPr id="26" name="Text 24"/>
-          <p:cNvSpPr/>
-          <p:nvPr/>
-        </p:nvSpPr>
-        <p:spPr>
-          <a:xfrm>
-            <a:off x="2999232" y="3364992"/>
+          <p:cNvPr id="29" name="Text 27"/>
+          <p:cNvSpPr/>
+          <p:nvPr/>
+        </p:nvSpPr>
+        <p:spPr>
+          <a:xfrm>
+            <a:off x="2313432" y="3364992"/>
             <a:ext cx="1645920" cy="475488"/>
           </a:xfrm>
           <a:prstGeom prst="rect">
@@ -21115,14 +21622,14 @@
       </p:sp>
       <p:sp>
         <p:nvSpPr>
-          <p:cNvPr id="27" name="Text 25"/>
-          <p:cNvSpPr/>
-          <p:nvPr/>
-        </p:nvSpPr>
-        <p:spPr>
-          <a:xfrm>
-            <a:off x="4645152" y="3364992"/>
-            <a:ext cx="1097280" cy="475488"/>
+          <p:cNvPr id="30" name="Text 28"/>
+          <p:cNvSpPr/>
+          <p:nvPr/>
+        </p:nvSpPr>
+        <p:spPr>
+          <a:xfrm>
+            <a:off x="3959352" y="3364992"/>
+            <a:ext cx="411480" cy="475488"/>
           </a:xfrm>
           <a:prstGeom prst="rect">
             <a:avLst/>
@@ -21154,13 +21661,13 @@
       </p:sp>
       <p:sp>
         <p:nvSpPr>
-          <p:cNvPr id="28" name="Shape 26"/>
-          <p:cNvSpPr/>
-          <p:nvPr/>
-        </p:nvSpPr>
-        <p:spPr>
-          <a:xfrm>
-            <a:off x="5742432" y="3364992"/>
+          <p:cNvPr id="31" name="Shape 29"/>
+          <p:cNvSpPr/>
+          <p:nvPr/>
+        </p:nvSpPr>
+        <p:spPr>
+          <a:xfrm>
+            <a:off x="4370832" y="3364992"/>
             <a:ext cx="1645920" cy="475488"/>
           </a:xfrm>
           <a:prstGeom prst="rect">
@@ -21181,13 +21688,13 @@
       </p:sp>
       <p:sp>
         <p:nvSpPr>
-          <p:cNvPr id="29" name="Text 27"/>
-          <p:cNvSpPr/>
-          <p:nvPr/>
-        </p:nvSpPr>
-        <p:spPr>
-          <a:xfrm>
-            <a:off x="5742432" y="3364992"/>
+          <p:cNvPr id="32" name="Text 30"/>
+          <p:cNvSpPr/>
+          <p:nvPr/>
+        </p:nvSpPr>
+        <p:spPr>
+          <a:xfrm>
+            <a:off x="4370832" y="3364992"/>
             <a:ext cx="1645920" cy="475488"/>
           </a:xfrm>
           <a:prstGeom prst="rect">
@@ -21220,7 +21727,112 @@
       </p:sp>
       <p:sp>
         <p:nvSpPr>
-          <p:cNvPr id="30" name="Shape 28"/>
+          <p:cNvPr id="33" name="Text 31"/>
+          <p:cNvSpPr/>
+          <p:nvPr/>
+        </p:nvSpPr>
+        <p:spPr>
+          <a:xfrm>
+            <a:off x="6016752" y="3364992"/>
+            <a:ext cx="411480" cy="475488"/>
+          </a:xfrm>
+          <a:prstGeom prst="rect">
+            <a:avLst/>
+          </a:prstGeom>
+          <a:noFill/>
+          <a:ln/>
+        </p:spPr>
+        <p:txBody>
+          <a:bodyPr wrap="square" lIns="0" tIns="0" rIns="0" bIns="0" rtlCol="0" anchor="ctr"/>
+          <a:lstStyle/>
+          <a:p>
+            <a:pPr algn="ctr" indent="0" marL="0">
+              <a:buNone/>
+            </a:pPr>
+            <a:r>
+              <a:rPr lang="en-US" sz="1600" b="1" dirty="0">
+                <a:solidFill>
+                  <a:srgbClr val="0D9488"/>
+                </a:solidFill>
+                <a:latin typeface="Trebuchet MS" pitchFamily="34" charset="0"/>
+                <a:ea typeface="Trebuchet MS" pitchFamily="34" charset="-122"/>
+                <a:cs typeface="Trebuchet MS" pitchFamily="34" charset="-120"/>
+              </a:rPr>
+              <a:t>·</a:t>
+            </a:r>
+            <a:endParaRPr lang="en-US" sz="1600" dirty="0"/>
+          </a:p>
+        </p:txBody>
+      </p:sp>
+      <p:sp>
+        <p:nvSpPr>
+          <p:cNvPr id="34" name="Shape 32"/>
+          <p:cNvSpPr/>
+          <p:nvPr/>
+        </p:nvSpPr>
+        <p:spPr>
+          <a:xfrm>
+            <a:off x="6428232" y="3364992"/>
+            <a:ext cx="1645920" cy="475488"/>
+          </a:xfrm>
+          <a:prstGeom prst="rect">
+            <a:avLst>
+              <a:gd name="adj" fmla="val 9615"/>
+            </a:avLst>
+          </a:prstGeom>
+          <a:solidFill>
+            <a:srgbClr val="FFFFFF"/>
+          </a:solidFill>
+          <a:ln w="12700">
+            <a:solidFill>
+              <a:srgbClr val="0D9488"/>
+            </a:solidFill>
+            <a:prstDash val="solid"/>
+          </a:ln>
+        </p:spPr>
+      </p:sp>
+      <p:sp>
+        <p:nvSpPr>
+          <p:cNvPr id="35" name="Text 33"/>
+          <p:cNvSpPr/>
+          <p:nvPr/>
+        </p:nvSpPr>
+        <p:spPr>
+          <a:xfrm>
+            <a:off x="6428232" y="3364992"/>
+            <a:ext cx="1645920" cy="475488"/>
+          </a:xfrm>
+          <a:prstGeom prst="rect">
+            <a:avLst/>
+          </a:prstGeom>
+          <a:noFill/>
+          <a:ln/>
+        </p:spPr>
+        <p:txBody>
+          <a:bodyPr wrap="square" lIns="0" tIns="0" rIns="0" bIns="0" rtlCol="0" anchor="ctr"/>
+          <a:lstStyle/>
+          <a:p>
+            <a:pPr algn="ctr" indent="0" marL="0">
+              <a:buNone/>
+            </a:pPr>
+            <a:r>
+              <a:rPr lang="en-US" sz="1400" b="1" dirty="0">
+                <a:solidFill>
+                  <a:srgbClr val="0D9488"/>
+                </a:solidFill>
+                <a:latin typeface="Trebuchet MS" pitchFamily="34" charset="0"/>
+                <a:ea typeface="Trebuchet MS" pitchFamily="34" charset="-122"/>
+                <a:cs typeface="Trebuchet MS" pitchFamily="34" charset="-120"/>
+              </a:rPr>
+              <a:t>ly</a:t>
+            </a:r>
+            <a:endParaRPr lang="en-US" sz="1400" dirty="0"/>
+          </a:p>
+        </p:txBody>
+      </p:sp>
+      <p:sp>
+        <p:nvSpPr>
+          <p:cNvPr id="36" name="Shape 34"/>
           <p:cNvSpPr/>
           <p:nvPr/>
         </p:nvSpPr>
@@ -21247,7 +21859,7 @@
       </p:sp>
       <p:sp>
         <p:nvSpPr>
-          <p:cNvPr id="31" name="Text 29"/>
+          <p:cNvPr id="37" name="Text 35"/>
           <p:cNvSpPr/>
           <p:nvPr/>
         </p:nvSpPr>
@@ -21286,7 +21898,7 @@
       </p:sp>
       <p:sp>
         <p:nvSpPr>
-          <p:cNvPr id="32" name="Shape 30"/>
+          <p:cNvPr id="38" name="Shape 36"/>
           <p:cNvSpPr/>
           <p:nvPr/>
         </p:nvSpPr>
@@ -21313,13 +21925,13 @@
       </p:sp>
       <p:sp>
         <p:nvSpPr>
-          <p:cNvPr id="33" name="Shape 31"/>
-          <p:cNvSpPr/>
-          <p:nvPr/>
-        </p:nvSpPr>
-        <p:spPr>
-          <a:xfrm>
-            <a:off x="2427732" y="4169664"/>
+          <p:cNvPr id="39" name="Shape 37"/>
+          <p:cNvSpPr/>
+          <p:nvPr/>
+        </p:nvSpPr>
+        <p:spPr>
+          <a:xfrm>
+            <a:off x="2124837" y="4169664"/>
             <a:ext cx="685800" cy="475488"/>
           </a:xfrm>
           <a:prstGeom prst="rect">
@@ -21340,13 +21952,13 @@
       </p:sp>
       <p:sp>
         <p:nvSpPr>
-          <p:cNvPr id="34" name="Text 32"/>
-          <p:cNvSpPr/>
-          <p:nvPr/>
-        </p:nvSpPr>
-        <p:spPr>
-          <a:xfrm>
-            <a:off x="2427732" y="4169664"/>
+          <p:cNvPr id="40" name="Text 38"/>
+          <p:cNvSpPr/>
+          <p:nvPr/>
+        </p:nvSpPr>
+        <p:spPr>
+          <a:xfrm>
+            <a:off x="2124837" y="4169664"/>
             <a:ext cx="685800" cy="475488"/>
           </a:xfrm>
           <a:prstGeom prst="rect">
@@ -21379,13 +21991,13 @@
       </p:sp>
       <p:sp>
         <p:nvSpPr>
-          <p:cNvPr id="35" name="Shape 33"/>
-          <p:cNvSpPr/>
-          <p:nvPr/>
-        </p:nvSpPr>
-        <p:spPr>
-          <a:xfrm>
-            <a:off x="3639312" y="4169664"/>
+          <p:cNvPr id="41" name="Shape 39"/>
+          <p:cNvSpPr/>
+          <p:nvPr/>
+        </p:nvSpPr>
+        <p:spPr>
+          <a:xfrm>
+            <a:off x="3033522" y="4169664"/>
             <a:ext cx="685800" cy="475488"/>
           </a:xfrm>
           <a:prstGeom prst="rect">
@@ -21406,13 +22018,13 @@
       </p:sp>
       <p:sp>
         <p:nvSpPr>
-          <p:cNvPr id="36" name="Text 34"/>
-          <p:cNvSpPr/>
-          <p:nvPr/>
-        </p:nvSpPr>
-        <p:spPr>
-          <a:xfrm>
-            <a:off x="3639312" y="4169664"/>
+          <p:cNvPr id="42" name="Text 40"/>
+          <p:cNvSpPr/>
+          <p:nvPr/>
+        </p:nvSpPr>
+        <p:spPr>
+          <a:xfrm>
+            <a:off x="3033522" y="4169664"/>
             <a:ext cx="685800" cy="475488"/>
           </a:xfrm>
           <a:prstGeom prst="rect">
@@ -21445,13 +22057,13 @@
       </p:sp>
       <p:sp>
         <p:nvSpPr>
-          <p:cNvPr id="37" name="Shape 35"/>
-          <p:cNvSpPr/>
-          <p:nvPr/>
-        </p:nvSpPr>
-        <p:spPr>
-          <a:xfrm>
-            <a:off x="4850892" y="4169664"/>
+          <p:cNvPr id="43" name="Shape 41"/>
+          <p:cNvSpPr/>
+          <p:nvPr/>
+        </p:nvSpPr>
+        <p:spPr>
+          <a:xfrm>
+            <a:off x="3942207" y="4169664"/>
             <a:ext cx="685800" cy="475488"/>
           </a:xfrm>
           <a:prstGeom prst="rect">
@@ -21472,13 +22084,13 @@
       </p:sp>
       <p:sp>
         <p:nvSpPr>
-          <p:cNvPr id="38" name="Text 36"/>
-          <p:cNvSpPr/>
-          <p:nvPr/>
-        </p:nvSpPr>
-        <p:spPr>
-          <a:xfrm>
-            <a:off x="4850892" y="4169664"/>
+          <p:cNvPr id="44" name="Text 42"/>
+          <p:cNvSpPr/>
+          <p:nvPr/>
+        </p:nvSpPr>
+        <p:spPr>
+          <a:xfrm>
+            <a:off x="3942207" y="4169664"/>
             <a:ext cx="685800" cy="475488"/>
           </a:xfrm>
           <a:prstGeom prst="rect">
@@ -21511,13 +22123,13 @@
       </p:sp>
       <p:sp>
         <p:nvSpPr>
-          <p:cNvPr id="39" name="Shape 37"/>
-          <p:cNvSpPr/>
-          <p:nvPr/>
-        </p:nvSpPr>
-        <p:spPr>
-          <a:xfrm>
-            <a:off x="6062472" y="4169664"/>
+          <p:cNvPr id="45" name="Shape 43"/>
+          <p:cNvSpPr/>
+          <p:nvPr/>
+        </p:nvSpPr>
+        <p:spPr>
+          <a:xfrm>
+            <a:off x="4850892" y="4169664"/>
             <a:ext cx="685800" cy="475488"/>
           </a:xfrm>
           <a:prstGeom prst="rect">
@@ -21538,13 +22150,13 @@
       </p:sp>
       <p:sp>
         <p:nvSpPr>
-          <p:cNvPr id="40" name="Text 38"/>
-          <p:cNvSpPr/>
-          <p:nvPr/>
-        </p:nvSpPr>
-        <p:spPr>
-          <a:xfrm>
-            <a:off x="6062472" y="4169664"/>
+          <p:cNvPr id="46" name="Text 44"/>
+          <p:cNvSpPr/>
+          <p:nvPr/>
+        </p:nvSpPr>
+        <p:spPr>
+          <a:xfrm>
+            <a:off x="4850892" y="4169664"/>
             <a:ext cx="685800" cy="475488"/>
           </a:xfrm>
           <a:prstGeom prst="rect">
@@ -21577,13 +22189,13 @@
       </p:sp>
       <p:sp>
         <p:nvSpPr>
-          <p:cNvPr id="41" name="Shape 39"/>
-          <p:cNvSpPr/>
-          <p:nvPr/>
-        </p:nvSpPr>
-        <p:spPr>
-          <a:xfrm>
-            <a:off x="7274052" y="4169664"/>
+          <p:cNvPr id="47" name="Shape 45"/>
+          <p:cNvSpPr/>
+          <p:nvPr/>
+        </p:nvSpPr>
+        <p:spPr>
+          <a:xfrm>
+            <a:off x="5759577" y="4169664"/>
             <a:ext cx="685800" cy="475488"/>
           </a:xfrm>
           <a:prstGeom prst="rect">
@@ -21604,13 +22216,13 @@
       </p:sp>
       <p:sp>
         <p:nvSpPr>
-          <p:cNvPr id="42" name="Text 40"/>
-          <p:cNvSpPr/>
-          <p:nvPr/>
-        </p:nvSpPr>
-        <p:spPr>
-          <a:xfrm>
-            <a:off x="7274052" y="4169664"/>
+          <p:cNvPr id="48" name="Text 46"/>
+          <p:cNvSpPr/>
+          <p:nvPr/>
+        </p:nvSpPr>
+        <p:spPr>
+          <a:xfrm>
+            <a:off x="5759577" y="4169664"/>
             <a:ext cx="685800" cy="475488"/>
           </a:xfrm>
           <a:prstGeom prst="rect">
@@ -21636,6 +22248,138 @@
                 <a:cs typeface="Trebuchet MS" pitchFamily="34" charset="-120"/>
               </a:rPr>
               <a:t>nd</a:t>
+            </a:r>
+            <a:endParaRPr lang="en-US" sz="900" dirty="0"/>
+          </a:p>
+        </p:txBody>
+      </p:sp>
+      <p:sp>
+        <p:nvSpPr>
+          <p:cNvPr id="49" name="Shape 47"/>
+          <p:cNvSpPr/>
+          <p:nvPr/>
+        </p:nvSpPr>
+        <p:spPr>
+          <a:xfrm>
+            <a:off x="6668262" y="4169664"/>
+            <a:ext cx="685800" cy="475488"/>
+          </a:xfrm>
+          <a:prstGeom prst="rect">
+            <a:avLst>
+              <a:gd name="adj" fmla="val 7692"/>
+            </a:avLst>
+          </a:prstGeom>
+          <a:solidFill>
+            <a:srgbClr val="FFFFFF"/>
+          </a:solidFill>
+          <a:ln w="12700">
+            <a:solidFill>
+              <a:srgbClr val="DB2777"/>
+            </a:solidFill>
+            <a:prstDash val="solid"/>
+          </a:ln>
+        </p:spPr>
+      </p:sp>
+      <p:sp>
+        <p:nvSpPr>
+          <p:cNvPr id="50" name="Text 48"/>
+          <p:cNvSpPr/>
+          <p:nvPr/>
+        </p:nvSpPr>
+        <p:spPr>
+          <a:xfrm>
+            <a:off x="6668262" y="4169664"/>
+            <a:ext cx="685800" cy="475488"/>
+          </a:xfrm>
+          <a:prstGeom prst="rect">
+            <a:avLst/>
+          </a:prstGeom>
+          <a:noFill/>
+          <a:ln/>
+        </p:spPr>
+        <p:txBody>
+          <a:bodyPr wrap="square" lIns="0" tIns="0" rIns="0" bIns="0" rtlCol="0" anchor="ctr"/>
+          <a:lstStyle/>
+          <a:p>
+            <a:pPr algn="ctr" indent="0" marL="0">
+              <a:buNone/>
+            </a:pPr>
+            <a:r>
+              <a:rPr lang="en-US" sz="900" b="1" dirty="0">
+                <a:solidFill>
+                  <a:srgbClr val="9D174D"/>
+                </a:solidFill>
+                <a:latin typeface="Trebuchet MS" pitchFamily="34" charset="0"/>
+                <a:ea typeface="Trebuchet MS" pitchFamily="34" charset="-122"/>
+                <a:cs typeface="Trebuchet MS" pitchFamily="34" charset="-120"/>
+              </a:rPr>
+              <a:t>l</a:t>
+            </a:r>
+            <a:endParaRPr lang="en-US" sz="900" dirty="0"/>
+          </a:p>
+        </p:txBody>
+      </p:sp>
+      <p:sp>
+        <p:nvSpPr>
+          <p:cNvPr id="51" name="Shape 49"/>
+          <p:cNvSpPr/>
+          <p:nvPr/>
+        </p:nvSpPr>
+        <p:spPr>
+          <a:xfrm>
+            <a:off x="7576947" y="4169664"/>
+            <a:ext cx="685800" cy="475488"/>
+          </a:xfrm>
+          <a:prstGeom prst="rect">
+            <a:avLst>
+              <a:gd name="adj" fmla="val 7692"/>
+            </a:avLst>
+          </a:prstGeom>
+          <a:solidFill>
+            <a:srgbClr val="FFFFFF"/>
+          </a:solidFill>
+          <a:ln w="12700">
+            <a:solidFill>
+              <a:srgbClr val="DB2777"/>
+            </a:solidFill>
+            <a:prstDash val="solid"/>
+          </a:ln>
+        </p:spPr>
+      </p:sp>
+      <p:sp>
+        <p:nvSpPr>
+          <p:cNvPr id="52" name="Text 50"/>
+          <p:cNvSpPr/>
+          <p:nvPr/>
+        </p:nvSpPr>
+        <p:spPr>
+          <a:xfrm>
+            <a:off x="7576947" y="4169664"/>
+            <a:ext cx="685800" cy="475488"/>
+          </a:xfrm>
+          <a:prstGeom prst="rect">
+            <a:avLst/>
+          </a:prstGeom>
+          <a:noFill/>
+          <a:ln/>
+        </p:spPr>
+        <p:txBody>
+          <a:bodyPr wrap="square" lIns="0" tIns="0" rIns="0" bIns="0" rtlCol="0" anchor="ctr"/>
+          <a:lstStyle/>
+          <a:p>
+            <a:pPr algn="ctr" indent="0" marL="0">
+              <a:buNone/>
+            </a:pPr>
+            <a:r>
+              <a:rPr lang="en-US" sz="900" b="1" dirty="0">
+                <a:solidFill>
+                  <a:srgbClr val="9D174D"/>
+                </a:solidFill>
+                <a:latin typeface="Trebuchet MS" pitchFamily="34" charset="0"/>
+                <a:ea typeface="Trebuchet MS" pitchFamily="34" charset="-122"/>
+                <a:cs typeface="Trebuchet MS" pitchFamily="34" charset="-120"/>
+              </a:rPr>
+              <a:t>y</a:t>
             </a:r>
             <a:endParaRPr lang="en-US" sz="900" dirty="0"/>
           </a:p>
@@ -21927,7 +22671,7 @@
                 <a:ea typeface="Calibri" pitchFamily="34" charset="-122"/>
                 <a:cs typeface="Calibri" pitchFamily="34" charset="-120"/>
               </a:rPr>
-              <a:t>Word Labs  •  wordlabs.app  •  Root: 'kind' = caring, gentle, or type</a:t>
+              <a:t>Word Labs  •  wordlabs.app  •  Root: 'kind' = friendly, caring, gentle</a:t>
             </a:r>
             <a:endParaRPr lang="en-US" sz="800" dirty="0"/>
           </a:p>
@@ -22066,7 +22810,7 @@
                 <a:ea typeface="Trebuchet MS" pitchFamily="34" charset="-122"/>
                 <a:cs typeface="Trebuchet MS" pitchFamily="34" charset="-120"/>
               </a:rPr>
-              <a:t>kindness</a:t>
+              <a:t>kindred</a:t>
             </a:r>
             <a:endParaRPr lang="en-US" sz="2800" dirty="0"/>
           </a:p>
@@ -22754,7 +23498,7 @@
                 <a:ea typeface="Calibri" pitchFamily="34" charset="-122"/>
                 <a:cs typeface="Calibri" pitchFamily="34" charset="-120"/>
               </a:rPr>
-              <a:t>Word Labs  •  wordlabs.app  •  Root: 'kind' = caring, gentle, or type</a:t>
+              <a:t>Word Labs  •  wordlabs.app  •  Root: 'kind' = friendly, caring, gentle</a:t>
             </a:r>
             <a:endParaRPr lang="en-US" sz="800" dirty="0"/>
           </a:p>
@@ -22893,7 +23637,7 @@
                 <a:ea typeface="Trebuchet MS" pitchFamily="34" charset="-122"/>
                 <a:cs typeface="Trebuchet MS" pitchFamily="34" charset="-120"/>
               </a:rPr>
-              <a:t>kindness</a:t>
+              <a:t>kindred</a:t>
             </a:r>
             <a:endParaRPr lang="en-US" sz="2800" dirty="0"/>
           </a:p>
@@ -23144,7 +23888,7 @@
                 <a:ea typeface="Trebuchet MS" pitchFamily="34" charset="-122"/>
                 <a:cs typeface="Trebuchet MS" pitchFamily="34" charset="-120"/>
               </a:rPr>
-              <a:t>ness</a:t>
+              <a:t>red</a:t>
             </a:r>
             <a:endParaRPr lang="en-US" sz="1300" dirty="0"/>
           </a:p>
@@ -23183,7 +23927,7 @@
                 <a:ea typeface="Calibri" pitchFamily="34" charset="-122"/>
                 <a:cs typeface="Calibri" pitchFamily="34" charset="-120"/>
               </a:rPr>
-              <a:t>quality or state of (makes a noun)</a:t>
+              <a:t>group, set of people</a:t>
             </a:r>
             <a:endParaRPr lang="en-US" sz="850" dirty="0"/>
           </a:p>
@@ -23739,7 +24483,7 @@
                 <a:ea typeface="Calibri" pitchFamily="34" charset="-122"/>
                 <a:cs typeface="Calibri" pitchFamily="34" charset="-120"/>
               </a:rPr>
-              <a:t>Word Labs  •  wordlabs.app  •  Root: 'kind' = caring, gentle, or type</a:t>
+              <a:t>Word Labs  •  wordlabs.app  •  Root: 'kind' = friendly, caring, gentle</a:t>
             </a:r>
             <a:endParaRPr lang="en-US" sz="800" dirty="0"/>
           </a:p>
@@ -23812,7 +24556,7 @@
                 <a:ea typeface="Trebuchet MS" pitchFamily="34" charset="-122"/>
                 <a:cs typeface="Trebuchet MS" pitchFamily="34" charset="-120"/>
               </a:rPr>
-              <a:t>We are learning that the root 'kind' means 'caring, gentle, or type'.</a:t>
+              <a:t>We are learning that the root 'kind' means 'friendly, caring, gentle'.</a:t>
             </a:r>
             <a:endParaRPr lang="en-US" sz="2000" dirty="0"/>
           </a:p>
@@ -24458,7 +25202,7 @@
                 <a:ea typeface="Calibri" pitchFamily="34" charset="-122"/>
                 <a:cs typeface="Calibri" pitchFamily="34" charset="-120"/>
               </a:rPr>
-              <a:t>Word Labs  •  wordlabs.app  •  Root: 'kind' = caring, gentle, or type</a:t>
+              <a:t>Word Labs  •  wordlabs.app  •  Root: 'kind' = friendly, caring, gentle</a:t>
             </a:r>
             <a:endParaRPr lang="en-US" sz="800" dirty="0"/>
           </a:p>
@@ -24597,7 +25341,7 @@
                 <a:ea typeface="Trebuchet MS" pitchFamily="34" charset="-122"/>
                 <a:cs typeface="Trebuchet MS" pitchFamily="34" charset="-120"/>
               </a:rPr>
-              <a:t>kindness</a:t>
+              <a:t>kindred</a:t>
             </a:r>
             <a:endParaRPr lang="en-US" sz="2800" dirty="0"/>
           </a:p>
@@ -24848,7 +25592,7 @@
                 <a:ea typeface="Trebuchet MS" pitchFamily="34" charset="-122"/>
                 <a:cs typeface="Trebuchet MS" pitchFamily="34" charset="-120"/>
               </a:rPr>
-              <a:t>ness</a:t>
+              <a:t>red</a:t>
             </a:r>
             <a:endParaRPr lang="en-US" sz="1300" dirty="0"/>
           </a:p>
@@ -24887,7 +25631,7 @@
                 <a:ea typeface="Calibri" pitchFamily="34" charset="-122"/>
                 <a:cs typeface="Calibri" pitchFamily="34" charset="-120"/>
               </a:rPr>
-              <a:t>quality or state of (makes a noun)</a:t>
+              <a:t>group, set of people</a:t>
             </a:r>
             <a:endParaRPr lang="en-US" sz="850" dirty="0"/>
           </a:p>
@@ -25046,7 +25790,7 @@
                 <a:ea typeface="Trebuchet MS" pitchFamily="34" charset="-122"/>
                 <a:cs typeface="Trebuchet MS" pitchFamily="34" charset="-120"/>
               </a:rPr>
-              <a:t>kind</a:t>
+              <a:t>kin</a:t>
             </a:r>
             <a:endParaRPr lang="en-US" sz="1400" dirty="0"/>
           </a:p>
@@ -25151,7 +25895,7 @@
                 <a:ea typeface="Trebuchet MS" pitchFamily="34" charset="-122"/>
                 <a:cs typeface="Trebuchet MS" pitchFamily="34" charset="-120"/>
               </a:rPr>
-              <a:t>ness</a:t>
+              <a:t>dred</a:t>
             </a:r>
             <a:endParaRPr lang="en-US" sz="1400" dirty="0"/>
           </a:p>
@@ -25575,7 +26319,7 @@
                 <a:ea typeface="Calibri" pitchFamily="34" charset="-122"/>
                 <a:cs typeface="Calibri" pitchFamily="34" charset="-120"/>
               </a:rPr>
-              <a:t>Word Labs  •  wordlabs.app  •  Root: 'kind' = caring, gentle, or type</a:t>
+              <a:t>Word Labs  •  wordlabs.app  •  Root: 'kind' = friendly, caring, gentle</a:t>
             </a:r>
             <a:endParaRPr lang="en-US" sz="800" dirty="0"/>
           </a:p>
@@ -25714,7 +26458,7 @@
                 <a:ea typeface="Trebuchet MS" pitchFamily="34" charset="-122"/>
                 <a:cs typeface="Trebuchet MS" pitchFamily="34" charset="-120"/>
               </a:rPr>
-              <a:t>kindness</a:t>
+              <a:t>kindred</a:t>
             </a:r>
             <a:endParaRPr lang="en-US" sz="2800" dirty="0"/>
           </a:p>
@@ -25965,7 +26709,7 @@
                 <a:ea typeface="Trebuchet MS" pitchFamily="34" charset="-122"/>
                 <a:cs typeface="Trebuchet MS" pitchFamily="34" charset="-120"/>
               </a:rPr>
-              <a:t>ness</a:t>
+              <a:t>red</a:t>
             </a:r>
             <a:endParaRPr lang="en-US" sz="1300" dirty="0"/>
           </a:p>
@@ -26004,7 +26748,7 @@
                 <a:ea typeface="Calibri" pitchFamily="34" charset="-122"/>
                 <a:cs typeface="Calibri" pitchFamily="34" charset="-120"/>
               </a:rPr>
-              <a:t>quality or state of (makes a noun)</a:t>
+              <a:t>group, set of people</a:t>
             </a:r>
             <a:endParaRPr lang="en-US" sz="850" dirty="0"/>
           </a:p>
@@ -26163,7 +26907,7 @@
                 <a:ea typeface="Trebuchet MS" pitchFamily="34" charset="-122"/>
                 <a:cs typeface="Trebuchet MS" pitchFamily="34" charset="-120"/>
               </a:rPr>
-              <a:t>kind</a:t>
+              <a:t>kin</a:t>
             </a:r>
             <a:endParaRPr lang="en-US" sz="1400" dirty="0"/>
           </a:p>
@@ -26268,7 +27012,7 @@
                 <a:ea typeface="Trebuchet MS" pitchFamily="34" charset="-122"/>
                 <a:cs typeface="Trebuchet MS" pitchFamily="34" charset="-120"/>
               </a:rPr>
-              <a:t>ness</a:t>
+              <a:t>dred</a:t>
             </a:r>
             <a:endParaRPr lang="en-US" sz="1400" dirty="0"/>
           </a:p>
@@ -26375,7 +27119,7 @@
         </p:nvSpPr>
         <p:spPr>
           <a:xfrm>
-            <a:off x="2254649" y="4169664"/>
+            <a:off x="2124837" y="4169664"/>
             <a:ext cx="685800" cy="475488"/>
           </a:xfrm>
           <a:prstGeom prst="rect">
@@ -26402,7 +27146,7 @@
         </p:nvSpPr>
         <p:spPr>
           <a:xfrm>
-            <a:off x="2254649" y="4169664"/>
+            <a:off x="2124837" y="4169664"/>
             <a:ext cx="685800" cy="475488"/>
           </a:xfrm>
           <a:prstGeom prst="rect">
@@ -26441,7 +27185,7 @@
         </p:nvSpPr>
         <p:spPr>
           <a:xfrm>
-            <a:off x="3293146" y="4169664"/>
+            <a:off x="3033522" y="4169664"/>
             <a:ext cx="685800" cy="475488"/>
           </a:xfrm>
           <a:prstGeom prst="rect">
@@ -26468,7 +27212,7 @@
         </p:nvSpPr>
         <p:spPr>
           <a:xfrm>
-            <a:off x="3293146" y="4169664"/>
+            <a:off x="3033522" y="4169664"/>
             <a:ext cx="685800" cy="475488"/>
           </a:xfrm>
           <a:prstGeom prst="rect">
@@ -26507,7 +27251,7 @@
         </p:nvSpPr>
         <p:spPr>
           <a:xfrm>
-            <a:off x="4331643" y="4169664"/>
+            <a:off x="3942207" y="4169664"/>
             <a:ext cx="685800" cy="475488"/>
           </a:xfrm>
           <a:prstGeom prst="rect">
@@ -26534,7 +27278,7 @@
         </p:nvSpPr>
         <p:spPr>
           <a:xfrm>
-            <a:off x="4331643" y="4169664"/>
+            <a:off x="3942207" y="4169664"/>
             <a:ext cx="685800" cy="475488"/>
           </a:xfrm>
           <a:prstGeom prst="rect">
@@ -26559,7 +27303,7 @@
                 <a:ea typeface="Trebuchet MS" pitchFamily="34" charset="-122"/>
                 <a:cs typeface="Trebuchet MS" pitchFamily="34" charset="-120"/>
               </a:rPr>
-              <a:t>nd</a:t>
+              <a:t>n</a:t>
             </a:r>
             <a:endParaRPr lang="en-US" sz="900" dirty="0"/>
           </a:p>
@@ -26573,7 +27317,7 @@
         </p:nvSpPr>
         <p:spPr>
           <a:xfrm>
-            <a:off x="5370141" y="4169664"/>
+            <a:off x="4850892" y="4169664"/>
             <a:ext cx="685800" cy="475488"/>
           </a:xfrm>
           <a:prstGeom prst="rect">
@@ -26600,7 +27344,7 @@
         </p:nvSpPr>
         <p:spPr>
           <a:xfrm>
-            <a:off x="5370141" y="4169664"/>
+            <a:off x="4850892" y="4169664"/>
             <a:ext cx="685800" cy="475488"/>
           </a:xfrm>
           <a:prstGeom prst="rect">
@@ -26625,7 +27369,7 @@
                 <a:ea typeface="Trebuchet MS" pitchFamily="34" charset="-122"/>
                 <a:cs typeface="Trebuchet MS" pitchFamily="34" charset="-120"/>
               </a:rPr>
-              <a:t>n</a:t>
+              <a:t>d</a:t>
             </a:r>
             <a:endParaRPr lang="en-US" sz="900" dirty="0"/>
           </a:p>
@@ -26639,7 +27383,7 @@
         </p:nvSpPr>
         <p:spPr>
           <a:xfrm>
-            <a:off x="6408638" y="4169664"/>
+            <a:off x="5759577" y="4169664"/>
             <a:ext cx="685800" cy="475488"/>
           </a:xfrm>
           <a:prstGeom prst="rect">
@@ -26666,7 +27410,7 @@
         </p:nvSpPr>
         <p:spPr>
           <a:xfrm>
-            <a:off x="6408638" y="4169664"/>
+            <a:off x="5759577" y="4169664"/>
             <a:ext cx="685800" cy="475488"/>
           </a:xfrm>
           <a:prstGeom prst="rect">
@@ -26691,7 +27435,7 @@
                 <a:ea typeface="Trebuchet MS" pitchFamily="34" charset="-122"/>
                 <a:cs typeface="Trebuchet MS" pitchFamily="34" charset="-120"/>
               </a:rPr>
-              <a:t>e</a:t>
+              <a:t>r</a:t>
             </a:r>
             <a:endParaRPr lang="en-US" sz="900" dirty="0"/>
           </a:p>
@@ -26705,7 +27449,7 @@
         </p:nvSpPr>
         <p:spPr>
           <a:xfrm>
-            <a:off x="7447135" y="4169664"/>
+            <a:off x="6668262" y="4169664"/>
             <a:ext cx="685800" cy="475488"/>
           </a:xfrm>
           <a:prstGeom prst="rect">
@@ -26732,7 +27476,7 @@
         </p:nvSpPr>
         <p:spPr>
           <a:xfrm>
-            <a:off x="7447135" y="4169664"/>
+            <a:off x="6668262" y="4169664"/>
             <a:ext cx="685800" cy="475488"/>
           </a:xfrm>
           <a:prstGeom prst="rect">
@@ -26757,7 +27501,73 @@
                 <a:ea typeface="Trebuchet MS" pitchFamily="34" charset="-122"/>
                 <a:cs typeface="Trebuchet MS" pitchFamily="34" charset="-120"/>
               </a:rPr>
-              <a:t>ss</a:t>
+              <a:t>e</a:t>
+            </a:r>
+            <a:endParaRPr lang="en-US" sz="900" dirty="0"/>
+          </a:p>
+        </p:txBody>
+      </p:sp>
+      <p:sp>
+        <p:nvSpPr>
+          <p:cNvPr id="45" name="Shape 43"/>
+          <p:cNvSpPr/>
+          <p:nvPr/>
+        </p:nvSpPr>
+        <p:spPr>
+          <a:xfrm>
+            <a:off x="7576947" y="4169664"/>
+            <a:ext cx="685800" cy="475488"/>
+          </a:xfrm>
+          <a:prstGeom prst="rect">
+            <a:avLst>
+              <a:gd name="adj" fmla="val 7692"/>
+            </a:avLst>
+          </a:prstGeom>
+          <a:solidFill>
+            <a:srgbClr val="FFFFFF"/>
+          </a:solidFill>
+          <a:ln w="12700">
+            <a:solidFill>
+              <a:srgbClr val="DB2777"/>
+            </a:solidFill>
+            <a:prstDash val="solid"/>
+          </a:ln>
+        </p:spPr>
+      </p:sp>
+      <p:sp>
+        <p:nvSpPr>
+          <p:cNvPr id="46" name="Text 44"/>
+          <p:cNvSpPr/>
+          <p:nvPr/>
+        </p:nvSpPr>
+        <p:spPr>
+          <a:xfrm>
+            <a:off x="7576947" y="4169664"/>
+            <a:ext cx="685800" cy="475488"/>
+          </a:xfrm>
+          <a:prstGeom prst="rect">
+            <a:avLst/>
+          </a:prstGeom>
+          <a:noFill/>
+          <a:ln/>
+        </p:spPr>
+        <p:txBody>
+          <a:bodyPr wrap="square" lIns="0" tIns="0" rIns="0" bIns="0" rtlCol="0" anchor="ctr"/>
+          <a:lstStyle/>
+          <a:p>
+            <a:pPr algn="ctr" indent="0" marL="0">
+              <a:buNone/>
+            </a:pPr>
+            <a:r>
+              <a:rPr lang="en-US" sz="900" b="1" dirty="0">
+                <a:solidFill>
+                  <a:srgbClr val="9D174D"/>
+                </a:solidFill>
+                <a:latin typeface="Trebuchet MS" pitchFamily="34" charset="0"/>
+                <a:ea typeface="Trebuchet MS" pitchFamily="34" charset="-122"/>
+                <a:cs typeface="Trebuchet MS" pitchFamily="34" charset="-120"/>
+              </a:rPr>
+              <a:t>d</a:t>
             </a:r>
             <a:endParaRPr lang="en-US" sz="900" dirty="0"/>
           </a:p>
@@ -27049,7 +27859,7 @@
                 <a:ea typeface="Calibri" pitchFamily="34" charset="-122"/>
                 <a:cs typeface="Calibri" pitchFamily="34" charset="-120"/>
               </a:rPr>
-              <a:t>Word Labs  •  wordlabs.app  •  Root: 'kind' = caring, gentle, or type</a:t>
+              <a:t>Word Labs  •  wordlabs.app  •  Root: 'kind' = friendly, caring, gentle</a:t>
             </a:r>
             <a:endParaRPr lang="en-US" sz="800" dirty="0"/>
           </a:p>
@@ -27188,7 +27998,7 @@
                 <a:ea typeface="Trebuchet MS" pitchFamily="34" charset="-122"/>
                 <a:cs typeface="Trebuchet MS" pitchFamily="34" charset="-120"/>
               </a:rPr>
-              <a:t>kindhearted</a:t>
+              <a:t>kinder</a:t>
             </a:r>
             <a:endParaRPr lang="en-US" sz="2800" dirty="0"/>
           </a:p>
@@ -27876,7 +28686,7 @@
                 <a:ea typeface="Calibri" pitchFamily="34" charset="-122"/>
                 <a:cs typeface="Calibri" pitchFamily="34" charset="-120"/>
               </a:rPr>
-              <a:t>Word Labs  •  wordlabs.app  •  Root: 'kind' = caring, gentle, or type</a:t>
+              <a:t>Word Labs  •  wordlabs.app  •  Root: 'kind' = friendly, caring, gentle</a:t>
             </a:r>
             <a:endParaRPr lang="en-US" sz="800" dirty="0"/>
           </a:p>
@@ -28015,7 +28825,7 @@
                 <a:ea typeface="Trebuchet MS" pitchFamily="34" charset="-122"/>
                 <a:cs typeface="Trebuchet MS" pitchFamily="34" charset="-120"/>
               </a:rPr>
-              <a:t>kindhearted</a:t>
+              <a:t>kinder</a:t>
             </a:r>
             <a:endParaRPr lang="en-US" sz="2800" dirty="0"/>
           </a:p>
@@ -28095,7 +28905,7 @@
         </p:nvSpPr>
         <p:spPr>
           <a:xfrm>
-            <a:off x="2221992" y="2258568"/>
+            <a:off x="2938272" y="2258568"/>
             <a:ext cx="1828800" cy="292608"/>
           </a:xfrm>
           <a:prstGeom prst="rect">
@@ -28129,7 +28939,7 @@
         </p:nvSpPr>
         <p:spPr>
           <a:xfrm>
-            <a:off x="2221992" y="2258568"/>
+            <a:off x="2938272" y="2258568"/>
             <a:ext cx="1828800" cy="292608"/>
           </a:xfrm>
           <a:prstGeom prst="rect">
@@ -28168,7 +28978,7 @@
         </p:nvSpPr>
         <p:spPr>
           <a:xfrm>
-            <a:off x="2221992" y="2569464"/>
+            <a:off x="2938272" y="2569464"/>
             <a:ext cx="1828800" cy="201168"/>
           </a:xfrm>
           <a:prstGeom prst="rect">
@@ -28207,7 +29017,7 @@
         </p:nvSpPr>
         <p:spPr>
           <a:xfrm>
-            <a:off x="4370832" y="2258568"/>
+            <a:off x="5803392" y="2258568"/>
             <a:ext cx="1828800" cy="292608"/>
           </a:xfrm>
           <a:prstGeom prst="rect">
@@ -28241,7 +29051,7 @@
         </p:nvSpPr>
         <p:spPr>
           <a:xfrm>
-            <a:off x="4370832" y="2258568"/>
+            <a:off x="5803392" y="2258568"/>
             <a:ext cx="1828800" cy="292608"/>
           </a:xfrm>
           <a:prstGeom prst="rect">
@@ -28266,7 +29076,7 @@
                 <a:ea typeface="Trebuchet MS" pitchFamily="34" charset="-122"/>
                 <a:cs typeface="Trebuchet MS" pitchFamily="34" charset="-120"/>
               </a:rPr>
-              <a:t>heart</a:t>
+              <a:t>er</a:t>
             </a:r>
             <a:endParaRPr lang="en-US" sz="1300" dirty="0"/>
           </a:p>
@@ -28280,7 +29090,7 @@
         </p:nvSpPr>
         <p:spPr>
           <a:xfrm>
-            <a:off x="4370832" y="2569464"/>
+            <a:off x="5803392" y="2569464"/>
             <a:ext cx="1828800" cy="201168"/>
           </a:xfrm>
           <a:prstGeom prst="rect">
@@ -28305,7 +29115,7 @@
                 <a:ea typeface="Calibri" pitchFamily="34" charset="-122"/>
                 <a:cs typeface="Calibri" pitchFamily="34" charset="-120"/>
               </a:rPr>
-              <a:t>centre of feeling</a:t>
+              <a:t>more (comparative)</a:t>
             </a:r>
             <a:endParaRPr lang="en-US" sz="850" dirty="0"/>
           </a:p>
@@ -28319,30 +29129,23 @@
         </p:nvSpPr>
         <p:spPr>
           <a:xfrm>
-            <a:off x="6519672" y="2258568"/>
-            <a:ext cx="1828800" cy="292608"/>
+            <a:off x="365760" y="3273552"/>
+            <a:ext cx="1371600" cy="658368"/>
           </a:xfrm>
           <a:prstGeom prst="rect">
             <a:avLst>
-              <a:gd name="adj" fmla="val 25000"/>
+              <a:gd name="adj" fmla="val 8333"/>
             </a:avLst>
           </a:prstGeom>
           <a:solidFill>
-            <a:srgbClr val="FCE7F3"/>
-          </a:solidFill>
-          <a:ln w="19050">
-            <a:solidFill>
-              <a:srgbClr val="DB2777"/>
-            </a:solidFill>
-            <a:prstDash val="solid"/>
-          </a:ln>
-          <a:effectLst>
-            <a:outerShdw sx="100000" sy="100000" kx="0" ky="0" algn="bl" rotWithShape="0" blurRad="101600" dist="38100" dir="8100000">
-              <a:srgbClr val="000000">
-                <a:alpha val="12000"/>
-              </a:srgbClr>
-            </a:outerShdw>
-          </a:effectLst>
+            <a:srgbClr val="E2E8F0"/>
+          </a:solidFill>
+          <a:ln w="12700">
+            <a:solidFill>
+              <a:srgbClr val="E2E8F0"/>
+            </a:solidFill>
+            <a:prstDash val="solid"/>
+          </a:ln>
         </p:spPr>
       </p:sp>
       <p:sp>
@@ -28353,8 +29156,8 @@
         </p:nvSpPr>
         <p:spPr>
           <a:xfrm>
-            <a:off x="6519672" y="2258568"/>
-            <a:ext cx="1828800" cy="292608"/>
+            <a:off x="365760" y="3273552"/>
+            <a:ext cx="1371600" cy="658368"/>
           </a:xfrm>
           <a:prstGeom prst="rect">
             <a:avLst/>
@@ -28370,73 +29173,100 @@
               <a:buNone/>
             </a:pPr>
             <a:r>
-              <a:rPr lang="en-US" sz="1300" b="1" dirty="0">
-                <a:solidFill>
-                  <a:srgbClr val="9D174D"/>
+              <a:rPr lang="en-US" sz="1100" b="1" dirty="0">
+                <a:solidFill>
+                  <a:srgbClr val="475569"/>
                 </a:solidFill>
                 <a:latin typeface="Trebuchet MS" pitchFamily="34" charset="0"/>
                 <a:ea typeface="Trebuchet MS" pitchFamily="34" charset="-122"/>
                 <a:cs typeface="Trebuchet MS" pitchFamily="34" charset="-120"/>
               </a:rPr>
-              <a:t>ed</a:t>
-            </a:r>
-            <a:endParaRPr lang="en-US" sz="1300" dirty="0"/>
-          </a:p>
-        </p:txBody>
-      </p:sp>
-      <p:sp>
-        <p:nvSpPr>
-          <p:cNvPr id="24" name="Text 22"/>
-          <p:cNvSpPr/>
-          <p:nvPr/>
-        </p:nvSpPr>
-        <p:spPr>
-          <a:xfrm>
-            <a:off x="6519672" y="2569464"/>
-            <a:ext cx="1828800" cy="201168"/>
-          </a:xfrm>
-          <a:prstGeom prst="rect">
-            <a:avLst/>
-          </a:prstGeom>
-          <a:noFill/>
-          <a:ln/>
-        </p:spPr>
-        <p:txBody>
-          <a:bodyPr wrap="square" lIns="0" tIns="0" rIns="0" bIns="0" rtlCol="0" anchor="t"/>
-          <a:lstStyle/>
-          <a:p>
-            <a:pPr algn="ctr" indent="0" marL="0">
-              <a:buNone/>
-            </a:pPr>
-            <a:r>
-              <a:rPr lang="en-US" sz="850" dirty="0">
-                <a:solidFill>
-                  <a:srgbClr val="475569"/>
+              <a:t>Syllables</a:t>
+            </a:r>
+            <a:endParaRPr lang="en-US" sz="1100" dirty="0"/>
+          </a:p>
+        </p:txBody>
+      </p:sp>
+      <p:sp>
+        <p:nvSpPr>
+          <p:cNvPr id="24" name="Shape 22"/>
+          <p:cNvSpPr/>
+          <p:nvPr/>
+        </p:nvSpPr>
+        <p:spPr>
+          <a:xfrm>
+            <a:off x="1874520" y="3273552"/>
+            <a:ext cx="6903720" cy="658368"/>
+          </a:xfrm>
+          <a:prstGeom prst="rect">
+            <a:avLst>
+              <a:gd name="adj" fmla="val 8333"/>
+            </a:avLst>
+          </a:prstGeom>
+          <a:solidFill>
+            <a:srgbClr val="F8FAFC"/>
+          </a:solidFill>
+          <a:ln w="12700">
+            <a:solidFill>
+              <a:srgbClr val="E2E8F0"/>
+            </a:solidFill>
+            <a:prstDash val="dash"/>
+          </a:ln>
+        </p:spPr>
+      </p:sp>
+      <p:sp>
+        <p:nvSpPr>
+          <p:cNvPr id="25" name="Text 23"/>
+          <p:cNvSpPr/>
+          <p:nvPr/>
+        </p:nvSpPr>
+        <p:spPr>
+          <a:xfrm>
+            <a:off x="1874520" y="3273552"/>
+            <a:ext cx="6903720" cy="658368"/>
+          </a:xfrm>
+          <a:prstGeom prst="rect">
+            <a:avLst/>
+          </a:prstGeom>
+          <a:noFill/>
+          <a:ln/>
+        </p:spPr>
+        <p:txBody>
+          <a:bodyPr wrap="square" rtlCol="0" anchor="ctr"/>
+          <a:lstStyle/>
+          <a:p>
+            <a:pPr algn="ctr" indent="0" marL="0">
+              <a:buNone/>
+            </a:pPr>
+            <a:r>
+              <a:rPr lang="en-US" sz="1100" i="1" dirty="0">
+                <a:solidFill>
+                  <a:srgbClr val="CBD5E1"/>
                 </a:solidFill>
                 <a:latin typeface="Calibri" pitchFamily="34" charset="0"/>
                 <a:ea typeface="Calibri" pitchFamily="34" charset="-122"/>
                 <a:cs typeface="Calibri" pitchFamily="34" charset="-120"/>
               </a:rPr>
-              <a:t>having a quality (makes an adjective)</a:t>
-            </a:r>
-            <a:endParaRPr lang="en-US" sz="850" dirty="0"/>
-          </a:p>
-        </p:txBody>
-      </p:sp>
-      <p:sp>
-        <p:nvSpPr>
-          <p:cNvPr id="25" name="Shape 23"/>
-          <p:cNvSpPr/>
-          <p:nvPr/>
-        </p:nvSpPr>
-        <p:spPr>
-          <a:xfrm>
-            <a:off x="365760" y="3273552"/>
-            <a:ext cx="1371600" cy="658368"/>
+              <a:t>Write here...</a:t>
+            </a:r>
+            <a:endParaRPr lang="en-US" sz="1100" dirty="0"/>
+          </a:p>
+        </p:txBody>
+      </p:sp>
+      <p:sp>
+        <p:nvSpPr>
+          <p:cNvPr id="26" name="Shape 24"/>
+          <p:cNvSpPr/>
+          <p:nvPr/>
+        </p:nvSpPr>
+        <p:spPr>
+          <a:xfrm>
+            <a:off x="365760" y="4096512"/>
+            <a:ext cx="1371600" cy="804672"/>
           </a:xfrm>
           <a:prstGeom prst="rect">
             <a:avLst>
-              <a:gd name="adj" fmla="val 8333"/>
+              <a:gd name="adj" fmla="val 6818"/>
             </a:avLst>
           </a:prstGeom>
           <a:solidFill>
@@ -28452,14 +29282,14 @@
       </p:sp>
       <p:sp>
         <p:nvSpPr>
-          <p:cNvPr id="26" name="Text 24"/>
-          <p:cNvSpPr/>
-          <p:nvPr/>
-        </p:nvSpPr>
-        <p:spPr>
-          <a:xfrm>
-            <a:off x="365760" y="3273552"/>
-            <a:ext cx="1371600" cy="658368"/>
+          <p:cNvPr id="27" name="Text 25"/>
+          <p:cNvSpPr/>
+          <p:nvPr/>
+        </p:nvSpPr>
+        <p:spPr>
+          <a:xfrm>
+            <a:off x="365760" y="4096512"/>
+            <a:ext cx="1371600" cy="804672"/>
           </a:xfrm>
           <a:prstGeom prst="rect">
             <a:avLst/>
@@ -28483,7 +29313,7 @@
                 <a:ea typeface="Trebuchet MS" pitchFamily="34" charset="-122"/>
                 <a:cs typeface="Trebuchet MS" pitchFamily="34" charset="-120"/>
               </a:rPr>
-              <a:t>Syllables</a:t>
+              <a:t>Phonemes</a:t>
             </a:r>
             <a:endParaRPr lang="en-US" sz="1100" dirty="0"/>
           </a:p>
@@ -28491,80 +29321,14 @@
       </p:sp>
       <p:sp>
         <p:nvSpPr>
-          <p:cNvPr id="27" name="Shape 25"/>
-          <p:cNvSpPr/>
-          <p:nvPr/>
-        </p:nvSpPr>
-        <p:spPr>
-          <a:xfrm>
-            <a:off x="1874520" y="3273552"/>
-            <a:ext cx="6903720" cy="658368"/>
-          </a:xfrm>
-          <a:prstGeom prst="rect">
-            <a:avLst>
-              <a:gd name="adj" fmla="val 8333"/>
-            </a:avLst>
-          </a:prstGeom>
-          <a:solidFill>
-            <a:srgbClr val="F8FAFC"/>
-          </a:solidFill>
-          <a:ln w="12700">
-            <a:solidFill>
-              <a:srgbClr val="E2E8F0"/>
-            </a:solidFill>
-            <a:prstDash val="dash"/>
-          </a:ln>
-        </p:spPr>
-      </p:sp>
-      <p:sp>
-        <p:nvSpPr>
-          <p:cNvPr id="28" name="Text 26"/>
-          <p:cNvSpPr/>
-          <p:nvPr/>
-        </p:nvSpPr>
-        <p:spPr>
-          <a:xfrm>
-            <a:off x="1874520" y="3273552"/>
-            <a:ext cx="6903720" cy="658368"/>
-          </a:xfrm>
-          <a:prstGeom prst="rect">
-            <a:avLst/>
-          </a:prstGeom>
-          <a:noFill/>
-          <a:ln/>
-        </p:spPr>
-        <p:txBody>
-          <a:bodyPr wrap="square" rtlCol="0" anchor="ctr"/>
-          <a:lstStyle/>
-          <a:p>
-            <a:pPr algn="ctr" indent="0" marL="0">
-              <a:buNone/>
-            </a:pPr>
-            <a:r>
-              <a:rPr lang="en-US" sz="1100" i="1" dirty="0">
-                <a:solidFill>
-                  <a:srgbClr val="CBD5E1"/>
-                </a:solidFill>
-                <a:latin typeface="Calibri" pitchFamily="34" charset="0"/>
-                <a:ea typeface="Calibri" pitchFamily="34" charset="-122"/>
-                <a:cs typeface="Calibri" pitchFamily="34" charset="-120"/>
-              </a:rPr>
-              <a:t>Write here...</a:t>
-            </a:r>
-            <a:endParaRPr lang="en-US" sz="1100" dirty="0"/>
-          </a:p>
-        </p:txBody>
-      </p:sp>
-      <p:sp>
-        <p:nvSpPr>
-          <p:cNvPr id="29" name="Shape 27"/>
-          <p:cNvSpPr/>
-          <p:nvPr/>
-        </p:nvSpPr>
-        <p:spPr>
-          <a:xfrm>
-            <a:off x="365760" y="4096512"/>
-            <a:ext cx="1371600" cy="804672"/>
+          <p:cNvPr id="28" name="Shape 26"/>
+          <p:cNvSpPr/>
+          <p:nvPr/>
+        </p:nvSpPr>
+        <p:spPr>
+          <a:xfrm>
+            <a:off x="1874520" y="4096512"/>
+            <a:ext cx="6903720" cy="804672"/>
           </a:xfrm>
           <a:prstGeom prst="rect">
             <a:avLst>
@@ -28572,85 +29336,19 @@
             </a:avLst>
           </a:prstGeom>
           <a:solidFill>
-            <a:srgbClr val="E2E8F0"/>
+            <a:srgbClr val="F8FAFC"/>
           </a:solidFill>
           <a:ln w="12700">
             <a:solidFill>
               <a:srgbClr val="E2E8F0"/>
             </a:solidFill>
-            <a:prstDash val="solid"/>
-          </a:ln>
-        </p:spPr>
-      </p:sp>
-      <p:sp>
-        <p:nvSpPr>
-          <p:cNvPr id="30" name="Text 28"/>
-          <p:cNvSpPr/>
-          <p:nvPr/>
-        </p:nvSpPr>
-        <p:spPr>
-          <a:xfrm>
-            <a:off x="365760" y="4096512"/>
-            <a:ext cx="1371600" cy="804672"/>
-          </a:xfrm>
-          <a:prstGeom prst="rect">
-            <a:avLst/>
-          </a:prstGeom>
-          <a:noFill/>
-          <a:ln/>
-        </p:spPr>
-        <p:txBody>
-          <a:bodyPr wrap="square" lIns="0" tIns="0" rIns="0" bIns="0" rtlCol="0" anchor="ctr"/>
-          <a:lstStyle/>
-          <a:p>
-            <a:pPr algn="ctr" indent="0" marL="0">
-              <a:buNone/>
-            </a:pPr>
-            <a:r>
-              <a:rPr lang="en-US" sz="1100" b="1" dirty="0">
-                <a:solidFill>
-                  <a:srgbClr val="475569"/>
-                </a:solidFill>
-                <a:latin typeface="Trebuchet MS" pitchFamily="34" charset="0"/>
-                <a:ea typeface="Trebuchet MS" pitchFamily="34" charset="-122"/>
-                <a:cs typeface="Trebuchet MS" pitchFamily="34" charset="-120"/>
-              </a:rPr>
-              <a:t>Phonemes</a:t>
-            </a:r>
-            <a:endParaRPr lang="en-US" sz="1100" dirty="0"/>
-          </a:p>
-        </p:txBody>
-      </p:sp>
-      <p:sp>
-        <p:nvSpPr>
-          <p:cNvPr id="31" name="Shape 29"/>
-          <p:cNvSpPr/>
-          <p:nvPr/>
-        </p:nvSpPr>
-        <p:spPr>
-          <a:xfrm>
-            <a:off x="1874520" y="4096512"/>
-            <a:ext cx="6903720" cy="804672"/>
-          </a:xfrm>
-          <a:prstGeom prst="rect">
-            <a:avLst>
-              <a:gd name="adj" fmla="val 6818"/>
-            </a:avLst>
-          </a:prstGeom>
-          <a:solidFill>
-            <a:srgbClr val="F8FAFC"/>
-          </a:solidFill>
-          <a:ln w="12700">
-            <a:solidFill>
-              <a:srgbClr val="E2E8F0"/>
-            </a:solidFill>
             <a:prstDash val="dash"/>
           </a:ln>
         </p:spPr>
       </p:sp>
       <p:sp>
         <p:nvSpPr>
-          <p:cNvPr id="32" name="Text 30"/>
+          <p:cNvPr id="29" name="Text 27"/>
           <p:cNvSpPr/>
           <p:nvPr/>
         </p:nvSpPr>
@@ -28973,7 +29671,7 @@
                 <a:ea typeface="Calibri" pitchFamily="34" charset="-122"/>
                 <a:cs typeface="Calibri" pitchFamily="34" charset="-120"/>
               </a:rPr>
-              <a:t>Word Labs  •  wordlabs.app  •  Root: 'kind' = caring, gentle, or type</a:t>
+              <a:t>Word Labs  •  wordlabs.app  •  Root: 'kind' = friendly, caring, gentle</a:t>
             </a:r>
             <a:endParaRPr lang="en-US" sz="800" dirty="0"/>
           </a:p>
@@ -29112,7 +29810,7 @@
                 <a:ea typeface="Trebuchet MS" pitchFamily="34" charset="-122"/>
                 <a:cs typeface="Trebuchet MS" pitchFamily="34" charset="-120"/>
               </a:rPr>
-              <a:t>kindhearted</a:t>
+              <a:t>kinder</a:t>
             </a:r>
             <a:endParaRPr lang="en-US" sz="2800" dirty="0"/>
           </a:p>
@@ -29192,7 +29890,7 @@
         </p:nvSpPr>
         <p:spPr>
           <a:xfrm>
-            <a:off x="2221992" y="2258568"/>
+            <a:off x="2938272" y="2258568"/>
             <a:ext cx="1828800" cy="292608"/>
           </a:xfrm>
           <a:prstGeom prst="rect">
@@ -29226,7 +29924,7 @@
         </p:nvSpPr>
         <p:spPr>
           <a:xfrm>
-            <a:off x="2221992" y="2258568"/>
+            <a:off x="2938272" y="2258568"/>
             <a:ext cx="1828800" cy="292608"/>
           </a:xfrm>
           <a:prstGeom prst="rect">
@@ -29265,7 +29963,7 @@
         </p:nvSpPr>
         <p:spPr>
           <a:xfrm>
-            <a:off x="2221992" y="2569464"/>
+            <a:off x="2938272" y="2569464"/>
             <a:ext cx="1828800" cy="201168"/>
           </a:xfrm>
           <a:prstGeom prst="rect">
@@ -29304,7 +30002,7 @@
         </p:nvSpPr>
         <p:spPr>
           <a:xfrm>
-            <a:off x="4370832" y="2258568"/>
+            <a:off x="5803392" y="2258568"/>
             <a:ext cx="1828800" cy="292608"/>
           </a:xfrm>
           <a:prstGeom prst="rect">
@@ -29338,7 +30036,7 @@
         </p:nvSpPr>
         <p:spPr>
           <a:xfrm>
-            <a:off x="4370832" y="2258568"/>
+            <a:off x="5803392" y="2258568"/>
             <a:ext cx="1828800" cy="292608"/>
           </a:xfrm>
           <a:prstGeom prst="rect">
@@ -29363,7 +30061,7 @@
                 <a:ea typeface="Trebuchet MS" pitchFamily="34" charset="-122"/>
                 <a:cs typeface="Trebuchet MS" pitchFamily="34" charset="-120"/>
               </a:rPr>
-              <a:t>heart</a:t>
+              <a:t>er</a:t>
             </a:r>
             <a:endParaRPr lang="en-US" sz="1300" dirty="0"/>
           </a:p>
@@ -29377,7 +30075,7 @@
         </p:nvSpPr>
         <p:spPr>
           <a:xfrm>
-            <a:off x="4370832" y="2569464"/>
+            <a:off x="5803392" y="2569464"/>
             <a:ext cx="1828800" cy="201168"/>
           </a:xfrm>
           <a:prstGeom prst="rect">
@@ -29402,7 +30100,7 @@
                 <a:ea typeface="Calibri" pitchFamily="34" charset="-122"/>
                 <a:cs typeface="Calibri" pitchFamily="34" charset="-120"/>
               </a:rPr>
-              <a:t>centre of feeling</a:t>
+              <a:t>more (comparative)</a:t>
             </a:r>
             <a:endParaRPr lang="en-US" sz="850" dirty="0"/>
           </a:p>
@@ -29416,30 +30114,23 @@
         </p:nvSpPr>
         <p:spPr>
           <a:xfrm>
-            <a:off x="6519672" y="2258568"/>
-            <a:ext cx="1828800" cy="292608"/>
+            <a:off x="365760" y="3273552"/>
+            <a:ext cx="1371600" cy="658368"/>
           </a:xfrm>
           <a:prstGeom prst="rect">
             <a:avLst>
-              <a:gd name="adj" fmla="val 25000"/>
+              <a:gd name="adj" fmla="val 8333"/>
             </a:avLst>
           </a:prstGeom>
           <a:solidFill>
-            <a:srgbClr val="FCE7F3"/>
-          </a:solidFill>
-          <a:ln w="19050">
-            <a:solidFill>
-              <a:srgbClr val="DB2777"/>
-            </a:solidFill>
-            <a:prstDash val="solid"/>
-          </a:ln>
-          <a:effectLst>
-            <a:outerShdw sx="100000" sy="100000" kx="0" ky="0" algn="bl" rotWithShape="0" blurRad="101600" dist="38100" dir="8100000">
-              <a:srgbClr val="000000">
-                <a:alpha val="12000"/>
-              </a:srgbClr>
-            </a:outerShdw>
-          </a:effectLst>
+            <a:srgbClr val="E2E8F0"/>
+          </a:solidFill>
+          <a:ln w="12700">
+            <a:solidFill>
+              <a:srgbClr val="E2E8F0"/>
+            </a:solidFill>
+            <a:prstDash val="solid"/>
+          </a:ln>
         </p:spPr>
       </p:sp>
       <p:sp>
@@ -29450,8 +30141,8 @@
         </p:nvSpPr>
         <p:spPr>
           <a:xfrm>
-            <a:off x="6519672" y="2258568"/>
-            <a:ext cx="1828800" cy="292608"/>
+            <a:off x="365760" y="3273552"/>
+            <a:ext cx="1371600" cy="658368"/>
           </a:xfrm>
           <a:prstGeom prst="rect">
             <a:avLst/>
@@ -29467,69 +30158,30 @@
               <a:buNone/>
             </a:pPr>
             <a:r>
-              <a:rPr lang="en-US" sz="1300" b="1" dirty="0">
-                <a:solidFill>
-                  <a:srgbClr val="9D174D"/>
+              <a:rPr lang="en-US" sz="1100" b="1" dirty="0">
+                <a:solidFill>
+                  <a:srgbClr val="475569"/>
                 </a:solidFill>
                 <a:latin typeface="Trebuchet MS" pitchFamily="34" charset="0"/>
                 <a:ea typeface="Trebuchet MS" pitchFamily="34" charset="-122"/>
                 <a:cs typeface="Trebuchet MS" pitchFamily="34" charset="-120"/>
               </a:rPr>
-              <a:t>ed</a:t>
-            </a:r>
-            <a:endParaRPr lang="en-US" sz="1300" dirty="0"/>
-          </a:p>
-        </p:txBody>
-      </p:sp>
-      <p:sp>
-        <p:nvSpPr>
-          <p:cNvPr id="24" name="Text 22"/>
-          <p:cNvSpPr/>
-          <p:nvPr/>
-        </p:nvSpPr>
-        <p:spPr>
-          <a:xfrm>
-            <a:off x="6519672" y="2569464"/>
-            <a:ext cx="1828800" cy="201168"/>
-          </a:xfrm>
-          <a:prstGeom prst="rect">
-            <a:avLst/>
-          </a:prstGeom>
-          <a:noFill/>
-          <a:ln/>
-        </p:spPr>
-        <p:txBody>
-          <a:bodyPr wrap="square" lIns="0" tIns="0" rIns="0" bIns="0" rtlCol="0" anchor="t"/>
-          <a:lstStyle/>
-          <a:p>
-            <a:pPr algn="ctr" indent="0" marL="0">
-              <a:buNone/>
-            </a:pPr>
-            <a:r>
-              <a:rPr lang="en-US" sz="850" dirty="0">
-                <a:solidFill>
-                  <a:srgbClr val="475569"/>
-                </a:solidFill>
-                <a:latin typeface="Calibri" pitchFamily="34" charset="0"/>
-                <a:ea typeface="Calibri" pitchFamily="34" charset="-122"/>
-                <a:cs typeface="Calibri" pitchFamily="34" charset="-120"/>
-              </a:rPr>
-              <a:t>having a quality (makes an adjective)</a:t>
-            </a:r>
-            <a:endParaRPr lang="en-US" sz="850" dirty="0"/>
-          </a:p>
-        </p:txBody>
-      </p:sp>
-      <p:sp>
-        <p:nvSpPr>
-          <p:cNvPr id="25" name="Shape 23"/>
-          <p:cNvSpPr/>
-          <p:nvPr/>
-        </p:nvSpPr>
-        <p:spPr>
-          <a:xfrm>
-            <a:off x="365760" y="3273552"/>
-            <a:ext cx="1371600" cy="658368"/>
+              <a:t>Syllables</a:t>
+            </a:r>
+            <a:endParaRPr lang="en-US" sz="1100" dirty="0"/>
+          </a:p>
+        </p:txBody>
+      </p:sp>
+      <p:sp>
+        <p:nvSpPr>
+          <p:cNvPr id="24" name="Shape 22"/>
+          <p:cNvSpPr/>
+          <p:nvPr/>
+        </p:nvSpPr>
+        <p:spPr>
+          <a:xfrm>
+            <a:off x="1874520" y="3273552"/>
+            <a:ext cx="6903720" cy="658368"/>
           </a:xfrm>
           <a:prstGeom prst="rect">
             <a:avLst>
@@ -29537,11 +30189,38 @@
             </a:avLst>
           </a:prstGeom>
           <a:solidFill>
-            <a:srgbClr val="E2E8F0"/>
-          </a:solidFill>
-          <a:ln w="12700">
-            <a:solidFill>
-              <a:srgbClr val="E2E8F0"/>
+            <a:srgbClr val="CCFBF1"/>
+          </a:solidFill>
+          <a:ln w="12700">
+            <a:solidFill>
+              <a:srgbClr val="0D9488"/>
+            </a:solidFill>
+            <a:prstDash val="solid"/>
+          </a:ln>
+        </p:spPr>
+      </p:sp>
+      <p:sp>
+        <p:nvSpPr>
+          <p:cNvPr id="25" name="Shape 23"/>
+          <p:cNvSpPr/>
+          <p:nvPr/>
+        </p:nvSpPr>
+        <p:spPr>
+          <a:xfrm>
+            <a:off x="2999232" y="3364992"/>
+            <a:ext cx="1645920" cy="475488"/>
+          </a:xfrm>
+          <a:prstGeom prst="rect">
+            <a:avLst>
+              <a:gd name="adj" fmla="val 9615"/>
+            </a:avLst>
+          </a:prstGeom>
+          <a:solidFill>
+            <a:srgbClr val="FFFFFF"/>
+          </a:solidFill>
+          <a:ln w="12700">
+            <a:solidFill>
+              <a:srgbClr val="0D9488"/>
             </a:solidFill>
             <a:prstDash val="solid"/>
           </a:ln>
@@ -29555,8 +30234,8 @@
         </p:nvSpPr>
         <p:spPr>
           <a:xfrm>
-            <a:off x="365760" y="3273552"/>
-            <a:ext cx="1371600" cy="658368"/>
+            <a:off x="2999232" y="3364992"/>
+            <a:ext cx="1645920" cy="475488"/>
           </a:xfrm>
           <a:prstGeom prst="rect">
             <a:avLst/>
@@ -29572,46 +30251,58 @@
               <a:buNone/>
             </a:pPr>
             <a:r>
-              <a:rPr lang="en-US" sz="1100" b="1" dirty="0">
-                <a:solidFill>
-                  <a:srgbClr val="475569"/>
+              <a:rPr lang="en-US" sz="1400" b="1" dirty="0">
+                <a:solidFill>
+                  <a:srgbClr val="0D9488"/>
                 </a:solidFill>
                 <a:latin typeface="Trebuchet MS" pitchFamily="34" charset="0"/>
                 <a:ea typeface="Trebuchet MS" pitchFamily="34" charset="-122"/>
                 <a:cs typeface="Trebuchet MS" pitchFamily="34" charset="-120"/>
               </a:rPr>
-              <a:t>Syllables</a:t>
-            </a:r>
-            <a:endParaRPr lang="en-US" sz="1100" dirty="0"/>
-          </a:p>
-        </p:txBody>
-      </p:sp>
-      <p:sp>
-        <p:nvSpPr>
-          <p:cNvPr id="27" name="Shape 25"/>
-          <p:cNvSpPr/>
-          <p:nvPr/>
-        </p:nvSpPr>
-        <p:spPr>
-          <a:xfrm>
-            <a:off x="1874520" y="3273552"/>
-            <a:ext cx="6903720" cy="658368"/>
-          </a:xfrm>
-          <a:prstGeom prst="rect">
-            <a:avLst>
-              <a:gd name="adj" fmla="val 8333"/>
-            </a:avLst>
-          </a:prstGeom>
-          <a:solidFill>
-            <a:srgbClr val="CCFBF1"/>
-          </a:solidFill>
-          <a:ln w="12700">
-            <a:solidFill>
-              <a:srgbClr val="0D9488"/>
-            </a:solidFill>
-            <a:prstDash val="solid"/>
-          </a:ln>
-        </p:spPr>
+              <a:t>kind</a:t>
+            </a:r>
+            <a:endParaRPr lang="en-US" sz="1400" dirty="0"/>
+          </a:p>
+        </p:txBody>
+      </p:sp>
+      <p:sp>
+        <p:nvSpPr>
+          <p:cNvPr id="27" name="Text 25"/>
+          <p:cNvSpPr/>
+          <p:nvPr/>
+        </p:nvSpPr>
+        <p:spPr>
+          <a:xfrm>
+            <a:off x="4645152" y="3364992"/>
+            <a:ext cx="1097280" cy="475488"/>
+          </a:xfrm>
+          <a:prstGeom prst="rect">
+            <a:avLst/>
+          </a:prstGeom>
+          <a:noFill/>
+          <a:ln/>
+        </p:spPr>
+        <p:txBody>
+          <a:bodyPr wrap="square" lIns="0" tIns="0" rIns="0" bIns="0" rtlCol="0" anchor="ctr"/>
+          <a:lstStyle/>
+          <a:p>
+            <a:pPr algn="ctr" indent="0" marL="0">
+              <a:buNone/>
+            </a:pPr>
+            <a:r>
+              <a:rPr lang="en-US" sz="1600" b="1" dirty="0">
+                <a:solidFill>
+                  <a:srgbClr val="0D9488"/>
+                </a:solidFill>
+                <a:latin typeface="Trebuchet MS" pitchFamily="34" charset="0"/>
+                <a:ea typeface="Trebuchet MS" pitchFamily="34" charset="-122"/>
+                <a:cs typeface="Trebuchet MS" pitchFamily="34" charset="-120"/>
+              </a:rPr>
+              <a:t>·</a:t>
+            </a:r>
+            <a:endParaRPr lang="en-US" sz="1600" dirty="0"/>
+          </a:p>
+        </p:txBody>
       </p:sp>
       <p:sp>
         <p:nvSpPr>
@@ -29621,7 +30312,7 @@
         </p:nvSpPr>
         <p:spPr>
           <a:xfrm>
-            <a:off x="2313432" y="3364992"/>
+            <a:off x="5742432" y="3364992"/>
             <a:ext cx="1645920" cy="475488"/>
           </a:xfrm>
           <a:prstGeom prst="rect">
@@ -29648,7 +30339,7 @@
         </p:nvSpPr>
         <p:spPr>
           <a:xfrm>
-            <a:off x="2313432" y="3364992"/>
+            <a:off x="5742432" y="3364992"/>
             <a:ext cx="1645920" cy="475488"/>
           </a:xfrm>
           <a:prstGeom prst="rect">
@@ -29673,7 +30364,7 @@
                 <a:ea typeface="Trebuchet MS" pitchFamily="34" charset="-122"/>
                 <a:cs typeface="Trebuchet MS" pitchFamily="34" charset="-120"/>
               </a:rPr>
-              <a:t>kind</a:t>
+              <a:t>er</a:t>
             </a:r>
             <a:endParaRPr lang="en-US" sz="1400" dirty="0"/>
           </a:p>
@@ -29681,14 +30372,41 @@
       </p:sp>
       <p:sp>
         <p:nvSpPr>
-          <p:cNvPr id="30" name="Text 28"/>
-          <p:cNvSpPr/>
-          <p:nvPr/>
-        </p:nvSpPr>
-        <p:spPr>
-          <a:xfrm>
-            <a:off x="3959352" y="3364992"/>
-            <a:ext cx="411480" cy="475488"/>
+          <p:cNvPr id="30" name="Shape 28"/>
+          <p:cNvSpPr/>
+          <p:nvPr/>
+        </p:nvSpPr>
+        <p:spPr>
+          <a:xfrm>
+            <a:off x="365760" y="4096512"/>
+            <a:ext cx="1371600" cy="804672"/>
+          </a:xfrm>
+          <a:prstGeom prst="rect">
+            <a:avLst>
+              <a:gd name="adj" fmla="val 6818"/>
+            </a:avLst>
+          </a:prstGeom>
+          <a:solidFill>
+            <a:srgbClr val="E2E8F0"/>
+          </a:solidFill>
+          <a:ln w="12700">
+            <a:solidFill>
+              <a:srgbClr val="E2E8F0"/>
+            </a:solidFill>
+            <a:prstDash val="solid"/>
+          </a:ln>
+        </p:spPr>
+      </p:sp>
+      <p:sp>
+        <p:nvSpPr>
+          <p:cNvPr id="31" name="Text 29"/>
+          <p:cNvSpPr/>
+          <p:nvPr/>
+        </p:nvSpPr>
+        <p:spPr>
+          <a:xfrm>
+            <a:off x="365760" y="4096512"/>
+            <a:ext cx="1371600" cy="804672"/>
           </a:xfrm>
           <a:prstGeom prst="rect">
             <a:avLst/>
@@ -29704,201 +30422,30 @@
               <a:buNone/>
             </a:pPr>
             <a:r>
-              <a:rPr lang="en-US" sz="1600" b="1" dirty="0">
-                <a:solidFill>
-                  <a:srgbClr val="0D9488"/>
+              <a:rPr lang="en-US" sz="1100" b="1" dirty="0">
+                <a:solidFill>
+                  <a:srgbClr val="475569"/>
                 </a:solidFill>
                 <a:latin typeface="Trebuchet MS" pitchFamily="34" charset="0"/>
                 <a:ea typeface="Trebuchet MS" pitchFamily="34" charset="-122"/>
                 <a:cs typeface="Trebuchet MS" pitchFamily="34" charset="-120"/>
               </a:rPr>
-              <a:t>·</a:t>
-            </a:r>
-            <a:endParaRPr lang="en-US" sz="1600" dirty="0"/>
-          </a:p>
-        </p:txBody>
-      </p:sp>
-      <p:sp>
-        <p:nvSpPr>
-          <p:cNvPr id="31" name="Shape 29"/>
-          <p:cNvSpPr/>
-          <p:nvPr/>
-        </p:nvSpPr>
-        <p:spPr>
-          <a:xfrm>
-            <a:off x="4370832" y="3364992"/>
-            <a:ext cx="1645920" cy="475488"/>
-          </a:xfrm>
-          <a:prstGeom prst="rect">
-            <a:avLst>
-              <a:gd name="adj" fmla="val 9615"/>
-            </a:avLst>
-          </a:prstGeom>
-          <a:solidFill>
-            <a:srgbClr val="FFFFFF"/>
-          </a:solidFill>
-          <a:ln w="12700">
-            <a:solidFill>
-              <a:srgbClr val="0D9488"/>
-            </a:solidFill>
-            <a:prstDash val="solid"/>
-          </a:ln>
-        </p:spPr>
-      </p:sp>
-      <p:sp>
-        <p:nvSpPr>
-          <p:cNvPr id="32" name="Text 30"/>
-          <p:cNvSpPr/>
-          <p:nvPr/>
-        </p:nvSpPr>
-        <p:spPr>
-          <a:xfrm>
-            <a:off x="4370832" y="3364992"/>
-            <a:ext cx="1645920" cy="475488"/>
-          </a:xfrm>
-          <a:prstGeom prst="rect">
-            <a:avLst/>
-          </a:prstGeom>
-          <a:noFill/>
-          <a:ln/>
-        </p:spPr>
-        <p:txBody>
-          <a:bodyPr wrap="square" lIns="0" tIns="0" rIns="0" bIns="0" rtlCol="0" anchor="ctr"/>
-          <a:lstStyle/>
-          <a:p>
-            <a:pPr algn="ctr" indent="0" marL="0">
-              <a:buNone/>
-            </a:pPr>
-            <a:r>
-              <a:rPr lang="en-US" sz="1400" b="1" dirty="0">
-                <a:solidFill>
-                  <a:srgbClr val="0D9488"/>
-                </a:solidFill>
-                <a:latin typeface="Trebuchet MS" pitchFamily="34" charset="0"/>
-                <a:ea typeface="Trebuchet MS" pitchFamily="34" charset="-122"/>
-                <a:cs typeface="Trebuchet MS" pitchFamily="34" charset="-120"/>
-              </a:rPr>
-              <a:t>heart</a:t>
-            </a:r>
-            <a:endParaRPr lang="en-US" sz="1400" dirty="0"/>
-          </a:p>
-        </p:txBody>
-      </p:sp>
-      <p:sp>
-        <p:nvSpPr>
-          <p:cNvPr id="33" name="Text 31"/>
-          <p:cNvSpPr/>
-          <p:nvPr/>
-        </p:nvSpPr>
-        <p:spPr>
-          <a:xfrm>
-            <a:off x="6016752" y="3364992"/>
-            <a:ext cx="411480" cy="475488"/>
-          </a:xfrm>
-          <a:prstGeom prst="rect">
-            <a:avLst/>
-          </a:prstGeom>
-          <a:noFill/>
-          <a:ln/>
-        </p:spPr>
-        <p:txBody>
-          <a:bodyPr wrap="square" lIns="0" tIns="0" rIns="0" bIns="0" rtlCol="0" anchor="ctr"/>
-          <a:lstStyle/>
-          <a:p>
-            <a:pPr algn="ctr" indent="0" marL="0">
-              <a:buNone/>
-            </a:pPr>
-            <a:r>
-              <a:rPr lang="en-US" sz="1600" b="1" dirty="0">
-                <a:solidFill>
-                  <a:srgbClr val="0D9488"/>
-                </a:solidFill>
-                <a:latin typeface="Trebuchet MS" pitchFamily="34" charset="0"/>
-                <a:ea typeface="Trebuchet MS" pitchFamily="34" charset="-122"/>
-                <a:cs typeface="Trebuchet MS" pitchFamily="34" charset="-120"/>
-              </a:rPr>
-              <a:t>·</a:t>
-            </a:r>
-            <a:endParaRPr lang="en-US" sz="1600" dirty="0"/>
-          </a:p>
-        </p:txBody>
-      </p:sp>
-      <p:sp>
-        <p:nvSpPr>
-          <p:cNvPr id="34" name="Shape 32"/>
-          <p:cNvSpPr/>
-          <p:nvPr/>
-        </p:nvSpPr>
-        <p:spPr>
-          <a:xfrm>
-            <a:off x="6428232" y="3364992"/>
-            <a:ext cx="1645920" cy="475488"/>
-          </a:xfrm>
-          <a:prstGeom prst="rect">
-            <a:avLst>
-              <a:gd name="adj" fmla="val 9615"/>
-            </a:avLst>
-          </a:prstGeom>
-          <a:solidFill>
-            <a:srgbClr val="FFFFFF"/>
-          </a:solidFill>
-          <a:ln w="12700">
-            <a:solidFill>
-              <a:srgbClr val="0D9488"/>
-            </a:solidFill>
-            <a:prstDash val="solid"/>
-          </a:ln>
-        </p:spPr>
-      </p:sp>
-      <p:sp>
-        <p:nvSpPr>
-          <p:cNvPr id="35" name="Text 33"/>
-          <p:cNvSpPr/>
-          <p:nvPr/>
-        </p:nvSpPr>
-        <p:spPr>
-          <a:xfrm>
-            <a:off x="6428232" y="3364992"/>
-            <a:ext cx="1645920" cy="475488"/>
-          </a:xfrm>
-          <a:prstGeom prst="rect">
-            <a:avLst/>
-          </a:prstGeom>
-          <a:noFill/>
-          <a:ln/>
-        </p:spPr>
-        <p:txBody>
-          <a:bodyPr wrap="square" lIns="0" tIns="0" rIns="0" bIns="0" rtlCol="0" anchor="ctr"/>
-          <a:lstStyle/>
-          <a:p>
-            <a:pPr algn="ctr" indent="0" marL="0">
-              <a:buNone/>
-            </a:pPr>
-            <a:r>
-              <a:rPr lang="en-US" sz="1400" b="1" dirty="0">
-                <a:solidFill>
-                  <a:srgbClr val="0D9488"/>
-                </a:solidFill>
-                <a:latin typeface="Trebuchet MS" pitchFamily="34" charset="0"/>
-                <a:ea typeface="Trebuchet MS" pitchFamily="34" charset="-122"/>
-                <a:cs typeface="Trebuchet MS" pitchFamily="34" charset="-120"/>
-              </a:rPr>
-              <a:t>ed</a:t>
-            </a:r>
-            <a:endParaRPr lang="en-US" sz="1400" dirty="0"/>
-          </a:p>
-        </p:txBody>
-      </p:sp>
-      <p:sp>
-        <p:nvSpPr>
-          <p:cNvPr id="36" name="Shape 34"/>
-          <p:cNvSpPr/>
-          <p:nvPr/>
-        </p:nvSpPr>
-        <p:spPr>
-          <a:xfrm>
-            <a:off x="365760" y="4096512"/>
-            <a:ext cx="1371600" cy="804672"/>
+              <a:t>Phonemes</a:t>
+            </a:r>
+            <a:endParaRPr lang="en-US" sz="1100" dirty="0"/>
+          </a:p>
+        </p:txBody>
+      </p:sp>
+      <p:sp>
+        <p:nvSpPr>
+          <p:cNvPr id="32" name="Shape 30"/>
+          <p:cNvSpPr/>
+          <p:nvPr/>
+        </p:nvSpPr>
+        <p:spPr>
+          <a:xfrm>
+            <a:off x="1874520" y="4096512"/>
+            <a:ext cx="6903720" cy="804672"/>
           </a:xfrm>
           <a:prstGeom prst="rect">
             <a:avLst>
@@ -29906,85 +30453,19 @@
             </a:avLst>
           </a:prstGeom>
           <a:solidFill>
-            <a:srgbClr val="E2E8F0"/>
+            <a:srgbClr val="F8FAFC"/>
           </a:solidFill>
           <a:ln w="12700">
             <a:solidFill>
               <a:srgbClr val="E2E8F0"/>
             </a:solidFill>
-            <a:prstDash val="solid"/>
-          </a:ln>
-        </p:spPr>
-      </p:sp>
-      <p:sp>
-        <p:nvSpPr>
-          <p:cNvPr id="37" name="Text 35"/>
-          <p:cNvSpPr/>
-          <p:nvPr/>
-        </p:nvSpPr>
-        <p:spPr>
-          <a:xfrm>
-            <a:off x="365760" y="4096512"/>
-            <a:ext cx="1371600" cy="804672"/>
-          </a:xfrm>
-          <a:prstGeom prst="rect">
-            <a:avLst/>
-          </a:prstGeom>
-          <a:noFill/>
-          <a:ln/>
-        </p:spPr>
-        <p:txBody>
-          <a:bodyPr wrap="square" lIns="0" tIns="0" rIns="0" bIns="0" rtlCol="0" anchor="ctr"/>
-          <a:lstStyle/>
-          <a:p>
-            <a:pPr algn="ctr" indent="0" marL="0">
-              <a:buNone/>
-            </a:pPr>
-            <a:r>
-              <a:rPr lang="en-US" sz="1100" b="1" dirty="0">
-                <a:solidFill>
-                  <a:srgbClr val="475569"/>
-                </a:solidFill>
-                <a:latin typeface="Trebuchet MS" pitchFamily="34" charset="0"/>
-                <a:ea typeface="Trebuchet MS" pitchFamily="34" charset="-122"/>
-                <a:cs typeface="Trebuchet MS" pitchFamily="34" charset="-120"/>
-              </a:rPr>
-              <a:t>Phonemes</a:t>
-            </a:r>
-            <a:endParaRPr lang="en-US" sz="1100" dirty="0"/>
-          </a:p>
-        </p:txBody>
-      </p:sp>
-      <p:sp>
-        <p:nvSpPr>
-          <p:cNvPr id="38" name="Shape 36"/>
-          <p:cNvSpPr/>
-          <p:nvPr/>
-        </p:nvSpPr>
-        <p:spPr>
-          <a:xfrm>
-            <a:off x="1874520" y="4096512"/>
-            <a:ext cx="6903720" cy="804672"/>
-          </a:xfrm>
-          <a:prstGeom prst="rect">
-            <a:avLst>
-              <a:gd name="adj" fmla="val 6818"/>
-            </a:avLst>
-          </a:prstGeom>
-          <a:solidFill>
-            <a:srgbClr val="F8FAFC"/>
-          </a:solidFill>
-          <a:ln w="12700">
-            <a:solidFill>
-              <a:srgbClr val="E2E8F0"/>
-            </a:solidFill>
             <a:prstDash val="dash"/>
           </a:ln>
         </p:spPr>
       </p:sp>
       <p:sp>
         <p:nvSpPr>
-          <p:cNvPr id="39" name="Text 37"/>
+          <p:cNvPr id="33" name="Text 31"/>
           <p:cNvSpPr/>
           <p:nvPr/>
         </p:nvSpPr>
@@ -30307,7 +30788,7 @@
                 <a:ea typeface="Calibri" pitchFamily="34" charset="-122"/>
                 <a:cs typeface="Calibri" pitchFamily="34" charset="-120"/>
               </a:rPr>
-              <a:t>Word Labs  •  wordlabs.app  •  Root: 'kind' = caring, gentle, or type</a:t>
+              <a:t>Word Labs  •  wordlabs.app  •  Root: 'kind' = friendly, caring, gentle</a:t>
             </a:r>
             <a:endParaRPr lang="en-US" sz="800" dirty="0"/>
           </a:p>
@@ -30446,7 +30927,7 @@
                 <a:ea typeface="Trebuchet MS" pitchFamily="34" charset="-122"/>
                 <a:cs typeface="Trebuchet MS" pitchFamily="34" charset="-120"/>
               </a:rPr>
-              <a:t>kindhearted</a:t>
+              <a:t>kinder</a:t>
             </a:r>
             <a:endParaRPr lang="en-US" sz="2800" dirty="0"/>
           </a:p>
@@ -30526,7 +31007,7 @@
         </p:nvSpPr>
         <p:spPr>
           <a:xfrm>
-            <a:off x="2221992" y="2258568"/>
+            <a:off x="2938272" y="2258568"/>
             <a:ext cx="1828800" cy="292608"/>
           </a:xfrm>
           <a:prstGeom prst="rect">
@@ -30560,7 +31041,7 @@
         </p:nvSpPr>
         <p:spPr>
           <a:xfrm>
-            <a:off x="2221992" y="2258568"/>
+            <a:off x="2938272" y="2258568"/>
             <a:ext cx="1828800" cy="292608"/>
           </a:xfrm>
           <a:prstGeom prst="rect">
@@ -30599,7 +31080,7 @@
         </p:nvSpPr>
         <p:spPr>
           <a:xfrm>
-            <a:off x="2221992" y="2569464"/>
+            <a:off x="2938272" y="2569464"/>
             <a:ext cx="1828800" cy="201168"/>
           </a:xfrm>
           <a:prstGeom prst="rect">
@@ -30638,7 +31119,7 @@
         </p:nvSpPr>
         <p:spPr>
           <a:xfrm>
-            <a:off x="4370832" y="2258568"/>
+            <a:off x="5803392" y="2258568"/>
             <a:ext cx="1828800" cy="292608"/>
           </a:xfrm>
           <a:prstGeom prst="rect">
@@ -30672,7 +31153,7 @@
         </p:nvSpPr>
         <p:spPr>
           <a:xfrm>
-            <a:off x="4370832" y="2258568"/>
+            <a:off x="5803392" y="2258568"/>
             <a:ext cx="1828800" cy="292608"/>
           </a:xfrm>
           <a:prstGeom prst="rect">
@@ -30697,7 +31178,7 @@
                 <a:ea typeface="Trebuchet MS" pitchFamily="34" charset="-122"/>
                 <a:cs typeface="Trebuchet MS" pitchFamily="34" charset="-120"/>
               </a:rPr>
-              <a:t>heart</a:t>
+              <a:t>er</a:t>
             </a:r>
             <a:endParaRPr lang="en-US" sz="1300" dirty="0"/>
           </a:p>
@@ -30711,7 +31192,7 @@
         </p:nvSpPr>
         <p:spPr>
           <a:xfrm>
-            <a:off x="4370832" y="2569464"/>
+            <a:off x="5803392" y="2569464"/>
             <a:ext cx="1828800" cy="201168"/>
           </a:xfrm>
           <a:prstGeom prst="rect">
@@ -30736,7 +31217,7 @@
                 <a:ea typeface="Calibri" pitchFamily="34" charset="-122"/>
                 <a:cs typeface="Calibri" pitchFamily="34" charset="-120"/>
               </a:rPr>
-              <a:t>centre of feeling</a:t>
+              <a:t>more (comparative)</a:t>
             </a:r>
             <a:endParaRPr lang="en-US" sz="850" dirty="0"/>
           </a:p>
@@ -30750,30 +31231,23 @@
         </p:nvSpPr>
         <p:spPr>
           <a:xfrm>
-            <a:off x="6519672" y="2258568"/>
-            <a:ext cx="1828800" cy="292608"/>
+            <a:off x="365760" y="3273552"/>
+            <a:ext cx="1371600" cy="658368"/>
           </a:xfrm>
           <a:prstGeom prst="rect">
             <a:avLst>
-              <a:gd name="adj" fmla="val 25000"/>
+              <a:gd name="adj" fmla="val 8333"/>
             </a:avLst>
           </a:prstGeom>
           <a:solidFill>
-            <a:srgbClr val="FCE7F3"/>
-          </a:solidFill>
-          <a:ln w="19050">
-            <a:solidFill>
-              <a:srgbClr val="DB2777"/>
-            </a:solidFill>
-            <a:prstDash val="solid"/>
-          </a:ln>
-          <a:effectLst>
-            <a:outerShdw sx="100000" sy="100000" kx="0" ky="0" algn="bl" rotWithShape="0" blurRad="101600" dist="38100" dir="8100000">
-              <a:srgbClr val="000000">
-                <a:alpha val="12000"/>
-              </a:srgbClr>
-            </a:outerShdw>
-          </a:effectLst>
+            <a:srgbClr val="E2E8F0"/>
+          </a:solidFill>
+          <a:ln w="12700">
+            <a:solidFill>
+              <a:srgbClr val="E2E8F0"/>
+            </a:solidFill>
+            <a:prstDash val="solid"/>
+          </a:ln>
         </p:spPr>
       </p:sp>
       <p:sp>
@@ -30784,8 +31258,8 @@
         </p:nvSpPr>
         <p:spPr>
           <a:xfrm>
-            <a:off x="6519672" y="2258568"/>
-            <a:ext cx="1828800" cy="292608"/>
+            <a:off x="365760" y="3273552"/>
+            <a:ext cx="1371600" cy="658368"/>
           </a:xfrm>
           <a:prstGeom prst="rect">
             <a:avLst/>
@@ -30801,69 +31275,30 @@
               <a:buNone/>
             </a:pPr>
             <a:r>
-              <a:rPr lang="en-US" sz="1300" b="1" dirty="0">
-                <a:solidFill>
-                  <a:srgbClr val="9D174D"/>
+              <a:rPr lang="en-US" sz="1100" b="1" dirty="0">
+                <a:solidFill>
+                  <a:srgbClr val="475569"/>
                 </a:solidFill>
                 <a:latin typeface="Trebuchet MS" pitchFamily="34" charset="0"/>
                 <a:ea typeface="Trebuchet MS" pitchFamily="34" charset="-122"/>
                 <a:cs typeface="Trebuchet MS" pitchFamily="34" charset="-120"/>
               </a:rPr>
-              <a:t>ed</a:t>
-            </a:r>
-            <a:endParaRPr lang="en-US" sz="1300" dirty="0"/>
-          </a:p>
-        </p:txBody>
-      </p:sp>
-      <p:sp>
-        <p:nvSpPr>
-          <p:cNvPr id="24" name="Text 22"/>
-          <p:cNvSpPr/>
-          <p:nvPr/>
-        </p:nvSpPr>
-        <p:spPr>
-          <a:xfrm>
-            <a:off x="6519672" y="2569464"/>
-            <a:ext cx="1828800" cy="201168"/>
-          </a:xfrm>
-          <a:prstGeom prst="rect">
-            <a:avLst/>
-          </a:prstGeom>
-          <a:noFill/>
-          <a:ln/>
-        </p:spPr>
-        <p:txBody>
-          <a:bodyPr wrap="square" lIns="0" tIns="0" rIns="0" bIns="0" rtlCol="0" anchor="t"/>
-          <a:lstStyle/>
-          <a:p>
-            <a:pPr algn="ctr" indent="0" marL="0">
-              <a:buNone/>
-            </a:pPr>
-            <a:r>
-              <a:rPr lang="en-US" sz="850" dirty="0">
-                <a:solidFill>
-                  <a:srgbClr val="475569"/>
-                </a:solidFill>
-                <a:latin typeface="Calibri" pitchFamily="34" charset="0"/>
-                <a:ea typeface="Calibri" pitchFamily="34" charset="-122"/>
-                <a:cs typeface="Calibri" pitchFamily="34" charset="-120"/>
-              </a:rPr>
-              <a:t>having a quality (makes an adjective)</a:t>
-            </a:r>
-            <a:endParaRPr lang="en-US" sz="850" dirty="0"/>
-          </a:p>
-        </p:txBody>
-      </p:sp>
-      <p:sp>
-        <p:nvSpPr>
-          <p:cNvPr id="25" name="Shape 23"/>
-          <p:cNvSpPr/>
-          <p:nvPr/>
-        </p:nvSpPr>
-        <p:spPr>
-          <a:xfrm>
-            <a:off x="365760" y="3273552"/>
-            <a:ext cx="1371600" cy="658368"/>
+              <a:t>Syllables</a:t>
+            </a:r>
+            <a:endParaRPr lang="en-US" sz="1100" dirty="0"/>
+          </a:p>
+        </p:txBody>
+      </p:sp>
+      <p:sp>
+        <p:nvSpPr>
+          <p:cNvPr id="24" name="Shape 22"/>
+          <p:cNvSpPr/>
+          <p:nvPr/>
+        </p:nvSpPr>
+        <p:spPr>
+          <a:xfrm>
+            <a:off x="1874520" y="3273552"/>
+            <a:ext cx="6903720" cy="658368"/>
           </a:xfrm>
           <a:prstGeom prst="rect">
             <a:avLst>
@@ -30871,11 +31306,38 @@
             </a:avLst>
           </a:prstGeom>
           <a:solidFill>
-            <a:srgbClr val="E2E8F0"/>
-          </a:solidFill>
-          <a:ln w="12700">
-            <a:solidFill>
-              <a:srgbClr val="E2E8F0"/>
+            <a:srgbClr val="CCFBF1"/>
+          </a:solidFill>
+          <a:ln w="12700">
+            <a:solidFill>
+              <a:srgbClr val="0D9488"/>
+            </a:solidFill>
+            <a:prstDash val="solid"/>
+          </a:ln>
+        </p:spPr>
+      </p:sp>
+      <p:sp>
+        <p:nvSpPr>
+          <p:cNvPr id="25" name="Shape 23"/>
+          <p:cNvSpPr/>
+          <p:nvPr/>
+        </p:nvSpPr>
+        <p:spPr>
+          <a:xfrm>
+            <a:off x="2999232" y="3364992"/>
+            <a:ext cx="1645920" cy="475488"/>
+          </a:xfrm>
+          <a:prstGeom prst="rect">
+            <a:avLst>
+              <a:gd name="adj" fmla="val 9615"/>
+            </a:avLst>
+          </a:prstGeom>
+          <a:solidFill>
+            <a:srgbClr val="FFFFFF"/>
+          </a:solidFill>
+          <a:ln w="12700">
+            <a:solidFill>
+              <a:srgbClr val="0D9488"/>
             </a:solidFill>
             <a:prstDash val="solid"/>
           </a:ln>
@@ -30889,8 +31351,8 @@
         </p:nvSpPr>
         <p:spPr>
           <a:xfrm>
-            <a:off x="365760" y="3273552"/>
-            <a:ext cx="1371600" cy="658368"/>
+            <a:off x="2999232" y="3364992"/>
+            <a:ext cx="1645920" cy="475488"/>
           </a:xfrm>
           <a:prstGeom prst="rect">
             <a:avLst/>
@@ -30906,15 +31368,186 @@
               <a:buNone/>
             </a:pPr>
             <a:r>
-              <a:rPr lang="en-US" sz="1100" b="1" dirty="0">
-                <a:solidFill>
-                  <a:srgbClr val="475569"/>
+              <a:rPr lang="en-US" sz="1400" b="1" dirty="0">
+                <a:solidFill>
+                  <a:srgbClr val="0D9488"/>
                 </a:solidFill>
                 <a:latin typeface="Trebuchet MS" pitchFamily="34" charset="0"/>
                 <a:ea typeface="Trebuchet MS" pitchFamily="34" charset="-122"/>
                 <a:cs typeface="Trebuchet MS" pitchFamily="34" charset="-120"/>
               </a:rPr>
-              <a:t>Syllables</a:t>
+              <a:t>kind</a:t>
+            </a:r>
+            <a:endParaRPr lang="en-US" sz="1400" dirty="0"/>
+          </a:p>
+        </p:txBody>
+      </p:sp>
+      <p:sp>
+        <p:nvSpPr>
+          <p:cNvPr id="27" name="Text 25"/>
+          <p:cNvSpPr/>
+          <p:nvPr/>
+        </p:nvSpPr>
+        <p:spPr>
+          <a:xfrm>
+            <a:off x="4645152" y="3364992"/>
+            <a:ext cx="1097280" cy="475488"/>
+          </a:xfrm>
+          <a:prstGeom prst="rect">
+            <a:avLst/>
+          </a:prstGeom>
+          <a:noFill/>
+          <a:ln/>
+        </p:spPr>
+        <p:txBody>
+          <a:bodyPr wrap="square" lIns="0" tIns="0" rIns="0" bIns="0" rtlCol="0" anchor="ctr"/>
+          <a:lstStyle/>
+          <a:p>
+            <a:pPr algn="ctr" indent="0" marL="0">
+              <a:buNone/>
+            </a:pPr>
+            <a:r>
+              <a:rPr lang="en-US" sz="1600" b="1" dirty="0">
+                <a:solidFill>
+                  <a:srgbClr val="0D9488"/>
+                </a:solidFill>
+                <a:latin typeface="Trebuchet MS" pitchFamily="34" charset="0"/>
+                <a:ea typeface="Trebuchet MS" pitchFamily="34" charset="-122"/>
+                <a:cs typeface="Trebuchet MS" pitchFamily="34" charset="-120"/>
+              </a:rPr>
+              <a:t>·</a:t>
+            </a:r>
+            <a:endParaRPr lang="en-US" sz="1600" dirty="0"/>
+          </a:p>
+        </p:txBody>
+      </p:sp>
+      <p:sp>
+        <p:nvSpPr>
+          <p:cNvPr id="28" name="Shape 26"/>
+          <p:cNvSpPr/>
+          <p:nvPr/>
+        </p:nvSpPr>
+        <p:spPr>
+          <a:xfrm>
+            <a:off x="5742432" y="3364992"/>
+            <a:ext cx="1645920" cy="475488"/>
+          </a:xfrm>
+          <a:prstGeom prst="rect">
+            <a:avLst>
+              <a:gd name="adj" fmla="val 9615"/>
+            </a:avLst>
+          </a:prstGeom>
+          <a:solidFill>
+            <a:srgbClr val="FFFFFF"/>
+          </a:solidFill>
+          <a:ln w="12700">
+            <a:solidFill>
+              <a:srgbClr val="0D9488"/>
+            </a:solidFill>
+            <a:prstDash val="solid"/>
+          </a:ln>
+        </p:spPr>
+      </p:sp>
+      <p:sp>
+        <p:nvSpPr>
+          <p:cNvPr id="29" name="Text 27"/>
+          <p:cNvSpPr/>
+          <p:nvPr/>
+        </p:nvSpPr>
+        <p:spPr>
+          <a:xfrm>
+            <a:off x="5742432" y="3364992"/>
+            <a:ext cx="1645920" cy="475488"/>
+          </a:xfrm>
+          <a:prstGeom prst="rect">
+            <a:avLst/>
+          </a:prstGeom>
+          <a:noFill/>
+          <a:ln/>
+        </p:spPr>
+        <p:txBody>
+          <a:bodyPr wrap="square" lIns="0" tIns="0" rIns="0" bIns="0" rtlCol="0" anchor="ctr"/>
+          <a:lstStyle/>
+          <a:p>
+            <a:pPr algn="ctr" indent="0" marL="0">
+              <a:buNone/>
+            </a:pPr>
+            <a:r>
+              <a:rPr lang="en-US" sz="1400" b="1" dirty="0">
+                <a:solidFill>
+                  <a:srgbClr val="0D9488"/>
+                </a:solidFill>
+                <a:latin typeface="Trebuchet MS" pitchFamily="34" charset="0"/>
+                <a:ea typeface="Trebuchet MS" pitchFamily="34" charset="-122"/>
+                <a:cs typeface="Trebuchet MS" pitchFamily="34" charset="-120"/>
+              </a:rPr>
+              <a:t>er</a:t>
+            </a:r>
+            <a:endParaRPr lang="en-US" sz="1400" dirty="0"/>
+          </a:p>
+        </p:txBody>
+      </p:sp>
+      <p:sp>
+        <p:nvSpPr>
+          <p:cNvPr id="30" name="Shape 28"/>
+          <p:cNvSpPr/>
+          <p:nvPr/>
+        </p:nvSpPr>
+        <p:spPr>
+          <a:xfrm>
+            <a:off x="365760" y="4096512"/>
+            <a:ext cx="1371600" cy="804672"/>
+          </a:xfrm>
+          <a:prstGeom prst="rect">
+            <a:avLst>
+              <a:gd name="adj" fmla="val 6818"/>
+            </a:avLst>
+          </a:prstGeom>
+          <a:solidFill>
+            <a:srgbClr val="E2E8F0"/>
+          </a:solidFill>
+          <a:ln w="12700">
+            <a:solidFill>
+              <a:srgbClr val="E2E8F0"/>
+            </a:solidFill>
+            <a:prstDash val="solid"/>
+          </a:ln>
+        </p:spPr>
+      </p:sp>
+      <p:sp>
+        <p:nvSpPr>
+          <p:cNvPr id="31" name="Text 29"/>
+          <p:cNvSpPr/>
+          <p:nvPr/>
+        </p:nvSpPr>
+        <p:spPr>
+          <a:xfrm>
+            <a:off x="365760" y="4096512"/>
+            <a:ext cx="1371600" cy="804672"/>
+          </a:xfrm>
+          <a:prstGeom prst="rect">
+            <a:avLst/>
+          </a:prstGeom>
+          <a:noFill/>
+          <a:ln/>
+        </p:spPr>
+        <p:txBody>
+          <a:bodyPr wrap="square" lIns="0" tIns="0" rIns="0" bIns="0" rtlCol="0" anchor="ctr"/>
+          <a:lstStyle/>
+          <a:p>
+            <a:pPr algn="ctr" indent="0" marL="0">
+              <a:buNone/>
+            </a:pPr>
+            <a:r>
+              <a:rPr lang="en-US" sz="1100" b="1" dirty="0">
+                <a:solidFill>
+                  <a:srgbClr val="475569"/>
+                </a:solidFill>
+                <a:latin typeface="Trebuchet MS" pitchFamily="34" charset="0"/>
+                <a:ea typeface="Trebuchet MS" pitchFamily="34" charset="-122"/>
+                <a:cs typeface="Trebuchet MS" pitchFamily="34" charset="-120"/>
+              </a:rPr>
+              <a:t>Phonemes</a:t>
             </a:r>
             <a:endParaRPr lang="en-US" sz="1100" dirty="0"/>
           </a:p>
@@ -30922,13 +31555,13 @@
       </p:sp>
       <p:sp>
         <p:nvSpPr>
-          <p:cNvPr id="27" name="Shape 25"/>
-          <p:cNvSpPr/>
-          <p:nvPr/>
-        </p:nvSpPr>
-        <p:spPr>
-          <a:xfrm>
-            <a:off x="1874520" y="3273552"/>
+          <p:cNvPr id="32" name="Shape 30"/>
+          <p:cNvSpPr/>
+          <p:nvPr/>
+        </p:nvSpPr>
+        <p:spPr>
+          <a:xfrm>
+            <a:off x="1874520" y="4096512"/>
             <a:ext cx="6903720" cy="658368"/>
           </a:xfrm>
           <a:prstGeom prst="rect">
@@ -30937,30 +31570,30 @@
             </a:avLst>
           </a:prstGeom>
           <a:solidFill>
-            <a:srgbClr val="CCFBF1"/>
-          </a:solidFill>
-          <a:ln w="12700">
-            <a:solidFill>
-              <a:srgbClr val="0D9488"/>
-            </a:solidFill>
-            <a:prstDash val="solid"/>
-          </a:ln>
-        </p:spPr>
-      </p:sp>
-      <p:sp>
-        <p:nvSpPr>
-          <p:cNvPr id="28" name="Shape 26"/>
-          <p:cNvSpPr/>
-          <p:nvPr/>
-        </p:nvSpPr>
-        <p:spPr>
-          <a:xfrm>
-            <a:off x="2313432" y="3364992"/>
-            <a:ext cx="1645920" cy="475488"/>
+            <a:srgbClr val="FCE7F3"/>
+          </a:solidFill>
+          <a:ln w="12700">
+            <a:solidFill>
+              <a:srgbClr val="DB2777"/>
+            </a:solidFill>
+            <a:prstDash val="solid"/>
+          </a:ln>
+        </p:spPr>
+      </p:sp>
+      <p:sp>
+        <p:nvSpPr>
+          <p:cNvPr id="33" name="Shape 31"/>
+          <p:cNvSpPr/>
+          <p:nvPr/>
+        </p:nvSpPr>
+        <p:spPr>
+          <a:xfrm>
+            <a:off x="2670048" y="4169664"/>
+            <a:ext cx="685800" cy="475488"/>
           </a:xfrm>
           <a:prstGeom prst="rect">
             <a:avLst>
-              <a:gd name="adj" fmla="val 9615"/>
+              <a:gd name="adj" fmla="val 7692"/>
             </a:avLst>
           </a:prstGeom>
           <a:solidFill>
@@ -30968,22 +31601,22 @@
           </a:solidFill>
           <a:ln w="12700">
             <a:solidFill>
-              <a:srgbClr val="0D9488"/>
-            </a:solidFill>
-            <a:prstDash val="solid"/>
-          </a:ln>
-        </p:spPr>
-      </p:sp>
-      <p:sp>
-        <p:nvSpPr>
-          <p:cNvPr id="29" name="Text 27"/>
-          <p:cNvSpPr/>
-          <p:nvPr/>
-        </p:nvSpPr>
-        <p:spPr>
-          <a:xfrm>
-            <a:off x="2313432" y="3364992"/>
-            <a:ext cx="1645920" cy="475488"/>
+              <a:srgbClr val="DB2777"/>
+            </a:solidFill>
+            <a:prstDash val="solid"/>
+          </a:ln>
+        </p:spPr>
+      </p:sp>
+      <p:sp>
+        <p:nvSpPr>
+          <p:cNvPr id="34" name="Text 32"/>
+          <p:cNvSpPr/>
+          <p:nvPr/>
+        </p:nvSpPr>
+        <p:spPr>
+          <a:xfrm>
+            <a:off x="2670048" y="4169664"/>
+            <a:ext cx="685800" cy="475488"/>
           </a:xfrm>
           <a:prstGeom prst="rect">
             <a:avLst/>
@@ -30999,30 +31632,57 @@
               <a:buNone/>
             </a:pPr>
             <a:r>
-              <a:rPr lang="en-US" sz="1400" b="1" dirty="0">
-                <a:solidFill>
-                  <a:srgbClr val="0D9488"/>
+              <a:rPr lang="en-US" sz="900" b="1" dirty="0">
+                <a:solidFill>
+                  <a:srgbClr val="9D174D"/>
                 </a:solidFill>
                 <a:latin typeface="Trebuchet MS" pitchFamily="34" charset="0"/>
                 <a:ea typeface="Trebuchet MS" pitchFamily="34" charset="-122"/>
                 <a:cs typeface="Trebuchet MS" pitchFamily="34" charset="-120"/>
               </a:rPr>
-              <a:t>kind</a:t>
-            </a:r>
-            <a:endParaRPr lang="en-US" sz="1400" dirty="0"/>
-          </a:p>
-        </p:txBody>
-      </p:sp>
-      <p:sp>
-        <p:nvSpPr>
-          <p:cNvPr id="30" name="Text 28"/>
-          <p:cNvSpPr/>
-          <p:nvPr/>
-        </p:nvSpPr>
-        <p:spPr>
-          <a:xfrm>
-            <a:off x="3959352" y="3364992"/>
-            <a:ext cx="411480" cy="475488"/>
+              <a:t>k</a:t>
+            </a:r>
+            <a:endParaRPr lang="en-US" sz="900" dirty="0"/>
+          </a:p>
+        </p:txBody>
+      </p:sp>
+      <p:sp>
+        <p:nvSpPr>
+          <p:cNvPr id="35" name="Shape 33"/>
+          <p:cNvSpPr/>
+          <p:nvPr/>
+        </p:nvSpPr>
+        <p:spPr>
+          <a:xfrm>
+            <a:off x="4123944" y="4169664"/>
+            <a:ext cx="685800" cy="475488"/>
+          </a:xfrm>
+          <a:prstGeom prst="rect">
+            <a:avLst>
+              <a:gd name="adj" fmla="val 7692"/>
+            </a:avLst>
+          </a:prstGeom>
+          <a:solidFill>
+            <a:srgbClr val="FFFFFF"/>
+          </a:solidFill>
+          <a:ln w="12700">
+            <a:solidFill>
+              <a:srgbClr val="DB2777"/>
+            </a:solidFill>
+            <a:prstDash val="solid"/>
+          </a:ln>
+        </p:spPr>
+      </p:sp>
+      <p:sp>
+        <p:nvSpPr>
+          <p:cNvPr id="36" name="Text 34"/>
+          <p:cNvSpPr/>
+          <p:nvPr/>
+        </p:nvSpPr>
+        <p:spPr>
+          <a:xfrm>
+            <a:off x="4123944" y="4169664"/>
+            <a:ext cx="685800" cy="475488"/>
           </a:xfrm>
           <a:prstGeom prst="rect">
             <a:avLst/>
@@ -31038,34 +31698,34 @@
               <a:buNone/>
             </a:pPr>
             <a:r>
-              <a:rPr lang="en-US" sz="1600" b="1" dirty="0">
-                <a:solidFill>
-                  <a:srgbClr val="0D9488"/>
+              <a:rPr lang="en-US" sz="900" b="1" dirty="0">
+                <a:solidFill>
+                  <a:srgbClr val="9D174D"/>
                 </a:solidFill>
                 <a:latin typeface="Trebuchet MS" pitchFamily="34" charset="0"/>
                 <a:ea typeface="Trebuchet MS" pitchFamily="34" charset="-122"/>
                 <a:cs typeface="Trebuchet MS" pitchFamily="34" charset="-120"/>
               </a:rPr>
-              <a:t>·</a:t>
-            </a:r>
-            <a:endParaRPr lang="en-US" sz="1600" dirty="0"/>
-          </a:p>
-        </p:txBody>
-      </p:sp>
-      <p:sp>
-        <p:nvSpPr>
-          <p:cNvPr id="31" name="Shape 29"/>
-          <p:cNvSpPr/>
-          <p:nvPr/>
-        </p:nvSpPr>
-        <p:spPr>
-          <a:xfrm>
-            <a:off x="4370832" y="3364992"/>
-            <a:ext cx="1645920" cy="475488"/>
+              <a:t>i</a:t>
+            </a:r>
+            <a:endParaRPr lang="en-US" sz="900" dirty="0"/>
+          </a:p>
+        </p:txBody>
+      </p:sp>
+      <p:sp>
+        <p:nvSpPr>
+          <p:cNvPr id="37" name="Shape 35"/>
+          <p:cNvSpPr/>
+          <p:nvPr/>
+        </p:nvSpPr>
+        <p:spPr>
+          <a:xfrm>
+            <a:off x="5577840" y="4169664"/>
+            <a:ext cx="685800" cy="475488"/>
           </a:xfrm>
           <a:prstGeom prst="rect">
             <a:avLst>
-              <a:gd name="adj" fmla="val 9615"/>
+              <a:gd name="adj" fmla="val 7692"/>
             </a:avLst>
           </a:prstGeom>
           <a:solidFill>
@@ -31073,22 +31733,22 @@
           </a:solidFill>
           <a:ln w="12700">
             <a:solidFill>
-              <a:srgbClr val="0D9488"/>
-            </a:solidFill>
-            <a:prstDash val="solid"/>
-          </a:ln>
-        </p:spPr>
-      </p:sp>
-      <p:sp>
-        <p:nvSpPr>
-          <p:cNvPr id="32" name="Text 30"/>
-          <p:cNvSpPr/>
-          <p:nvPr/>
-        </p:nvSpPr>
-        <p:spPr>
-          <a:xfrm>
-            <a:off x="4370832" y="3364992"/>
-            <a:ext cx="1645920" cy="475488"/>
+              <a:srgbClr val="DB2777"/>
+            </a:solidFill>
+            <a:prstDash val="solid"/>
+          </a:ln>
+        </p:spPr>
+      </p:sp>
+      <p:sp>
+        <p:nvSpPr>
+          <p:cNvPr id="38" name="Text 36"/>
+          <p:cNvSpPr/>
+          <p:nvPr/>
+        </p:nvSpPr>
+        <p:spPr>
+          <a:xfrm>
+            <a:off x="5577840" y="4169664"/>
+            <a:ext cx="685800" cy="475488"/>
           </a:xfrm>
           <a:prstGeom prst="rect">
             <a:avLst/>
@@ -31104,30 +31764,57 @@
               <a:buNone/>
             </a:pPr>
             <a:r>
-              <a:rPr lang="en-US" sz="1400" b="1" dirty="0">
-                <a:solidFill>
-                  <a:srgbClr val="0D9488"/>
+              <a:rPr lang="en-US" sz="900" b="1" dirty="0">
+                <a:solidFill>
+                  <a:srgbClr val="9D174D"/>
                 </a:solidFill>
                 <a:latin typeface="Trebuchet MS" pitchFamily="34" charset="0"/>
                 <a:ea typeface="Trebuchet MS" pitchFamily="34" charset="-122"/>
                 <a:cs typeface="Trebuchet MS" pitchFamily="34" charset="-120"/>
               </a:rPr>
-              <a:t>heart</a:t>
-            </a:r>
-            <a:endParaRPr lang="en-US" sz="1400" dirty="0"/>
-          </a:p>
-        </p:txBody>
-      </p:sp>
-      <p:sp>
-        <p:nvSpPr>
-          <p:cNvPr id="33" name="Text 31"/>
-          <p:cNvSpPr/>
-          <p:nvPr/>
-        </p:nvSpPr>
-        <p:spPr>
-          <a:xfrm>
-            <a:off x="6016752" y="3364992"/>
-            <a:ext cx="411480" cy="475488"/>
+              <a:t>nd</a:t>
+            </a:r>
+            <a:endParaRPr lang="en-US" sz="900" dirty="0"/>
+          </a:p>
+        </p:txBody>
+      </p:sp>
+      <p:sp>
+        <p:nvSpPr>
+          <p:cNvPr id="39" name="Shape 37"/>
+          <p:cNvSpPr/>
+          <p:nvPr/>
+        </p:nvSpPr>
+        <p:spPr>
+          <a:xfrm>
+            <a:off x="7031736" y="4169664"/>
+            <a:ext cx="685800" cy="475488"/>
+          </a:xfrm>
+          <a:prstGeom prst="rect">
+            <a:avLst>
+              <a:gd name="adj" fmla="val 7692"/>
+            </a:avLst>
+          </a:prstGeom>
+          <a:solidFill>
+            <a:srgbClr val="FFFFFF"/>
+          </a:solidFill>
+          <a:ln w="12700">
+            <a:solidFill>
+              <a:srgbClr val="DB2777"/>
+            </a:solidFill>
+            <a:prstDash val="solid"/>
+          </a:ln>
+        </p:spPr>
+      </p:sp>
+      <p:sp>
+        <p:nvSpPr>
+          <p:cNvPr id="40" name="Text 38"/>
+          <p:cNvSpPr/>
+          <p:nvPr/>
+        </p:nvSpPr>
+        <p:spPr>
+          <a:xfrm>
+            <a:off x="7031736" y="4169664"/>
+            <a:ext cx="685800" cy="475488"/>
           </a:xfrm>
           <a:prstGeom prst="rect">
             <a:avLst/>
@@ -31143,702 +31830,15 @@
               <a:buNone/>
             </a:pPr>
             <a:r>
-              <a:rPr lang="en-US" sz="1600" b="1" dirty="0">
-                <a:solidFill>
-                  <a:srgbClr val="0D9488"/>
+              <a:rPr lang="en-US" sz="900" b="1" dirty="0">
+                <a:solidFill>
+                  <a:srgbClr val="9D174D"/>
                 </a:solidFill>
                 <a:latin typeface="Trebuchet MS" pitchFamily="34" charset="0"/>
                 <a:ea typeface="Trebuchet MS" pitchFamily="34" charset="-122"/>
                 <a:cs typeface="Trebuchet MS" pitchFamily="34" charset="-120"/>
               </a:rPr>
-              <a:t>·</a:t>
-            </a:r>
-            <a:endParaRPr lang="en-US" sz="1600" dirty="0"/>
-          </a:p>
-        </p:txBody>
-      </p:sp>
-      <p:sp>
-        <p:nvSpPr>
-          <p:cNvPr id="34" name="Shape 32"/>
-          <p:cNvSpPr/>
-          <p:nvPr/>
-        </p:nvSpPr>
-        <p:spPr>
-          <a:xfrm>
-            <a:off x="6428232" y="3364992"/>
-            <a:ext cx="1645920" cy="475488"/>
-          </a:xfrm>
-          <a:prstGeom prst="rect">
-            <a:avLst>
-              <a:gd name="adj" fmla="val 9615"/>
-            </a:avLst>
-          </a:prstGeom>
-          <a:solidFill>
-            <a:srgbClr val="FFFFFF"/>
-          </a:solidFill>
-          <a:ln w="12700">
-            <a:solidFill>
-              <a:srgbClr val="0D9488"/>
-            </a:solidFill>
-            <a:prstDash val="solid"/>
-          </a:ln>
-        </p:spPr>
-      </p:sp>
-      <p:sp>
-        <p:nvSpPr>
-          <p:cNvPr id="35" name="Text 33"/>
-          <p:cNvSpPr/>
-          <p:nvPr/>
-        </p:nvSpPr>
-        <p:spPr>
-          <a:xfrm>
-            <a:off x="6428232" y="3364992"/>
-            <a:ext cx="1645920" cy="475488"/>
-          </a:xfrm>
-          <a:prstGeom prst="rect">
-            <a:avLst/>
-          </a:prstGeom>
-          <a:noFill/>
-          <a:ln/>
-        </p:spPr>
-        <p:txBody>
-          <a:bodyPr wrap="square" lIns="0" tIns="0" rIns="0" bIns="0" rtlCol="0" anchor="ctr"/>
-          <a:lstStyle/>
-          <a:p>
-            <a:pPr algn="ctr" indent="0" marL="0">
-              <a:buNone/>
-            </a:pPr>
-            <a:r>
-              <a:rPr lang="en-US" sz="1400" b="1" dirty="0">
-                <a:solidFill>
-                  <a:srgbClr val="0D9488"/>
-                </a:solidFill>
-                <a:latin typeface="Trebuchet MS" pitchFamily="34" charset="0"/>
-                <a:ea typeface="Trebuchet MS" pitchFamily="34" charset="-122"/>
-                <a:cs typeface="Trebuchet MS" pitchFamily="34" charset="-120"/>
-              </a:rPr>
-              <a:t>ed</a:t>
-            </a:r>
-            <a:endParaRPr lang="en-US" sz="1400" dirty="0"/>
-          </a:p>
-        </p:txBody>
-      </p:sp>
-      <p:sp>
-        <p:nvSpPr>
-          <p:cNvPr id="36" name="Shape 34"/>
-          <p:cNvSpPr/>
-          <p:nvPr/>
-        </p:nvSpPr>
-        <p:spPr>
-          <a:xfrm>
-            <a:off x="365760" y="4096512"/>
-            <a:ext cx="1371600" cy="804672"/>
-          </a:xfrm>
-          <a:prstGeom prst="rect">
-            <a:avLst>
-              <a:gd name="adj" fmla="val 6818"/>
-            </a:avLst>
-          </a:prstGeom>
-          <a:solidFill>
-            <a:srgbClr val="E2E8F0"/>
-          </a:solidFill>
-          <a:ln w="12700">
-            <a:solidFill>
-              <a:srgbClr val="E2E8F0"/>
-            </a:solidFill>
-            <a:prstDash val="solid"/>
-          </a:ln>
-        </p:spPr>
-      </p:sp>
-      <p:sp>
-        <p:nvSpPr>
-          <p:cNvPr id="37" name="Text 35"/>
-          <p:cNvSpPr/>
-          <p:nvPr/>
-        </p:nvSpPr>
-        <p:spPr>
-          <a:xfrm>
-            <a:off x="365760" y="4096512"/>
-            <a:ext cx="1371600" cy="804672"/>
-          </a:xfrm>
-          <a:prstGeom prst="rect">
-            <a:avLst/>
-          </a:prstGeom>
-          <a:noFill/>
-          <a:ln/>
-        </p:spPr>
-        <p:txBody>
-          <a:bodyPr wrap="square" lIns="0" tIns="0" rIns="0" bIns="0" rtlCol="0" anchor="ctr"/>
-          <a:lstStyle/>
-          <a:p>
-            <a:pPr algn="ctr" indent="0" marL="0">
-              <a:buNone/>
-            </a:pPr>
-            <a:r>
-              <a:rPr lang="en-US" sz="1100" b="1" dirty="0">
-                <a:solidFill>
-                  <a:srgbClr val="475569"/>
-                </a:solidFill>
-                <a:latin typeface="Trebuchet MS" pitchFamily="34" charset="0"/>
-                <a:ea typeface="Trebuchet MS" pitchFamily="34" charset="-122"/>
-                <a:cs typeface="Trebuchet MS" pitchFamily="34" charset="-120"/>
-              </a:rPr>
-              <a:t>Phonemes</a:t>
-            </a:r>
-            <a:endParaRPr lang="en-US" sz="1100" dirty="0"/>
-          </a:p>
-        </p:txBody>
-      </p:sp>
-      <p:sp>
-        <p:nvSpPr>
-          <p:cNvPr id="38" name="Shape 36"/>
-          <p:cNvSpPr/>
-          <p:nvPr/>
-        </p:nvSpPr>
-        <p:spPr>
-          <a:xfrm>
-            <a:off x="1874520" y="4096512"/>
-            <a:ext cx="6903720" cy="658368"/>
-          </a:xfrm>
-          <a:prstGeom prst="rect">
-            <a:avLst>
-              <a:gd name="adj" fmla="val 8333"/>
-            </a:avLst>
-          </a:prstGeom>
-          <a:solidFill>
-            <a:srgbClr val="FCE7F3"/>
-          </a:solidFill>
-          <a:ln w="12700">
-            <a:solidFill>
-              <a:srgbClr val="DB2777"/>
-            </a:solidFill>
-            <a:prstDash val="solid"/>
-          </a:ln>
-        </p:spPr>
-      </p:sp>
-      <p:sp>
-        <p:nvSpPr>
-          <p:cNvPr id="39" name="Shape 37"/>
-          <p:cNvSpPr/>
-          <p:nvPr/>
-        </p:nvSpPr>
-        <p:spPr>
-          <a:xfrm>
-            <a:off x="2023872" y="4169664"/>
-            <a:ext cx="685800" cy="475488"/>
-          </a:xfrm>
-          <a:prstGeom prst="rect">
-            <a:avLst>
-              <a:gd name="adj" fmla="val 7692"/>
-            </a:avLst>
-          </a:prstGeom>
-          <a:solidFill>
-            <a:srgbClr val="FFFFFF"/>
-          </a:solidFill>
-          <a:ln w="12700">
-            <a:solidFill>
-              <a:srgbClr val="DB2777"/>
-            </a:solidFill>
-            <a:prstDash val="solid"/>
-          </a:ln>
-        </p:spPr>
-      </p:sp>
-      <p:sp>
-        <p:nvSpPr>
-          <p:cNvPr id="40" name="Text 38"/>
-          <p:cNvSpPr/>
-          <p:nvPr/>
-        </p:nvSpPr>
-        <p:spPr>
-          <a:xfrm>
-            <a:off x="2023872" y="4169664"/>
-            <a:ext cx="685800" cy="475488"/>
-          </a:xfrm>
-          <a:prstGeom prst="rect">
-            <a:avLst/>
-          </a:prstGeom>
-          <a:noFill/>
-          <a:ln/>
-        </p:spPr>
-        <p:txBody>
-          <a:bodyPr wrap="square" lIns="0" tIns="0" rIns="0" bIns="0" rtlCol="0" anchor="ctr"/>
-          <a:lstStyle/>
-          <a:p>
-            <a:pPr algn="ctr" indent="0" marL="0">
-              <a:buNone/>
-            </a:pPr>
-            <a:r>
-              <a:rPr lang="en-US" sz="900" b="1" dirty="0">
-                <a:solidFill>
-                  <a:srgbClr val="9D174D"/>
-                </a:solidFill>
-                <a:latin typeface="Trebuchet MS" pitchFamily="34" charset="0"/>
-                <a:ea typeface="Trebuchet MS" pitchFamily="34" charset="-122"/>
-                <a:cs typeface="Trebuchet MS" pitchFamily="34" charset="-120"/>
-              </a:rPr>
-              <a:t>k</a:t>
-            </a:r>
-            <a:endParaRPr lang="en-US" sz="900" dirty="0"/>
-          </a:p>
-        </p:txBody>
-      </p:sp>
-      <p:sp>
-        <p:nvSpPr>
-          <p:cNvPr id="41" name="Shape 39"/>
-          <p:cNvSpPr/>
-          <p:nvPr/>
-        </p:nvSpPr>
-        <p:spPr>
-          <a:xfrm>
-            <a:off x="2831592" y="4169664"/>
-            <a:ext cx="685800" cy="475488"/>
-          </a:xfrm>
-          <a:prstGeom prst="rect">
-            <a:avLst>
-              <a:gd name="adj" fmla="val 7692"/>
-            </a:avLst>
-          </a:prstGeom>
-          <a:solidFill>
-            <a:srgbClr val="FFFFFF"/>
-          </a:solidFill>
-          <a:ln w="12700">
-            <a:solidFill>
-              <a:srgbClr val="DB2777"/>
-            </a:solidFill>
-            <a:prstDash val="solid"/>
-          </a:ln>
-        </p:spPr>
-      </p:sp>
-      <p:sp>
-        <p:nvSpPr>
-          <p:cNvPr id="42" name="Text 40"/>
-          <p:cNvSpPr/>
-          <p:nvPr/>
-        </p:nvSpPr>
-        <p:spPr>
-          <a:xfrm>
-            <a:off x="2831592" y="4169664"/>
-            <a:ext cx="685800" cy="475488"/>
-          </a:xfrm>
-          <a:prstGeom prst="rect">
-            <a:avLst/>
-          </a:prstGeom>
-          <a:noFill/>
-          <a:ln/>
-        </p:spPr>
-        <p:txBody>
-          <a:bodyPr wrap="square" lIns="0" tIns="0" rIns="0" bIns="0" rtlCol="0" anchor="ctr"/>
-          <a:lstStyle/>
-          <a:p>
-            <a:pPr algn="ctr" indent="0" marL="0">
-              <a:buNone/>
-            </a:pPr>
-            <a:r>
-              <a:rPr lang="en-US" sz="900" b="1" dirty="0">
-                <a:solidFill>
-                  <a:srgbClr val="9D174D"/>
-                </a:solidFill>
-                <a:latin typeface="Trebuchet MS" pitchFamily="34" charset="0"/>
-                <a:ea typeface="Trebuchet MS" pitchFamily="34" charset="-122"/>
-                <a:cs typeface="Trebuchet MS" pitchFamily="34" charset="-120"/>
-              </a:rPr>
-              <a:t>i</a:t>
-            </a:r>
-            <a:endParaRPr lang="en-US" sz="900" dirty="0"/>
-          </a:p>
-        </p:txBody>
-      </p:sp>
-      <p:sp>
-        <p:nvSpPr>
-          <p:cNvPr id="43" name="Shape 41"/>
-          <p:cNvSpPr/>
-          <p:nvPr/>
-        </p:nvSpPr>
-        <p:spPr>
-          <a:xfrm>
-            <a:off x="3639312" y="4169664"/>
-            <a:ext cx="685800" cy="475488"/>
-          </a:xfrm>
-          <a:prstGeom prst="rect">
-            <a:avLst>
-              <a:gd name="adj" fmla="val 7692"/>
-            </a:avLst>
-          </a:prstGeom>
-          <a:solidFill>
-            <a:srgbClr val="FFFFFF"/>
-          </a:solidFill>
-          <a:ln w="12700">
-            <a:solidFill>
-              <a:srgbClr val="DB2777"/>
-            </a:solidFill>
-            <a:prstDash val="solid"/>
-          </a:ln>
-        </p:spPr>
-      </p:sp>
-      <p:sp>
-        <p:nvSpPr>
-          <p:cNvPr id="44" name="Text 42"/>
-          <p:cNvSpPr/>
-          <p:nvPr/>
-        </p:nvSpPr>
-        <p:spPr>
-          <a:xfrm>
-            <a:off x="3639312" y="4169664"/>
-            <a:ext cx="685800" cy="475488"/>
-          </a:xfrm>
-          <a:prstGeom prst="rect">
-            <a:avLst/>
-          </a:prstGeom>
-          <a:noFill/>
-          <a:ln/>
-        </p:spPr>
-        <p:txBody>
-          <a:bodyPr wrap="square" lIns="0" tIns="0" rIns="0" bIns="0" rtlCol="0" anchor="ctr"/>
-          <a:lstStyle/>
-          <a:p>
-            <a:pPr algn="ctr" indent="0" marL="0">
-              <a:buNone/>
-            </a:pPr>
-            <a:r>
-              <a:rPr lang="en-US" sz="900" b="1" dirty="0">
-                <a:solidFill>
-                  <a:srgbClr val="9D174D"/>
-                </a:solidFill>
-                <a:latin typeface="Trebuchet MS" pitchFamily="34" charset="0"/>
-                <a:ea typeface="Trebuchet MS" pitchFamily="34" charset="-122"/>
-                <a:cs typeface="Trebuchet MS" pitchFamily="34" charset="-120"/>
-              </a:rPr>
-              <a:t>nd</a:t>
-            </a:r>
-            <a:endParaRPr lang="en-US" sz="900" dirty="0"/>
-          </a:p>
-        </p:txBody>
-      </p:sp>
-      <p:sp>
-        <p:nvSpPr>
-          <p:cNvPr id="45" name="Shape 43"/>
-          <p:cNvSpPr/>
-          <p:nvPr/>
-        </p:nvSpPr>
-        <p:spPr>
-          <a:xfrm>
-            <a:off x="4447032" y="4169664"/>
-            <a:ext cx="685800" cy="475488"/>
-          </a:xfrm>
-          <a:prstGeom prst="rect">
-            <a:avLst>
-              <a:gd name="adj" fmla="val 7692"/>
-            </a:avLst>
-          </a:prstGeom>
-          <a:solidFill>
-            <a:srgbClr val="FFFFFF"/>
-          </a:solidFill>
-          <a:ln w="12700">
-            <a:solidFill>
-              <a:srgbClr val="DB2777"/>
-            </a:solidFill>
-            <a:prstDash val="solid"/>
-          </a:ln>
-        </p:spPr>
-      </p:sp>
-      <p:sp>
-        <p:nvSpPr>
-          <p:cNvPr id="46" name="Text 44"/>
-          <p:cNvSpPr/>
-          <p:nvPr/>
-        </p:nvSpPr>
-        <p:spPr>
-          <a:xfrm>
-            <a:off x="4447032" y="4169664"/>
-            <a:ext cx="685800" cy="475488"/>
-          </a:xfrm>
-          <a:prstGeom prst="rect">
-            <a:avLst/>
-          </a:prstGeom>
-          <a:noFill/>
-          <a:ln/>
-        </p:spPr>
-        <p:txBody>
-          <a:bodyPr wrap="square" lIns="0" tIns="0" rIns="0" bIns="0" rtlCol="0" anchor="ctr"/>
-          <a:lstStyle/>
-          <a:p>
-            <a:pPr algn="ctr" indent="0" marL="0">
-              <a:buNone/>
-            </a:pPr>
-            <a:r>
-              <a:rPr lang="en-US" sz="900" b="1" dirty="0">
-                <a:solidFill>
-                  <a:srgbClr val="9D174D"/>
-                </a:solidFill>
-                <a:latin typeface="Trebuchet MS" pitchFamily="34" charset="0"/>
-                <a:ea typeface="Trebuchet MS" pitchFamily="34" charset="-122"/>
-                <a:cs typeface="Trebuchet MS" pitchFamily="34" charset="-120"/>
-              </a:rPr>
-              <a:t>h</a:t>
-            </a:r>
-            <a:endParaRPr lang="en-US" sz="900" dirty="0"/>
-          </a:p>
-        </p:txBody>
-      </p:sp>
-      <p:sp>
-        <p:nvSpPr>
-          <p:cNvPr id="47" name="Shape 45"/>
-          <p:cNvSpPr/>
-          <p:nvPr/>
-        </p:nvSpPr>
-        <p:spPr>
-          <a:xfrm>
-            <a:off x="5254752" y="4169664"/>
-            <a:ext cx="685800" cy="475488"/>
-          </a:xfrm>
-          <a:prstGeom prst="rect">
-            <a:avLst>
-              <a:gd name="adj" fmla="val 7692"/>
-            </a:avLst>
-          </a:prstGeom>
-          <a:solidFill>
-            <a:srgbClr val="FFFFFF"/>
-          </a:solidFill>
-          <a:ln w="12700">
-            <a:solidFill>
-              <a:srgbClr val="DB2777"/>
-            </a:solidFill>
-            <a:prstDash val="solid"/>
-          </a:ln>
-        </p:spPr>
-      </p:sp>
-      <p:sp>
-        <p:nvSpPr>
-          <p:cNvPr id="48" name="Text 46"/>
-          <p:cNvSpPr/>
-          <p:nvPr/>
-        </p:nvSpPr>
-        <p:spPr>
-          <a:xfrm>
-            <a:off x="5254752" y="4169664"/>
-            <a:ext cx="685800" cy="475488"/>
-          </a:xfrm>
-          <a:prstGeom prst="rect">
-            <a:avLst/>
-          </a:prstGeom>
-          <a:noFill/>
-          <a:ln/>
-        </p:spPr>
-        <p:txBody>
-          <a:bodyPr wrap="square" lIns="0" tIns="0" rIns="0" bIns="0" rtlCol="0" anchor="ctr"/>
-          <a:lstStyle/>
-          <a:p>
-            <a:pPr algn="ctr" indent="0" marL="0">
-              <a:buNone/>
-            </a:pPr>
-            <a:r>
-              <a:rPr lang="en-US" sz="900" b="1" dirty="0">
-                <a:solidFill>
-                  <a:srgbClr val="9D174D"/>
-                </a:solidFill>
-                <a:latin typeface="Trebuchet MS" pitchFamily="34" charset="0"/>
-                <a:ea typeface="Trebuchet MS" pitchFamily="34" charset="-122"/>
-                <a:cs typeface="Trebuchet MS" pitchFamily="34" charset="-120"/>
-              </a:rPr>
-              <a:t>ear</a:t>
-            </a:r>
-            <a:endParaRPr lang="en-US" sz="900" dirty="0"/>
-          </a:p>
-        </p:txBody>
-      </p:sp>
-      <p:sp>
-        <p:nvSpPr>
-          <p:cNvPr id="49" name="Shape 47"/>
-          <p:cNvSpPr/>
-          <p:nvPr/>
-        </p:nvSpPr>
-        <p:spPr>
-          <a:xfrm>
-            <a:off x="6062472" y="4169664"/>
-            <a:ext cx="685800" cy="475488"/>
-          </a:xfrm>
-          <a:prstGeom prst="rect">
-            <a:avLst>
-              <a:gd name="adj" fmla="val 7692"/>
-            </a:avLst>
-          </a:prstGeom>
-          <a:solidFill>
-            <a:srgbClr val="FFFFFF"/>
-          </a:solidFill>
-          <a:ln w="12700">
-            <a:solidFill>
-              <a:srgbClr val="DB2777"/>
-            </a:solidFill>
-            <a:prstDash val="solid"/>
-          </a:ln>
-        </p:spPr>
-      </p:sp>
-      <p:sp>
-        <p:nvSpPr>
-          <p:cNvPr id="50" name="Text 48"/>
-          <p:cNvSpPr/>
-          <p:nvPr/>
-        </p:nvSpPr>
-        <p:spPr>
-          <a:xfrm>
-            <a:off x="6062472" y="4169664"/>
-            <a:ext cx="685800" cy="475488"/>
-          </a:xfrm>
-          <a:prstGeom prst="rect">
-            <a:avLst/>
-          </a:prstGeom>
-          <a:noFill/>
-          <a:ln/>
-        </p:spPr>
-        <p:txBody>
-          <a:bodyPr wrap="square" lIns="0" tIns="0" rIns="0" bIns="0" rtlCol="0" anchor="ctr"/>
-          <a:lstStyle/>
-          <a:p>
-            <a:pPr algn="ctr" indent="0" marL="0">
-              <a:buNone/>
-            </a:pPr>
-            <a:r>
-              <a:rPr lang="en-US" sz="900" b="1" dirty="0">
-                <a:solidFill>
-                  <a:srgbClr val="9D174D"/>
-                </a:solidFill>
-                <a:latin typeface="Trebuchet MS" pitchFamily="34" charset="0"/>
-                <a:ea typeface="Trebuchet MS" pitchFamily="34" charset="-122"/>
-                <a:cs typeface="Trebuchet MS" pitchFamily="34" charset="-120"/>
-              </a:rPr>
-              <a:t>t</a:t>
-            </a:r>
-            <a:endParaRPr lang="en-US" sz="900" dirty="0"/>
-          </a:p>
-        </p:txBody>
-      </p:sp>
-      <p:sp>
-        <p:nvSpPr>
-          <p:cNvPr id="51" name="Shape 49"/>
-          <p:cNvSpPr/>
-          <p:nvPr/>
-        </p:nvSpPr>
-        <p:spPr>
-          <a:xfrm>
-            <a:off x="6870192" y="4169664"/>
-            <a:ext cx="685800" cy="475488"/>
-          </a:xfrm>
-          <a:prstGeom prst="rect">
-            <a:avLst>
-              <a:gd name="adj" fmla="val 7692"/>
-            </a:avLst>
-          </a:prstGeom>
-          <a:solidFill>
-            <a:srgbClr val="FFFFFF"/>
-          </a:solidFill>
-          <a:ln w="12700">
-            <a:solidFill>
-              <a:srgbClr val="DB2777"/>
-            </a:solidFill>
-            <a:prstDash val="solid"/>
-          </a:ln>
-        </p:spPr>
-      </p:sp>
-      <p:sp>
-        <p:nvSpPr>
-          <p:cNvPr id="52" name="Text 50"/>
-          <p:cNvSpPr/>
-          <p:nvPr/>
-        </p:nvSpPr>
-        <p:spPr>
-          <a:xfrm>
-            <a:off x="6870192" y="4169664"/>
-            <a:ext cx="685800" cy="475488"/>
-          </a:xfrm>
-          <a:prstGeom prst="rect">
-            <a:avLst/>
-          </a:prstGeom>
-          <a:noFill/>
-          <a:ln/>
-        </p:spPr>
-        <p:txBody>
-          <a:bodyPr wrap="square" lIns="0" tIns="0" rIns="0" bIns="0" rtlCol="0" anchor="ctr"/>
-          <a:lstStyle/>
-          <a:p>
-            <a:pPr algn="ctr" indent="0" marL="0">
-              <a:buNone/>
-            </a:pPr>
-            <a:r>
-              <a:rPr lang="en-US" sz="900" b="1" dirty="0">
-                <a:solidFill>
-                  <a:srgbClr val="9D174D"/>
-                </a:solidFill>
-                <a:latin typeface="Trebuchet MS" pitchFamily="34" charset="0"/>
-                <a:ea typeface="Trebuchet MS" pitchFamily="34" charset="-122"/>
-                <a:cs typeface="Trebuchet MS" pitchFamily="34" charset="-120"/>
-              </a:rPr>
-              <a:t>e</a:t>
-            </a:r>
-            <a:endParaRPr lang="en-US" sz="900" dirty="0"/>
-          </a:p>
-        </p:txBody>
-      </p:sp>
-      <p:sp>
-        <p:nvSpPr>
-          <p:cNvPr id="53" name="Shape 51"/>
-          <p:cNvSpPr/>
-          <p:nvPr/>
-        </p:nvSpPr>
-        <p:spPr>
-          <a:xfrm>
-            <a:off x="7677912" y="4169664"/>
-            <a:ext cx="685800" cy="475488"/>
-          </a:xfrm>
-          <a:prstGeom prst="rect">
-            <a:avLst>
-              <a:gd name="adj" fmla="val 7692"/>
-            </a:avLst>
-          </a:prstGeom>
-          <a:solidFill>
-            <a:srgbClr val="FFFFFF"/>
-          </a:solidFill>
-          <a:ln w="12700">
-            <a:solidFill>
-              <a:srgbClr val="DB2777"/>
-            </a:solidFill>
-            <a:prstDash val="solid"/>
-          </a:ln>
-        </p:spPr>
-      </p:sp>
-      <p:sp>
-        <p:nvSpPr>
-          <p:cNvPr id="54" name="Text 52"/>
-          <p:cNvSpPr/>
-          <p:nvPr/>
-        </p:nvSpPr>
-        <p:spPr>
-          <a:xfrm>
-            <a:off x="7677912" y="4169664"/>
-            <a:ext cx="685800" cy="475488"/>
-          </a:xfrm>
-          <a:prstGeom prst="rect">
-            <a:avLst/>
-          </a:prstGeom>
-          <a:noFill/>
-          <a:ln/>
-        </p:spPr>
-        <p:txBody>
-          <a:bodyPr wrap="square" lIns="0" tIns="0" rIns="0" bIns="0" rtlCol="0" anchor="ctr"/>
-          <a:lstStyle/>
-          <a:p>
-            <a:pPr algn="ctr" indent="0" marL="0">
-              <a:buNone/>
-            </a:pPr>
-            <a:r>
-              <a:rPr lang="en-US" sz="900" b="1" dirty="0">
-                <a:solidFill>
-                  <a:srgbClr val="9D174D"/>
-                </a:solidFill>
-                <a:latin typeface="Trebuchet MS" pitchFamily="34" charset="0"/>
-                <a:ea typeface="Trebuchet MS" pitchFamily="34" charset="-122"/>
-                <a:cs typeface="Trebuchet MS" pitchFamily="34" charset="-120"/>
-              </a:rPr>
-              <a:t>d</a:t>
+              <a:t>er</a:t>
             </a:r>
             <a:endParaRPr lang="en-US" sz="900" dirty="0"/>
           </a:p>
@@ -32130,7 +32130,7 @@
                 <a:ea typeface="Calibri" pitchFamily="34" charset="-122"/>
                 <a:cs typeface="Calibri" pitchFamily="34" charset="-120"/>
               </a:rPr>
-              <a:t>Word Labs  •  wordlabs.app  •  Root: 'kind' = caring, gentle, or type</a:t>
+              <a:t>Word Labs  •  wordlabs.app  •  Root: 'kind' = friendly, caring, gentle</a:t>
             </a:r>
             <a:endParaRPr lang="en-US" sz="800" dirty="0"/>
           </a:p>
@@ -33299,7 +33299,7 @@
                 <a:ea typeface="Calibri" pitchFamily="34" charset="-122"/>
                 <a:cs typeface="Calibri" pitchFamily="34" charset="-120"/>
               </a:rPr>
-              <a:t>Word Labs  •  wordlabs.app  •  Root: 'kind' = caring, gentle, or type</a:t>
+              <a:t>Word Labs  •  wordlabs.app  •  Root: 'kind' = friendly, caring, gentle</a:t>
             </a:r>
             <a:endParaRPr lang="en-US" sz="800" dirty="0"/>
           </a:p>
@@ -33792,7 +33792,7 @@
                 <a:ea typeface="Trebuchet MS" pitchFamily="34" charset="-122"/>
                 <a:cs typeface="Trebuchet MS" pitchFamily="34" charset="-120"/>
               </a:rPr>
-              <a:t>re-</a:t>
+              <a:t>man-</a:t>
             </a:r>
             <a:endParaRPr lang="en-US" sz="1300" dirty="0"/>
           </a:p>
@@ -33945,7 +33945,7 @@
                 <a:ea typeface="Trebuchet MS" pitchFamily="34" charset="-122"/>
                 <a:cs typeface="Trebuchet MS" pitchFamily="34" charset="-120"/>
               </a:rPr>
-              <a:t>fore-</a:t>
+              <a:t>womankind-</a:t>
             </a:r>
             <a:endParaRPr lang="en-US" sz="1300" dirty="0"/>
           </a:p>
@@ -34098,7 +34098,7 @@
                 <a:ea typeface="Trebuchet MS" pitchFamily="34" charset="-122"/>
                 <a:cs typeface="Trebuchet MS" pitchFamily="34" charset="-120"/>
               </a:rPr>
-              <a:t>man-</a:t>
+              <a:t>re-</a:t>
             </a:r>
             <a:endParaRPr lang="en-US" sz="1300" dirty="0"/>
           </a:p>
@@ -34251,7 +34251,7 @@
                 <a:ea typeface="Trebuchet MS" pitchFamily="34" charset="-122"/>
                 <a:cs typeface="Trebuchet MS" pitchFamily="34" charset="-120"/>
               </a:rPr>
-              <a:t>out-</a:t>
+              <a:t>all-</a:t>
             </a:r>
             <a:endParaRPr lang="en-US" sz="1300" dirty="0"/>
           </a:p>
@@ -34340,7 +34340,7 @@
                 <a:ea typeface="Trebuchet MS" pitchFamily="34" charset="-122"/>
                 <a:cs typeface="Trebuchet MS" pitchFamily="34" charset="-120"/>
               </a:rPr>
-              <a:t>-hearted</a:t>
+              <a:t>-red</a:t>
             </a:r>
             <a:endParaRPr lang="en-US" sz="1300" dirty="0"/>
           </a:p>
@@ -34445,7 +34445,7 @@
                 <a:ea typeface="Trebuchet MS" pitchFamily="34" charset="-122"/>
                 <a:cs typeface="Trebuchet MS" pitchFamily="34" charset="-120"/>
               </a:rPr>
-              <a:t>kindness</a:t>
+              <a:t>kind</a:t>
             </a:r>
             <a:endParaRPr lang="en-US" sz="1200" dirty="0"/>
           </a:p>
@@ -34511,7 +34511,7 @@
                 <a:ea typeface="Trebuchet MS" pitchFamily="34" charset="-122"/>
                 <a:cs typeface="Trebuchet MS" pitchFamily="34" charset="-120"/>
               </a:rPr>
-              <a:t>kindly</a:t>
+              <a:t>kindness</a:t>
             </a:r>
             <a:endParaRPr lang="en-US" sz="1200" dirty="0"/>
           </a:p>
@@ -34577,7 +34577,7 @@
                 <a:ea typeface="Trebuchet MS" pitchFamily="34" charset="-122"/>
                 <a:cs typeface="Trebuchet MS" pitchFamily="34" charset="-120"/>
               </a:rPr>
-              <a:t>kinder</a:t>
+              <a:t>kindly</a:t>
             </a:r>
             <a:endParaRPr lang="en-US" sz="1200" dirty="0"/>
           </a:p>
@@ -34643,7 +34643,7 @@
                 <a:ea typeface="Trebuchet MS" pitchFamily="34" charset="-122"/>
                 <a:cs typeface="Trebuchet MS" pitchFamily="34" charset="-120"/>
               </a:rPr>
-              <a:t>kindest</a:t>
+              <a:t>unkind</a:t>
             </a:r>
             <a:endParaRPr lang="en-US" sz="1200" dirty="0"/>
           </a:p>
@@ -34709,7 +34709,7 @@
                 <a:ea typeface="Trebuchet MS" pitchFamily="34" charset="-122"/>
                 <a:cs typeface="Trebuchet MS" pitchFamily="34" charset="-120"/>
               </a:rPr>
-              <a:t>unkind</a:t>
+              <a:t>kinder</a:t>
             </a:r>
             <a:endParaRPr lang="en-US" sz="1200" dirty="0"/>
           </a:p>
@@ -34775,7 +34775,7 @@
                 <a:ea typeface="Trebuchet MS" pitchFamily="34" charset="-122"/>
                 <a:cs typeface="Trebuchet MS" pitchFamily="34" charset="-120"/>
               </a:rPr>
-              <a:t>mankind</a:t>
+              <a:t>kindest</a:t>
             </a:r>
             <a:endParaRPr lang="en-US" sz="1200" dirty="0"/>
           </a:p>
@@ -34841,7 +34841,7 @@
                 <a:ea typeface="Trebuchet MS" pitchFamily="34" charset="-122"/>
                 <a:cs typeface="Trebuchet MS" pitchFamily="34" charset="-120"/>
               </a:rPr>
-              <a:t>kindhearted</a:t>
+              <a:t>mankind</a:t>
             </a:r>
             <a:endParaRPr lang="en-US" sz="1200" dirty="0"/>
           </a:p>
@@ -34907,7 +34907,7 @@
                 <a:ea typeface="Trebuchet MS" pitchFamily="34" charset="-122"/>
                 <a:cs typeface="Trebuchet MS" pitchFamily="34" charset="-120"/>
               </a:rPr>
-              <a:t>humankind</a:t>
+              <a:t>kindred</a:t>
             </a:r>
             <a:endParaRPr lang="en-US" sz="1200" dirty="0"/>
           </a:p>
@@ -35199,7 +35199,7 @@
                 <a:ea typeface="Calibri" pitchFamily="34" charset="-122"/>
                 <a:cs typeface="Calibri" pitchFamily="34" charset="-120"/>
               </a:rPr>
-              <a:t>Word Labs  •  wordlabs.app  •  Root: 'kind' = caring, gentle, or type</a:t>
+              <a:t>Word Labs  •  wordlabs.app  •  Root: 'kind' = friendly, caring, gentle</a:t>
             </a:r>
             <a:endParaRPr lang="en-US" sz="800" dirty="0"/>
           </a:p>
@@ -35363,7 +35363,7 @@
                 <a:ea typeface="Calibri" pitchFamily="34" charset="-122"/>
                 <a:cs typeface="Calibri" pitchFamily="34" charset="-120"/>
               </a:rPr>
-              <a:t>The core part of a word carrying its basic meaning. For example, 'kind' means 'caring, gentle, or type'.</a:t>
+              <a:t>The core part of a word carrying its basic meaning. For example, 'kind' means 'friendly, caring, gentle'.</a:t>
             </a:r>
             <a:endParaRPr lang="en-US" sz="1350" dirty="0"/>
           </a:p>
@@ -35983,7 +35983,7 @@
                 <a:ea typeface="Calibri" pitchFamily="34" charset="-122"/>
                 <a:cs typeface="Calibri" pitchFamily="34" charset="-120"/>
               </a:rPr>
-              <a:t>Word Labs  •  wordlabs.app  •  Root: 'kind' = caring, gentle, or type</a:t>
+              <a:t>Word Labs  •  wordlabs.app  •  Root: 'kind' = friendly, caring, gentle</a:t>
             </a:r>
             <a:endParaRPr lang="en-US" sz="800" dirty="0"/>
           </a:p>
@@ -36095,7 +36095,7 @@
                 <a:ea typeface="Calibri" pitchFamily="34" charset="-122"/>
                 <a:cs typeface="Calibri" pitchFamily="34" charset="-120"/>
               </a:rPr>
-              <a:t>1.  The word 'unkind' contains the prefix 'un', which means 'not'.</a:t>
+              <a:t>1.  'Kindly' is an adverb meaning done in a caring or gentle way.</a:t>
             </a:r>
             <a:endParaRPr lang="en-US" sz="1300" dirty="0"/>
           </a:p>
@@ -36234,7 +36234,7 @@
                 <a:ea typeface="Calibri" pitchFamily="34" charset="-122"/>
                 <a:cs typeface="Calibri" pitchFamily="34" charset="-120"/>
               </a:rPr>
-              <a:t>2.  The suffix '-ness' in 'kindness' changes the word into a verb.</a:t>
+              <a:t>2.  The word 'unkind' uses the prefix 'un' meaning 'not'.</a:t>
             </a:r>
             <a:endParaRPr lang="en-US" sz="1300" dirty="0"/>
           </a:p>
@@ -36257,11 +36257,11 @@
             </a:avLst>
           </a:prstGeom>
           <a:solidFill>
-            <a:srgbClr val="FEE2E2"/>
-          </a:solidFill>
-          <a:ln w="12700">
-            <a:solidFill>
-              <a:srgbClr val="DC2626"/>
+            <a:srgbClr val="DCFCE7"/>
+          </a:solidFill>
+          <a:ln w="12700">
+            <a:solidFill>
+              <a:srgbClr val="16A34A"/>
             </a:solidFill>
             <a:prstDash val="solid"/>
           </a:ln>
@@ -36294,13 +36294,13 @@
             <a:r>
               <a:rPr lang="en-US" sz="1100" b="1" dirty="0">
                 <a:solidFill>
-                  <a:srgbClr val="DC2626"/>
+                  <a:srgbClr val="16A34A"/>
                 </a:solidFill>
                 <a:latin typeface="Trebuchet MS" pitchFamily="34" charset="0"/>
                 <a:ea typeface="Trebuchet MS" pitchFamily="34" charset="-122"/>
                 <a:cs typeface="Trebuchet MS" pitchFamily="34" charset="-120"/>
               </a:rPr>
-              <a:t>FALSE</a:t>
+              <a:t>TRUE</a:t>
             </a:r>
             <a:endParaRPr lang="en-US" sz="1100" dirty="0"/>
           </a:p>
@@ -36373,7 +36373,7 @@
                 <a:ea typeface="Calibri" pitchFamily="34" charset="-122"/>
                 <a:cs typeface="Calibri" pitchFamily="34" charset="-120"/>
               </a:rPr>
-              <a:t>3.  The word 'kindly' uses the suffix '-ly' to make it an adverb.</a:t>
+              <a:t>3.  'Kindness' is formed by adding the suffix '-ness' to the root 'kind'.</a:t>
             </a:r>
             <a:endParaRPr lang="en-US" sz="1300" dirty="0"/>
           </a:p>
@@ -36512,7 +36512,7 @@
                 <a:ea typeface="Calibri" pitchFamily="34" charset="-122"/>
                 <a:cs typeface="Calibri" pitchFamily="34" charset="-120"/>
               </a:rPr>
-              <a:t>4.  The root 'kind' can mean both 'caring' and 'type or group'.</a:t>
+              <a:t>4.  The root 'kind' comes from the French language.</a:t>
             </a:r>
             <a:endParaRPr lang="en-US" sz="1300" dirty="0"/>
           </a:p>
@@ -36535,11 +36535,11 @@
             </a:avLst>
           </a:prstGeom>
           <a:solidFill>
-            <a:srgbClr val="DCFCE7"/>
-          </a:solidFill>
-          <a:ln w="12700">
-            <a:solidFill>
-              <a:srgbClr val="16A34A"/>
+            <a:srgbClr val="FEE2E2"/>
+          </a:solidFill>
+          <a:ln w="12700">
+            <a:solidFill>
+              <a:srgbClr val="DC2626"/>
             </a:solidFill>
             <a:prstDash val="solid"/>
           </a:ln>
@@ -36572,13 +36572,13 @@
             <a:r>
               <a:rPr lang="en-US" sz="1100" b="1" dirty="0">
                 <a:solidFill>
-                  <a:srgbClr val="16A34A"/>
+                  <a:srgbClr val="DC2626"/>
                 </a:solidFill>
                 <a:latin typeface="Trebuchet MS" pitchFamily="34" charset="0"/>
                 <a:ea typeface="Trebuchet MS" pitchFamily="34" charset="-122"/>
                 <a:cs typeface="Trebuchet MS" pitchFamily="34" charset="-120"/>
               </a:rPr>
-              <a:t>TRUE</a:t>
+              <a:t>FALSE</a:t>
             </a:r>
             <a:endParaRPr lang="en-US" sz="1100" dirty="0"/>
           </a:p>
@@ -36651,7 +36651,7 @@
                 <a:ea typeface="Calibri" pitchFamily="34" charset="-122"/>
                 <a:cs typeface="Calibri" pitchFamily="34" charset="-120"/>
               </a:rPr>
-              <a:t>5.  The word 'mankind' means only women in the world.</a:t>
+              <a:t>5.  'Mankind' contains the root 'kind' meaning caring and gentle.</a:t>
             </a:r>
             <a:endParaRPr lang="en-US" sz="1300" dirty="0"/>
           </a:p>
@@ -37009,7 +37009,7 @@
                 <a:ea typeface="Calibri" pitchFamily="34" charset="-122"/>
                 <a:cs typeface="Calibri" pitchFamily="34" charset="-120"/>
               </a:rPr>
-              <a:t>Word Labs  •  wordlabs.app  •  Root: 'kind' = caring, gentle, or type</a:t>
+              <a:t>Word Labs  •  wordlabs.app  •  Root: 'kind' = friendly, caring, gentle</a:t>
             </a:r>
             <a:endParaRPr lang="en-US" sz="800" dirty="0"/>
           </a:p>
@@ -37146,7 +37146,7 @@
                 <a:ea typeface="Trebuchet MS" pitchFamily="34" charset="-122"/>
                 <a:cs typeface="Trebuchet MS" pitchFamily="34" charset="-120"/>
               </a:rPr>
-              <a:t>caring, gentle, or type</a:t>
+              <a:t>friendly, caring, gentle</a:t>
             </a:r>
             <a:endParaRPr lang="en-US" sz="2000" dirty="0"/>
           </a:p>
@@ -37185,7 +37185,7 @@
                 <a:ea typeface="Calibri" pitchFamily="34" charset="-122"/>
                 <a:cs typeface="Calibri" pitchFamily="34" charset="-120"/>
               </a:rPr>
-              <a:t>Origin: Latin: genus</a:t>
+              <a:t>Origin: Latin: natura</a:t>
             </a:r>
             <a:endParaRPr lang="en-US" sz="1100" dirty="0"/>
           </a:p>
@@ -37290,7 +37290,7 @@
                 <a:ea typeface="Trebuchet MS" pitchFamily="34" charset="-122"/>
                 <a:cs typeface="Trebuchet MS" pitchFamily="34" charset="-120"/>
               </a:rPr>
-              <a:t>kindness</a:t>
+              <a:t>kind</a:t>
             </a:r>
             <a:endParaRPr lang="en-US" sz="1300" dirty="0"/>
           </a:p>
@@ -37356,7 +37356,7 @@
                 <a:ea typeface="Trebuchet MS" pitchFamily="34" charset="-122"/>
                 <a:cs typeface="Trebuchet MS" pitchFamily="34" charset="-120"/>
               </a:rPr>
-              <a:t>kindly</a:t>
+              <a:t>kindness</a:t>
             </a:r>
             <a:endParaRPr lang="en-US" sz="1300" dirty="0"/>
           </a:p>
@@ -37422,7 +37422,7 @@
                 <a:ea typeface="Trebuchet MS" pitchFamily="34" charset="-122"/>
                 <a:cs typeface="Trebuchet MS" pitchFamily="34" charset="-120"/>
               </a:rPr>
-              <a:t>kinder</a:t>
+              <a:t>kindly</a:t>
             </a:r>
             <a:endParaRPr lang="en-US" sz="1300" dirty="0"/>
           </a:p>
@@ -37488,7 +37488,7 @@
                 <a:ea typeface="Trebuchet MS" pitchFamily="34" charset="-122"/>
                 <a:cs typeface="Trebuchet MS" pitchFamily="34" charset="-120"/>
               </a:rPr>
-              <a:t>kindest</a:t>
+              <a:t>unkind</a:t>
             </a:r>
             <a:endParaRPr lang="en-US" sz="1300" dirty="0"/>
           </a:p>
@@ -37554,7 +37554,7 @@
                 <a:ea typeface="Trebuchet MS" pitchFamily="34" charset="-122"/>
                 <a:cs typeface="Trebuchet MS" pitchFamily="34" charset="-120"/>
               </a:rPr>
-              <a:t>unkind</a:t>
+              <a:t>kinder</a:t>
             </a:r>
             <a:endParaRPr lang="en-US" sz="1300" dirty="0"/>
           </a:p>
@@ -37620,7 +37620,7 @@
                 <a:ea typeface="Trebuchet MS" pitchFamily="34" charset="-122"/>
                 <a:cs typeface="Trebuchet MS" pitchFamily="34" charset="-120"/>
               </a:rPr>
-              <a:t>mankind</a:t>
+              <a:t>kindest</a:t>
             </a:r>
             <a:endParaRPr lang="en-US" sz="1300" dirty="0"/>
           </a:p>
@@ -37686,7 +37686,7 @@
                 <a:ea typeface="Trebuchet MS" pitchFamily="34" charset="-122"/>
                 <a:cs typeface="Trebuchet MS" pitchFamily="34" charset="-120"/>
               </a:rPr>
-              <a:t>kindhearted</a:t>
+              <a:t>mankind</a:t>
             </a:r>
             <a:endParaRPr lang="en-US" sz="1300" dirty="0"/>
           </a:p>
@@ -37978,7 +37978,7 @@
                 <a:ea typeface="Calibri" pitchFamily="34" charset="-122"/>
                 <a:cs typeface="Calibri" pitchFamily="34" charset="-120"/>
               </a:rPr>
-              <a:t>Word Labs  •  wordlabs.app  •  Root: 'kind' = caring, gentle, or type</a:t>
+              <a:t>Word Labs  •  wordlabs.app  •  Root: 'kind' = friendly, caring, gentle</a:t>
             </a:r>
             <a:endParaRPr lang="en-US" sz="800" dirty="0"/>
           </a:p>
@@ -38471,7 +38471,7 @@
                 <a:ea typeface="Trebuchet MS" pitchFamily="34" charset="-122"/>
                 <a:cs typeface="Trebuchet MS" pitchFamily="34" charset="-120"/>
               </a:rPr>
-              <a:t>re-</a:t>
+              <a:t>man-</a:t>
             </a:r>
             <a:endParaRPr lang="en-US" sz="1300" dirty="0"/>
           </a:p>
@@ -38624,7 +38624,7 @@
                 <a:ea typeface="Trebuchet MS" pitchFamily="34" charset="-122"/>
                 <a:cs typeface="Trebuchet MS" pitchFamily="34" charset="-120"/>
               </a:rPr>
-              <a:t>fore-</a:t>
+              <a:t>womankind-</a:t>
             </a:r>
             <a:endParaRPr lang="en-US" sz="1300" dirty="0"/>
           </a:p>
@@ -38777,7 +38777,7 @@
                 <a:ea typeface="Trebuchet MS" pitchFamily="34" charset="-122"/>
                 <a:cs typeface="Trebuchet MS" pitchFamily="34" charset="-120"/>
               </a:rPr>
-              <a:t>man-</a:t>
+              <a:t>re-</a:t>
             </a:r>
             <a:endParaRPr lang="en-US" sz="1300" dirty="0"/>
           </a:p>
@@ -38930,7 +38930,7 @@
                 <a:ea typeface="Trebuchet MS" pitchFamily="34" charset="-122"/>
                 <a:cs typeface="Trebuchet MS" pitchFamily="34" charset="-120"/>
               </a:rPr>
-              <a:t>out-</a:t>
+              <a:t>all-</a:t>
             </a:r>
             <a:endParaRPr lang="en-US" sz="1300" dirty="0"/>
           </a:p>
@@ -39019,7 +39019,7 @@
                 <a:ea typeface="Trebuchet MS" pitchFamily="34" charset="-122"/>
                 <a:cs typeface="Trebuchet MS" pitchFamily="34" charset="-120"/>
               </a:rPr>
-              <a:t>-hearted</a:t>
+              <a:t>-red</a:t>
             </a:r>
             <a:endParaRPr lang="en-US" sz="1300" dirty="0"/>
           </a:p>
@@ -39460,7 +39460,7 @@
                 <a:ea typeface="Trebuchet MS" pitchFamily="34" charset="-122"/>
                 <a:cs typeface="Trebuchet MS" pitchFamily="34" charset="-120"/>
               </a:rPr>
-              <a:t>kindness</a:t>
+              <a:t>kind</a:t>
             </a:r>
             <a:endParaRPr lang="en-US" sz="1400" dirty="0"/>
           </a:p>
@@ -39752,7 +39752,7 @@
                 <a:ea typeface="Calibri" pitchFamily="34" charset="-122"/>
                 <a:cs typeface="Calibri" pitchFamily="34" charset="-120"/>
               </a:rPr>
-              <a:t>Word Labs  •  wordlabs.app  •  Root: 'kind' = caring, gentle, or type</a:t>
+              <a:t>Word Labs  •  wordlabs.app  •  Root: 'kind' = friendly, caring, gentle</a:t>
             </a:r>
             <a:endParaRPr lang="en-US" sz="800" dirty="0"/>
           </a:p>
@@ -39864,7 +39864,7 @@
                 <a:ea typeface="Trebuchet MS" pitchFamily="34" charset="-122"/>
                 <a:cs typeface="Trebuchet MS" pitchFamily="34" charset="-120"/>
               </a:rPr>
-              <a:t>kindness</a:t>
+              <a:t>kind</a:t>
             </a:r>
             <a:endParaRPr lang="en-US" sz="1200" dirty="0"/>
           </a:p>
@@ -39930,7 +39930,7 @@
                 <a:ea typeface="Calibri" pitchFamily="34" charset="-122"/>
                 <a:cs typeface="Calibri" pitchFamily="34" charset="-120"/>
               </a:rPr>
-              <a:t>More caring and gentle than someone or something else.</a:t>
+              <a:t>In a gentle, caring way.</a:t>
             </a:r>
             <a:endParaRPr lang="en-US" sz="1200" dirty="0"/>
           </a:p>
@@ -40003,7 +40003,7 @@
                 <a:ea typeface="Trebuchet MS" pitchFamily="34" charset="-122"/>
                 <a:cs typeface="Trebuchet MS" pitchFamily="34" charset="-120"/>
               </a:rPr>
-              <a:t>kindly</a:t>
+              <a:t>kindness</a:t>
             </a:r>
             <a:endParaRPr lang="en-US" sz="1200" dirty="0"/>
           </a:p>
@@ -40069,7 +40069,7 @@
                 <a:ea typeface="Calibri" pitchFamily="34" charset="-122"/>
                 <a:cs typeface="Calibri" pitchFamily="34" charset="-120"/>
               </a:rPr>
-              <a:t>The most caring and gentle of all.</a:t>
+              <a:t>Not caring or gentle; mean towards others.</a:t>
             </a:r>
             <a:endParaRPr lang="en-US" sz="1200" dirty="0"/>
           </a:p>
@@ -40142,7 +40142,7 @@
                 <a:ea typeface="Trebuchet MS" pitchFamily="34" charset="-122"/>
                 <a:cs typeface="Trebuchet MS" pitchFamily="34" charset="-120"/>
               </a:rPr>
-              <a:t>kinder</a:t>
+              <a:t>kindly</a:t>
             </a:r>
             <a:endParaRPr lang="en-US" sz="1200" dirty="0"/>
           </a:p>
@@ -40208,7 +40208,7 @@
                 <a:ea typeface="Calibri" pitchFamily="34" charset="-122"/>
                 <a:cs typeface="Calibri" pitchFamily="34" charset="-120"/>
               </a:rPr>
-              <a:t>All human beings thought of as one group.</a:t>
+              <a:t>The most caring and gentle of all.</a:t>
             </a:r>
             <a:endParaRPr lang="en-US" sz="1200" dirty="0"/>
           </a:p>
@@ -40281,7 +40281,7 @@
                 <a:ea typeface="Trebuchet MS" pitchFamily="34" charset="-122"/>
                 <a:cs typeface="Trebuchet MS" pitchFamily="34" charset="-120"/>
               </a:rPr>
-              <a:t>kindest</a:t>
+              <a:t>unkind</a:t>
             </a:r>
             <a:endParaRPr lang="en-US" sz="1200" dirty="0"/>
           </a:p>
@@ -40347,7 +40347,7 @@
                 <a:ea typeface="Calibri" pitchFamily="34" charset="-122"/>
                 <a:cs typeface="Calibri" pitchFamily="34" charset="-120"/>
               </a:rPr>
-              <a:t>The quality of being friendly, generous, and caring towards others.</a:t>
+              <a:t>Being caring and gentle towards others.</a:t>
             </a:r>
             <a:endParaRPr lang="en-US" sz="1200" dirty="0"/>
           </a:p>
@@ -40420,7 +40420,7 @@
                 <a:ea typeface="Trebuchet MS" pitchFamily="34" charset="-122"/>
                 <a:cs typeface="Trebuchet MS" pitchFamily="34" charset="-120"/>
               </a:rPr>
-              <a:t>unkind</a:t>
+              <a:t>kinder</a:t>
             </a:r>
             <a:endParaRPr lang="en-US" sz="1200" dirty="0"/>
           </a:p>
@@ -40486,7 +40486,7 @@
                 <a:ea typeface="Calibri" pitchFamily="34" charset="-122"/>
                 <a:cs typeface="Calibri" pitchFamily="34" charset="-120"/>
               </a:rPr>
-              <a:t>Having a warm, caring nature and always willing to help others.</a:t>
+              <a:t>All human beings; people as a group.</a:t>
             </a:r>
             <a:endParaRPr lang="en-US" sz="1200" dirty="0"/>
           </a:p>
@@ -40559,7 +40559,7 @@
                 <a:ea typeface="Trebuchet MS" pitchFamily="34" charset="-122"/>
                 <a:cs typeface="Trebuchet MS" pitchFamily="34" charset="-120"/>
               </a:rPr>
-              <a:t>mankind</a:t>
+              <a:t>kindest</a:t>
             </a:r>
             <a:endParaRPr lang="en-US" sz="1200" dirty="0"/>
           </a:p>
@@ -40625,7 +40625,7 @@
                 <a:ea typeface="Calibri" pitchFamily="34" charset="-122"/>
                 <a:cs typeface="Calibri" pitchFamily="34" charset="-120"/>
               </a:rPr>
-              <a:t>Not caring or gentle; behaving in a way that hurts others' feelings.</a:t>
+              <a:t>More gentle and caring than someone or something else.</a:t>
             </a:r>
             <a:endParaRPr lang="en-US" sz="1200" dirty="0"/>
           </a:p>
@@ -40698,7 +40698,7 @@
                 <a:ea typeface="Trebuchet MS" pitchFamily="34" charset="-122"/>
                 <a:cs typeface="Trebuchet MS" pitchFamily="34" charset="-120"/>
               </a:rPr>
-              <a:t>kindhearted</a:t>
+              <a:t>mankind</a:t>
             </a:r>
             <a:endParaRPr lang="en-US" sz="1200" dirty="0"/>
           </a:p>
@@ -40764,7 +40764,7 @@
                 <a:ea typeface="Calibri" pitchFamily="34" charset="-122"/>
                 <a:cs typeface="Calibri" pitchFamily="34" charset="-120"/>
               </a:rPr>
-              <a:t>In a warm and gentle way; showing care for others.</a:t>
+              <a:t>The quality of being friendly and generous to others.</a:t>
             </a:r>
             <a:endParaRPr lang="en-US" sz="1200" dirty="0"/>
           </a:p>
@@ -41056,7 +41056,7 @@
                 <a:ea typeface="Calibri" pitchFamily="34" charset="-122"/>
                 <a:cs typeface="Calibri" pitchFamily="34" charset="-120"/>
               </a:rPr>
-              <a:t>Word Labs  •  wordlabs.app  •  Root: 'kind' = caring, gentle, or type</a:t>
+              <a:t>Word Labs  •  wordlabs.app  •  Root: 'kind' = friendly, caring, gentle</a:t>
             </a:r>
             <a:endParaRPr lang="en-US" sz="800" dirty="0"/>
           </a:p>
@@ -41259,7 +41259,7 @@
                 <a:ea typeface="Calibri" pitchFamily="34" charset="-122"/>
                 <a:cs typeface="Calibri" pitchFamily="34" charset="-120"/>
               </a:rPr>
-              <a:t>She showed great kindness by helping her classmate pick up all the books that had fallen on the floor.</a:t>
+              <a:t>The teacher always spoke kindly to students who were struggling with their work.</a:t>
             </a:r>
             <a:endParaRPr lang="en-US" sz="1500" dirty="0"/>
           </a:p>
@@ -41423,7 +41423,7 @@
                 <a:ea typeface="Calibri" pitchFamily="34" charset="-122"/>
                 <a:cs typeface="Calibri" pitchFamily="34" charset="-120"/>
               </a:rPr>
-              <a:t>It is unkind to leave someone out of a game just because they are new to the school.</a:t>
+              <a:t>Showing kindness to others is one of the most important things you can do at school.</a:t>
             </a:r>
             <a:endParaRPr lang="en-US" sz="1500" dirty="0"/>
           </a:p>
@@ -41587,7 +41587,7 @@
                 <a:ea typeface="Calibri" pitchFamily="34" charset="-122"/>
                 <a:cs typeface="Calibri" pitchFamily="34" charset="-120"/>
               </a:rPr>
-              <a:t>Humankind has always looked up at the stars and wondered what might be out there in space.</a:t>
+              <a:t>It is unkind to leave someone out of a game just because they are new to the class.</a:t>
             </a:r>
             <a:endParaRPr lang="en-US" sz="1500" dirty="0"/>
           </a:p>
